--- a/assets/lessons/lectures/astronomy/gravity.pptx
+++ b/assets/lessons/lectures/astronomy/gravity.pptx
@@ -2987,67 +2987,6 @@
       </p:sp>
       <p:sp>
         <p:nvSpPr>
-          <p:cNvPr id="3" name="">
-            <a:extLst xmlns:a="http://schemas.openxmlformats.org/drawingml/2006/main">
-              <a:ext uri="{FF2B5EF4-FFF2-40B4-BE49-F238E27FC236}">
-                <a16:creationId xmlns:a16="http://schemas.microsoft.com/office/drawing/2014/main" id="{CB3C38E0-24EB-4110-9E48-5D8F18D5B712}"/>
-              </a:ext>
-            </a:extLst>
-          </p:cNvPr>
-          <p:cNvSpPr>
-            <a:spLocks xmlns:a="http://schemas.openxmlformats.org/drawingml/2006/main" noGrp="1"/>
-          </p:cNvSpPr>
-          <p:nvPr/>
-        </p:nvSpPr>
-        <p:spPr>
-          <a:xfrm xmlns:a="http://schemas.openxmlformats.org/drawingml/2006/main">
-            <a:off x="228600" y="76200"/>
-            <a:ext cx="8686800" cy="228600"/>
-          </a:xfrm>
-          <a:prstGeom xmlns:a="http://schemas.openxmlformats.org/drawingml/2006/main" prst="rect">
-            <a:avLst/>
-          </a:prstGeom>
-          <a:noFill xmlns:a="http://schemas.openxmlformats.org/drawingml/2006/main"/>
-          <a:ln xmlns:a="http://schemas.openxmlformats.org/drawingml/2006/main" w="0">
-            <a:noFill/>
-          </a:ln>
-        </p:spPr>
-        <p:txBody>
-          <a:bodyPr xmlns:a="http://schemas.openxmlformats.org/drawingml/2006/main" wrap="none" lIns="0" tIns="0" rIns="0" bIns="0" anchor="t">
-            <a:noAutofit/>
-          </a:bodyPr>
-          <a:lstStyle xmlns:a="http://schemas.openxmlformats.org/drawingml/2006/main"/>
-          <a:p xmlns:a="http://schemas.openxmlformats.org/drawingml/2006/main">
-            <a:pPr>
-              <a:lnSpc>
-                <a:spcPct val="100000"/>
-              </a:lnSpc>
-              <a:buNone/>
-              <a:defRPr sz="1200" b="1" i="0">
-                <a:solidFill>
-                  <a:srgbClr val="002855"/>
-                </a:solidFill>
-                <a:latin typeface="Arial"/>
-                <a:ea typeface="Arial"/>
-                <a:cs typeface="Arial"/>
-              </a:defRPr>
-            </a:pPr>
-            <a:r>
-              <a:rPr sz="1200" b="1" i="0">
-                <a:solidFill>
-                  <a:srgbClr val="002855"/>
-                </a:solidFill>
-                <a:latin typeface="Arial"/>
-                <a:ea typeface="Arial"/>
-                <a:cs typeface="Arial"/>
-              </a:rPr>
-              <a:t>WVU DSPIRA</a:t>
-            </a:r>
-          </a:p>
-        </p:txBody>
-      </p:sp>
-      <p:sp>
-        <p:nvSpPr>
           <p:cNvPr id="4" name="">
             <a:extLst xmlns:a="http://schemas.openxmlformats.org/drawingml/2006/main">
               <a:ext uri="{FF2B5EF4-FFF2-40B4-BE49-F238E27FC236}">
@@ -3164,6 +3103,156 @@
                 <a:cs typeface="Arial"/>
               </a:rPr>
               <a:t>1 of 27</a:t>
+            </a:r>
+          </a:p>
+        </p:txBody>
+      </p:sp>
+      <p:sp>
+        <p:nvSpPr>
+          <p:cNvPr id="7" name="WVU DSPIRA navy band"/>
+          <p:cNvSpPr>
+            <a:spLocks xmlns:a="http://schemas.openxmlformats.org/drawingml/2006/main" noGrp="1"/>
+          </p:cNvSpPr>
+          <p:nvPr/>
+        </p:nvSpPr>
+        <p:spPr>
+          <a:xfrm xmlns:a="http://schemas.openxmlformats.org/drawingml/2006/main">
+            <a:off x="0" y="0"/>
+            <a:ext cx="9144000" cy="323850"/>
+          </a:xfrm>
+          <a:prstGeom xmlns:a="http://schemas.openxmlformats.org/drawingml/2006/main" prst="rect">
+            <a:avLst/>
+          </a:prstGeom>
+          <a:solidFill xmlns:a="http://schemas.openxmlformats.org/drawingml/2006/main">
+            <a:srgbClr val="002855"/>
+          </a:solidFill>
+          <a:ln xmlns:a="http://schemas.openxmlformats.org/drawingml/2006/main" w="0">
+            <a:noFill/>
+          </a:ln>
+        </p:spPr>
+      </p:sp>
+      <p:sp>
+        <p:nvSpPr>
+          <p:cNvPr id="8" name="WVU DSPIRA gold rule"/>
+          <p:cNvSpPr>
+            <a:spLocks xmlns:a="http://schemas.openxmlformats.org/drawingml/2006/main" noGrp="1"/>
+          </p:cNvSpPr>
+          <p:nvPr/>
+        </p:nvSpPr>
+        <p:spPr>
+          <a:xfrm xmlns:a="http://schemas.openxmlformats.org/drawingml/2006/main">
+            <a:off x="0" y="323850"/>
+            <a:ext cx="9144000" cy="19050"/>
+          </a:xfrm>
+          <a:prstGeom xmlns:a="http://schemas.openxmlformats.org/drawingml/2006/main" prst="rect">
+            <a:avLst/>
+          </a:prstGeom>
+          <a:solidFill xmlns:a="http://schemas.openxmlformats.org/drawingml/2006/main">
+            <a:srgbClr val="EEAA00"/>
+          </a:solidFill>
+          <a:ln xmlns:a="http://schemas.openxmlformats.org/drawingml/2006/main" w="0">
+            <a:noFill/>
+          </a:ln>
+        </p:spPr>
+      </p:sp>
+      <p:sp>
+        <p:nvSpPr>
+          <p:cNvPr id="9" name="WVU DSPIRA name"/>
+          <p:cNvSpPr>
+            <a:spLocks xmlns:a="http://schemas.openxmlformats.org/drawingml/2006/main" noGrp="1"/>
+          </p:cNvSpPr>
+          <p:nvPr/>
+        </p:nvSpPr>
+        <p:spPr>
+          <a:xfrm xmlns:a="http://schemas.openxmlformats.org/drawingml/2006/main">
+            <a:off x="228600" y="19050"/>
+            <a:ext cx="2857500" cy="257175"/>
+          </a:xfrm>
+          <a:prstGeom xmlns:a="http://schemas.openxmlformats.org/drawingml/2006/main" prst="rect">
+            <a:avLst/>
+          </a:prstGeom>
+          <a:noFill xmlns:a="http://schemas.openxmlformats.org/drawingml/2006/main"/>
+          <a:ln xmlns:a="http://schemas.openxmlformats.org/drawingml/2006/main" w="0">
+            <a:noFill/>
+          </a:ln>
+        </p:spPr>
+        <p:txBody>
+          <a:bodyPr xmlns:a="http://schemas.openxmlformats.org/drawingml/2006/main">
+            <a:noAutofit/>
+          </a:bodyPr>
+          <a:lstStyle xmlns:a="http://schemas.openxmlformats.org/drawingml/2006/main"/>
+          <a:p xmlns:a="http://schemas.openxmlformats.org/drawingml/2006/main">
+            <a:pPr>
+              <a:defRPr sz="1600" b="1">
+                <a:solidFill>
+                  <a:srgbClr val="FFFFFF"/>
+                </a:solidFill>
+                <a:latin typeface="Arial"/>
+                <a:ea typeface="Arial"/>
+                <a:cs typeface="Arial"/>
+              </a:defRPr>
+            </a:pPr>
+            <a:r>
+              <a:rPr sz="1600" b="1">
+                <a:solidFill>
+                  <a:srgbClr val="FFFFFF"/>
+                </a:solidFill>
+                <a:latin typeface="Arial"/>
+                <a:ea typeface="Arial"/>
+                <a:cs typeface="Arial"/>
+              </a:rPr>
+              <a:t>WVU DSPIRA</a:t>
+            </a:r>
+          </a:p>
+        </p:txBody>
+      </p:sp>
+      <p:sp>
+        <p:nvSpPr>
+          <p:cNvPr id="10" name="WVU DSPIRA university"/>
+          <p:cNvSpPr>
+            <a:spLocks xmlns:a="http://schemas.openxmlformats.org/drawingml/2006/main" noGrp="1"/>
+          </p:cNvSpPr>
+          <p:nvPr/>
+        </p:nvSpPr>
+        <p:spPr>
+          <a:xfrm xmlns:a="http://schemas.openxmlformats.org/drawingml/2006/main">
+            <a:off x="6286500" y="114300"/>
+            <a:ext cx="2628900" cy="171450"/>
+          </a:xfrm>
+          <a:prstGeom xmlns:a="http://schemas.openxmlformats.org/drawingml/2006/main" prst="rect">
+            <a:avLst/>
+          </a:prstGeom>
+          <a:noFill xmlns:a="http://schemas.openxmlformats.org/drawingml/2006/main"/>
+          <a:ln xmlns:a="http://schemas.openxmlformats.org/drawingml/2006/main" w="0">
+            <a:noFill/>
+          </a:ln>
+        </p:spPr>
+        <p:txBody>
+          <a:bodyPr xmlns:a="http://schemas.openxmlformats.org/drawingml/2006/main">
+            <a:noAutofit/>
+          </a:bodyPr>
+          <a:lstStyle xmlns:a="http://schemas.openxmlformats.org/drawingml/2006/main"/>
+          <a:p xmlns:a="http://schemas.openxmlformats.org/drawingml/2006/main">
+            <a:pPr algn="r">
+              <a:defRPr sz="900">
+                <a:solidFill>
+                  <a:srgbClr val="FFFFFF"/>
+                </a:solidFill>
+                <a:latin typeface="Arial"/>
+                <a:ea typeface="Arial"/>
+                <a:cs typeface="Arial"/>
+              </a:defRPr>
+            </a:pPr>
+            <a:r>
+              <a:rPr sz="900">
+                <a:solidFill>
+                  <a:srgbClr val="FFFFFF"/>
+                </a:solidFill>
+                <a:latin typeface="Arial"/>
+                <a:ea typeface="Arial"/>
+                <a:cs typeface="Arial"/>
+              </a:rPr>
+              <a:t>WEST VIRGINIA UNIVERSITY</a:t>
             </a:r>
           </a:p>
         </p:txBody>
@@ -4258,67 +4347,6 @@
       </p:sp>
       <p:sp>
         <p:nvSpPr>
-          <p:cNvPr id="19" name="">
-            <a:extLst xmlns:a="http://schemas.openxmlformats.org/drawingml/2006/main">
-              <a:ext uri="{FF2B5EF4-FFF2-40B4-BE49-F238E27FC236}">
-                <a16:creationId xmlns:a16="http://schemas.microsoft.com/office/drawing/2014/main" id="{E119EFFA-2ABD-4505-8C14-AD71A0E889F3}"/>
-              </a:ext>
-            </a:extLst>
-          </p:cNvPr>
-          <p:cNvSpPr>
-            <a:spLocks xmlns:a="http://schemas.openxmlformats.org/drawingml/2006/main" noGrp="1"/>
-          </p:cNvSpPr>
-          <p:nvPr/>
-        </p:nvSpPr>
-        <p:spPr>
-          <a:xfrm xmlns:a="http://schemas.openxmlformats.org/drawingml/2006/main">
-            <a:off x="228600" y="76200"/>
-            <a:ext cx="8686800" cy="228600"/>
-          </a:xfrm>
-          <a:prstGeom xmlns:a="http://schemas.openxmlformats.org/drawingml/2006/main" prst="rect">
-            <a:avLst/>
-          </a:prstGeom>
-          <a:noFill xmlns:a="http://schemas.openxmlformats.org/drawingml/2006/main"/>
-          <a:ln xmlns:a="http://schemas.openxmlformats.org/drawingml/2006/main" w="0">
-            <a:noFill/>
-          </a:ln>
-        </p:spPr>
-        <p:txBody>
-          <a:bodyPr xmlns:a="http://schemas.openxmlformats.org/drawingml/2006/main" wrap="none" lIns="0" tIns="0" rIns="0" bIns="0" anchor="t">
-            <a:noAutofit/>
-          </a:bodyPr>
-          <a:lstStyle xmlns:a="http://schemas.openxmlformats.org/drawingml/2006/main"/>
-          <a:p xmlns:a="http://schemas.openxmlformats.org/drawingml/2006/main">
-            <a:pPr>
-              <a:lnSpc>
-                <a:spcPct val="100000"/>
-              </a:lnSpc>
-              <a:buNone/>
-              <a:defRPr sz="1200" b="1" i="0">
-                <a:solidFill>
-                  <a:srgbClr val="002855"/>
-                </a:solidFill>
-                <a:latin typeface="Arial"/>
-                <a:ea typeface="Arial"/>
-                <a:cs typeface="Arial"/>
-              </a:defRPr>
-            </a:pPr>
-            <a:r>
-              <a:rPr sz="1200" b="1" i="0">
-                <a:solidFill>
-                  <a:srgbClr val="002855"/>
-                </a:solidFill>
-                <a:latin typeface="Arial"/>
-                <a:ea typeface="Arial"/>
-                <a:cs typeface="Arial"/>
-              </a:rPr>
-              <a:t>WVU DSPIRA</a:t>
-            </a:r>
-          </a:p>
-        </p:txBody>
-      </p:sp>
-      <p:sp>
-        <p:nvSpPr>
           <p:cNvPr id="20" name="">
             <a:extLst xmlns:a="http://schemas.openxmlformats.org/drawingml/2006/main">
               <a:ext uri="{FF2B5EF4-FFF2-40B4-BE49-F238E27FC236}">
@@ -4435,6 +4463,156 @@
                 <a:cs typeface="Arial"/>
               </a:rPr>
               <a:t>10 of 27</a:t>
+            </a:r>
+          </a:p>
+        </p:txBody>
+      </p:sp>
+      <p:sp>
+        <p:nvSpPr>
+          <p:cNvPr id="23" name="WVU DSPIRA navy band"/>
+          <p:cNvSpPr>
+            <a:spLocks xmlns:a="http://schemas.openxmlformats.org/drawingml/2006/main" noGrp="1"/>
+          </p:cNvSpPr>
+          <p:nvPr/>
+        </p:nvSpPr>
+        <p:spPr>
+          <a:xfrm xmlns:a="http://schemas.openxmlformats.org/drawingml/2006/main">
+            <a:off x="0" y="0"/>
+            <a:ext cx="9144000" cy="323850"/>
+          </a:xfrm>
+          <a:prstGeom xmlns:a="http://schemas.openxmlformats.org/drawingml/2006/main" prst="rect">
+            <a:avLst/>
+          </a:prstGeom>
+          <a:solidFill xmlns:a="http://schemas.openxmlformats.org/drawingml/2006/main">
+            <a:srgbClr val="002855"/>
+          </a:solidFill>
+          <a:ln xmlns:a="http://schemas.openxmlformats.org/drawingml/2006/main" w="0">
+            <a:noFill/>
+          </a:ln>
+        </p:spPr>
+      </p:sp>
+      <p:sp>
+        <p:nvSpPr>
+          <p:cNvPr id="24" name="WVU DSPIRA gold rule"/>
+          <p:cNvSpPr>
+            <a:spLocks xmlns:a="http://schemas.openxmlformats.org/drawingml/2006/main" noGrp="1"/>
+          </p:cNvSpPr>
+          <p:nvPr/>
+        </p:nvSpPr>
+        <p:spPr>
+          <a:xfrm xmlns:a="http://schemas.openxmlformats.org/drawingml/2006/main">
+            <a:off x="0" y="323850"/>
+            <a:ext cx="9144000" cy="19050"/>
+          </a:xfrm>
+          <a:prstGeom xmlns:a="http://schemas.openxmlformats.org/drawingml/2006/main" prst="rect">
+            <a:avLst/>
+          </a:prstGeom>
+          <a:solidFill xmlns:a="http://schemas.openxmlformats.org/drawingml/2006/main">
+            <a:srgbClr val="EEAA00"/>
+          </a:solidFill>
+          <a:ln xmlns:a="http://schemas.openxmlformats.org/drawingml/2006/main" w="0">
+            <a:noFill/>
+          </a:ln>
+        </p:spPr>
+      </p:sp>
+      <p:sp>
+        <p:nvSpPr>
+          <p:cNvPr id="25" name="WVU DSPIRA name"/>
+          <p:cNvSpPr>
+            <a:spLocks xmlns:a="http://schemas.openxmlformats.org/drawingml/2006/main" noGrp="1"/>
+          </p:cNvSpPr>
+          <p:nvPr/>
+        </p:nvSpPr>
+        <p:spPr>
+          <a:xfrm xmlns:a="http://schemas.openxmlformats.org/drawingml/2006/main">
+            <a:off x="228600" y="19050"/>
+            <a:ext cx="2857500" cy="257175"/>
+          </a:xfrm>
+          <a:prstGeom xmlns:a="http://schemas.openxmlformats.org/drawingml/2006/main" prst="rect">
+            <a:avLst/>
+          </a:prstGeom>
+          <a:noFill xmlns:a="http://schemas.openxmlformats.org/drawingml/2006/main"/>
+          <a:ln xmlns:a="http://schemas.openxmlformats.org/drawingml/2006/main" w="0">
+            <a:noFill/>
+          </a:ln>
+        </p:spPr>
+        <p:txBody>
+          <a:bodyPr xmlns:a="http://schemas.openxmlformats.org/drawingml/2006/main">
+            <a:noAutofit/>
+          </a:bodyPr>
+          <a:lstStyle xmlns:a="http://schemas.openxmlformats.org/drawingml/2006/main"/>
+          <a:p xmlns:a="http://schemas.openxmlformats.org/drawingml/2006/main">
+            <a:pPr>
+              <a:defRPr sz="1600" b="1">
+                <a:solidFill>
+                  <a:srgbClr val="FFFFFF"/>
+                </a:solidFill>
+                <a:latin typeface="Arial"/>
+                <a:ea typeface="Arial"/>
+                <a:cs typeface="Arial"/>
+              </a:defRPr>
+            </a:pPr>
+            <a:r>
+              <a:rPr sz="1600" b="1">
+                <a:solidFill>
+                  <a:srgbClr val="FFFFFF"/>
+                </a:solidFill>
+                <a:latin typeface="Arial"/>
+                <a:ea typeface="Arial"/>
+                <a:cs typeface="Arial"/>
+              </a:rPr>
+              <a:t>WVU DSPIRA</a:t>
+            </a:r>
+          </a:p>
+        </p:txBody>
+      </p:sp>
+      <p:sp>
+        <p:nvSpPr>
+          <p:cNvPr id="26" name="WVU DSPIRA university"/>
+          <p:cNvSpPr>
+            <a:spLocks xmlns:a="http://schemas.openxmlformats.org/drawingml/2006/main" noGrp="1"/>
+          </p:cNvSpPr>
+          <p:nvPr/>
+        </p:nvSpPr>
+        <p:spPr>
+          <a:xfrm xmlns:a="http://schemas.openxmlformats.org/drawingml/2006/main">
+            <a:off x="6286500" y="114300"/>
+            <a:ext cx="2628900" cy="171450"/>
+          </a:xfrm>
+          <a:prstGeom xmlns:a="http://schemas.openxmlformats.org/drawingml/2006/main" prst="rect">
+            <a:avLst/>
+          </a:prstGeom>
+          <a:noFill xmlns:a="http://schemas.openxmlformats.org/drawingml/2006/main"/>
+          <a:ln xmlns:a="http://schemas.openxmlformats.org/drawingml/2006/main" w="0">
+            <a:noFill/>
+          </a:ln>
+        </p:spPr>
+        <p:txBody>
+          <a:bodyPr xmlns:a="http://schemas.openxmlformats.org/drawingml/2006/main">
+            <a:noAutofit/>
+          </a:bodyPr>
+          <a:lstStyle xmlns:a="http://schemas.openxmlformats.org/drawingml/2006/main"/>
+          <a:p xmlns:a="http://schemas.openxmlformats.org/drawingml/2006/main">
+            <a:pPr algn="r">
+              <a:defRPr sz="900">
+                <a:solidFill>
+                  <a:srgbClr val="FFFFFF"/>
+                </a:solidFill>
+                <a:latin typeface="Arial"/>
+                <a:ea typeface="Arial"/>
+                <a:cs typeface="Arial"/>
+              </a:defRPr>
+            </a:pPr>
+            <a:r>
+              <a:rPr sz="900">
+                <a:solidFill>
+                  <a:srgbClr val="FFFFFF"/>
+                </a:solidFill>
+                <a:latin typeface="Arial"/>
+                <a:ea typeface="Arial"/>
+                <a:cs typeface="Arial"/>
+              </a:rPr>
+              <a:t>WEST VIRGINIA UNIVERSITY</a:t>
             </a:r>
           </a:p>
         </p:txBody>
@@ -5102,67 +5280,6 @@
       </p:sp>
       <p:sp>
         <p:nvSpPr>
-          <p:cNvPr id="12" name="">
-            <a:extLst xmlns:a="http://schemas.openxmlformats.org/drawingml/2006/main">
-              <a:ext uri="{FF2B5EF4-FFF2-40B4-BE49-F238E27FC236}">
-                <a16:creationId xmlns:a16="http://schemas.microsoft.com/office/drawing/2014/main" id="{08FE65C4-5A67-4D8E-91CA-DD5FBBFAF07C}"/>
-              </a:ext>
-            </a:extLst>
-          </p:cNvPr>
-          <p:cNvSpPr>
-            <a:spLocks xmlns:a="http://schemas.openxmlformats.org/drawingml/2006/main" noGrp="1"/>
-          </p:cNvSpPr>
-          <p:nvPr/>
-        </p:nvSpPr>
-        <p:spPr>
-          <a:xfrm xmlns:a="http://schemas.openxmlformats.org/drawingml/2006/main">
-            <a:off x="228600" y="76200"/>
-            <a:ext cx="8686800" cy="228600"/>
-          </a:xfrm>
-          <a:prstGeom xmlns:a="http://schemas.openxmlformats.org/drawingml/2006/main" prst="rect">
-            <a:avLst/>
-          </a:prstGeom>
-          <a:noFill xmlns:a="http://schemas.openxmlformats.org/drawingml/2006/main"/>
-          <a:ln xmlns:a="http://schemas.openxmlformats.org/drawingml/2006/main" w="0">
-            <a:noFill/>
-          </a:ln>
-        </p:spPr>
-        <p:txBody>
-          <a:bodyPr xmlns:a="http://schemas.openxmlformats.org/drawingml/2006/main" wrap="none" lIns="0" tIns="0" rIns="0" bIns="0" anchor="t">
-            <a:noAutofit/>
-          </a:bodyPr>
-          <a:lstStyle xmlns:a="http://schemas.openxmlformats.org/drawingml/2006/main"/>
-          <a:p xmlns:a="http://schemas.openxmlformats.org/drawingml/2006/main">
-            <a:pPr>
-              <a:lnSpc>
-                <a:spcPct val="100000"/>
-              </a:lnSpc>
-              <a:buNone/>
-              <a:defRPr sz="1200" b="1" i="0">
-                <a:solidFill>
-                  <a:srgbClr val="002855"/>
-                </a:solidFill>
-                <a:latin typeface="Arial"/>
-                <a:ea typeface="Arial"/>
-                <a:cs typeface="Arial"/>
-              </a:defRPr>
-            </a:pPr>
-            <a:r>
-              <a:rPr sz="1200" b="1" i="0">
-                <a:solidFill>
-                  <a:srgbClr val="002855"/>
-                </a:solidFill>
-                <a:latin typeface="Arial"/>
-                <a:ea typeface="Arial"/>
-                <a:cs typeface="Arial"/>
-              </a:rPr>
-              <a:t>WVU DSPIRA</a:t>
-            </a:r>
-          </a:p>
-        </p:txBody>
-      </p:sp>
-      <p:sp>
-        <p:nvSpPr>
           <p:cNvPr id="13" name="">
             <a:extLst xmlns:a="http://schemas.openxmlformats.org/drawingml/2006/main">
               <a:ext uri="{FF2B5EF4-FFF2-40B4-BE49-F238E27FC236}">
@@ -5279,6 +5396,156 @@
                 <a:cs typeface="Arial"/>
               </a:rPr>
               <a:t>11 of 27</a:t>
+            </a:r>
+          </a:p>
+        </p:txBody>
+      </p:sp>
+      <p:sp>
+        <p:nvSpPr>
+          <p:cNvPr id="16" name="WVU DSPIRA navy band"/>
+          <p:cNvSpPr>
+            <a:spLocks xmlns:a="http://schemas.openxmlformats.org/drawingml/2006/main" noGrp="1"/>
+          </p:cNvSpPr>
+          <p:nvPr/>
+        </p:nvSpPr>
+        <p:spPr>
+          <a:xfrm xmlns:a="http://schemas.openxmlformats.org/drawingml/2006/main">
+            <a:off x="0" y="0"/>
+            <a:ext cx="9144000" cy="323850"/>
+          </a:xfrm>
+          <a:prstGeom xmlns:a="http://schemas.openxmlformats.org/drawingml/2006/main" prst="rect">
+            <a:avLst/>
+          </a:prstGeom>
+          <a:solidFill xmlns:a="http://schemas.openxmlformats.org/drawingml/2006/main">
+            <a:srgbClr val="002855"/>
+          </a:solidFill>
+          <a:ln xmlns:a="http://schemas.openxmlformats.org/drawingml/2006/main" w="0">
+            <a:noFill/>
+          </a:ln>
+        </p:spPr>
+      </p:sp>
+      <p:sp>
+        <p:nvSpPr>
+          <p:cNvPr id="17" name="WVU DSPIRA gold rule"/>
+          <p:cNvSpPr>
+            <a:spLocks xmlns:a="http://schemas.openxmlformats.org/drawingml/2006/main" noGrp="1"/>
+          </p:cNvSpPr>
+          <p:nvPr/>
+        </p:nvSpPr>
+        <p:spPr>
+          <a:xfrm xmlns:a="http://schemas.openxmlformats.org/drawingml/2006/main">
+            <a:off x="0" y="323850"/>
+            <a:ext cx="9144000" cy="19050"/>
+          </a:xfrm>
+          <a:prstGeom xmlns:a="http://schemas.openxmlformats.org/drawingml/2006/main" prst="rect">
+            <a:avLst/>
+          </a:prstGeom>
+          <a:solidFill xmlns:a="http://schemas.openxmlformats.org/drawingml/2006/main">
+            <a:srgbClr val="EEAA00"/>
+          </a:solidFill>
+          <a:ln xmlns:a="http://schemas.openxmlformats.org/drawingml/2006/main" w="0">
+            <a:noFill/>
+          </a:ln>
+        </p:spPr>
+      </p:sp>
+      <p:sp>
+        <p:nvSpPr>
+          <p:cNvPr id="18" name="WVU DSPIRA name"/>
+          <p:cNvSpPr>
+            <a:spLocks xmlns:a="http://schemas.openxmlformats.org/drawingml/2006/main" noGrp="1"/>
+          </p:cNvSpPr>
+          <p:nvPr/>
+        </p:nvSpPr>
+        <p:spPr>
+          <a:xfrm xmlns:a="http://schemas.openxmlformats.org/drawingml/2006/main">
+            <a:off x="228600" y="19050"/>
+            <a:ext cx="2857500" cy="257175"/>
+          </a:xfrm>
+          <a:prstGeom xmlns:a="http://schemas.openxmlformats.org/drawingml/2006/main" prst="rect">
+            <a:avLst/>
+          </a:prstGeom>
+          <a:noFill xmlns:a="http://schemas.openxmlformats.org/drawingml/2006/main"/>
+          <a:ln xmlns:a="http://schemas.openxmlformats.org/drawingml/2006/main" w="0">
+            <a:noFill/>
+          </a:ln>
+        </p:spPr>
+        <p:txBody>
+          <a:bodyPr xmlns:a="http://schemas.openxmlformats.org/drawingml/2006/main">
+            <a:noAutofit/>
+          </a:bodyPr>
+          <a:lstStyle xmlns:a="http://schemas.openxmlformats.org/drawingml/2006/main"/>
+          <a:p xmlns:a="http://schemas.openxmlformats.org/drawingml/2006/main">
+            <a:pPr>
+              <a:defRPr sz="1600" b="1">
+                <a:solidFill>
+                  <a:srgbClr val="FFFFFF"/>
+                </a:solidFill>
+                <a:latin typeface="Arial"/>
+                <a:ea typeface="Arial"/>
+                <a:cs typeface="Arial"/>
+              </a:defRPr>
+            </a:pPr>
+            <a:r>
+              <a:rPr sz="1600" b="1">
+                <a:solidFill>
+                  <a:srgbClr val="FFFFFF"/>
+                </a:solidFill>
+                <a:latin typeface="Arial"/>
+                <a:ea typeface="Arial"/>
+                <a:cs typeface="Arial"/>
+              </a:rPr>
+              <a:t>WVU DSPIRA</a:t>
+            </a:r>
+          </a:p>
+        </p:txBody>
+      </p:sp>
+      <p:sp>
+        <p:nvSpPr>
+          <p:cNvPr id="19" name="WVU DSPIRA university"/>
+          <p:cNvSpPr>
+            <a:spLocks xmlns:a="http://schemas.openxmlformats.org/drawingml/2006/main" noGrp="1"/>
+          </p:cNvSpPr>
+          <p:nvPr/>
+        </p:nvSpPr>
+        <p:spPr>
+          <a:xfrm xmlns:a="http://schemas.openxmlformats.org/drawingml/2006/main">
+            <a:off x="6286500" y="114300"/>
+            <a:ext cx="2628900" cy="171450"/>
+          </a:xfrm>
+          <a:prstGeom xmlns:a="http://schemas.openxmlformats.org/drawingml/2006/main" prst="rect">
+            <a:avLst/>
+          </a:prstGeom>
+          <a:noFill xmlns:a="http://schemas.openxmlformats.org/drawingml/2006/main"/>
+          <a:ln xmlns:a="http://schemas.openxmlformats.org/drawingml/2006/main" w="0">
+            <a:noFill/>
+          </a:ln>
+        </p:spPr>
+        <p:txBody>
+          <a:bodyPr xmlns:a="http://schemas.openxmlformats.org/drawingml/2006/main">
+            <a:noAutofit/>
+          </a:bodyPr>
+          <a:lstStyle xmlns:a="http://schemas.openxmlformats.org/drawingml/2006/main"/>
+          <a:p xmlns:a="http://schemas.openxmlformats.org/drawingml/2006/main">
+            <a:pPr algn="r">
+              <a:defRPr sz="900">
+                <a:solidFill>
+                  <a:srgbClr val="FFFFFF"/>
+                </a:solidFill>
+                <a:latin typeface="Arial"/>
+                <a:ea typeface="Arial"/>
+                <a:cs typeface="Arial"/>
+              </a:defRPr>
+            </a:pPr>
+            <a:r>
+              <a:rPr sz="900">
+                <a:solidFill>
+                  <a:srgbClr val="FFFFFF"/>
+                </a:solidFill>
+                <a:latin typeface="Arial"/>
+                <a:ea typeface="Arial"/>
+                <a:cs typeface="Arial"/>
+              </a:rPr>
+              <a:t>WEST VIRGINIA UNIVERSITY</a:t>
             </a:r>
           </a:p>
         </p:txBody>
@@ -6190,67 +6457,6 @@
       </p:sp>
       <p:sp>
         <p:nvSpPr>
-          <p:cNvPr id="16" name="">
-            <a:extLst xmlns:a="http://schemas.openxmlformats.org/drawingml/2006/main">
-              <a:ext uri="{FF2B5EF4-FFF2-40B4-BE49-F238E27FC236}">
-                <a16:creationId xmlns:a16="http://schemas.microsoft.com/office/drawing/2014/main" id="{6162F297-DC4F-4BCA-912F-4A724D4A53A6}"/>
-              </a:ext>
-            </a:extLst>
-          </p:cNvPr>
-          <p:cNvSpPr>
-            <a:spLocks xmlns:a="http://schemas.openxmlformats.org/drawingml/2006/main" noGrp="1"/>
-          </p:cNvSpPr>
-          <p:nvPr/>
-        </p:nvSpPr>
-        <p:spPr>
-          <a:xfrm xmlns:a="http://schemas.openxmlformats.org/drawingml/2006/main">
-            <a:off x="228600" y="76200"/>
-            <a:ext cx="8686800" cy="228600"/>
-          </a:xfrm>
-          <a:prstGeom xmlns:a="http://schemas.openxmlformats.org/drawingml/2006/main" prst="rect">
-            <a:avLst/>
-          </a:prstGeom>
-          <a:noFill xmlns:a="http://schemas.openxmlformats.org/drawingml/2006/main"/>
-          <a:ln xmlns:a="http://schemas.openxmlformats.org/drawingml/2006/main" w="0">
-            <a:noFill/>
-          </a:ln>
-        </p:spPr>
-        <p:txBody>
-          <a:bodyPr xmlns:a="http://schemas.openxmlformats.org/drawingml/2006/main" wrap="none" lIns="0" tIns="0" rIns="0" bIns="0" anchor="t">
-            <a:noAutofit/>
-          </a:bodyPr>
-          <a:lstStyle xmlns:a="http://schemas.openxmlformats.org/drawingml/2006/main"/>
-          <a:p xmlns:a="http://schemas.openxmlformats.org/drawingml/2006/main">
-            <a:pPr>
-              <a:lnSpc>
-                <a:spcPct val="100000"/>
-              </a:lnSpc>
-              <a:buNone/>
-              <a:defRPr sz="1200" b="1" i="0">
-                <a:solidFill>
-                  <a:srgbClr val="002855"/>
-                </a:solidFill>
-                <a:latin typeface="Arial"/>
-                <a:ea typeface="Arial"/>
-                <a:cs typeface="Arial"/>
-              </a:defRPr>
-            </a:pPr>
-            <a:r>
-              <a:rPr sz="1200" b="1" i="0">
-                <a:solidFill>
-                  <a:srgbClr val="002855"/>
-                </a:solidFill>
-                <a:latin typeface="Arial"/>
-                <a:ea typeface="Arial"/>
-                <a:cs typeface="Arial"/>
-              </a:rPr>
-              <a:t>WVU DSPIRA</a:t>
-            </a:r>
-          </a:p>
-        </p:txBody>
-      </p:sp>
-      <p:sp>
-        <p:nvSpPr>
           <p:cNvPr id="17" name="">
             <a:extLst xmlns:a="http://schemas.openxmlformats.org/drawingml/2006/main">
               <a:ext uri="{FF2B5EF4-FFF2-40B4-BE49-F238E27FC236}">
@@ -6426,6 +6632,156 @@
             <a:noFill/>
           </a:ln>
         </p:spPr>
+      </p:sp>
+      <p:sp>
+        <p:nvSpPr>
+          <p:cNvPr id="22" name="WVU DSPIRA navy band"/>
+          <p:cNvSpPr>
+            <a:spLocks xmlns:a="http://schemas.openxmlformats.org/drawingml/2006/main" noGrp="1"/>
+          </p:cNvSpPr>
+          <p:nvPr/>
+        </p:nvSpPr>
+        <p:spPr>
+          <a:xfrm xmlns:a="http://schemas.openxmlformats.org/drawingml/2006/main">
+            <a:off x="0" y="0"/>
+            <a:ext cx="9144000" cy="323850"/>
+          </a:xfrm>
+          <a:prstGeom xmlns:a="http://schemas.openxmlformats.org/drawingml/2006/main" prst="rect">
+            <a:avLst/>
+          </a:prstGeom>
+          <a:solidFill xmlns:a="http://schemas.openxmlformats.org/drawingml/2006/main">
+            <a:srgbClr val="002855"/>
+          </a:solidFill>
+          <a:ln xmlns:a="http://schemas.openxmlformats.org/drawingml/2006/main" w="0">
+            <a:noFill/>
+          </a:ln>
+        </p:spPr>
+      </p:sp>
+      <p:sp>
+        <p:nvSpPr>
+          <p:cNvPr id="23" name="WVU DSPIRA gold rule"/>
+          <p:cNvSpPr>
+            <a:spLocks xmlns:a="http://schemas.openxmlformats.org/drawingml/2006/main" noGrp="1"/>
+          </p:cNvSpPr>
+          <p:nvPr/>
+        </p:nvSpPr>
+        <p:spPr>
+          <a:xfrm xmlns:a="http://schemas.openxmlformats.org/drawingml/2006/main">
+            <a:off x="0" y="323850"/>
+            <a:ext cx="9144000" cy="19050"/>
+          </a:xfrm>
+          <a:prstGeom xmlns:a="http://schemas.openxmlformats.org/drawingml/2006/main" prst="rect">
+            <a:avLst/>
+          </a:prstGeom>
+          <a:solidFill xmlns:a="http://schemas.openxmlformats.org/drawingml/2006/main">
+            <a:srgbClr val="EEAA00"/>
+          </a:solidFill>
+          <a:ln xmlns:a="http://schemas.openxmlformats.org/drawingml/2006/main" w="0">
+            <a:noFill/>
+          </a:ln>
+        </p:spPr>
+      </p:sp>
+      <p:sp>
+        <p:nvSpPr>
+          <p:cNvPr id="24" name="WVU DSPIRA name"/>
+          <p:cNvSpPr>
+            <a:spLocks xmlns:a="http://schemas.openxmlformats.org/drawingml/2006/main" noGrp="1"/>
+          </p:cNvSpPr>
+          <p:nvPr/>
+        </p:nvSpPr>
+        <p:spPr>
+          <a:xfrm xmlns:a="http://schemas.openxmlformats.org/drawingml/2006/main">
+            <a:off x="228600" y="19050"/>
+            <a:ext cx="2857500" cy="257175"/>
+          </a:xfrm>
+          <a:prstGeom xmlns:a="http://schemas.openxmlformats.org/drawingml/2006/main" prst="rect">
+            <a:avLst/>
+          </a:prstGeom>
+          <a:noFill xmlns:a="http://schemas.openxmlformats.org/drawingml/2006/main"/>
+          <a:ln xmlns:a="http://schemas.openxmlformats.org/drawingml/2006/main" w="0">
+            <a:noFill/>
+          </a:ln>
+        </p:spPr>
+        <p:txBody>
+          <a:bodyPr xmlns:a="http://schemas.openxmlformats.org/drawingml/2006/main">
+            <a:noAutofit/>
+          </a:bodyPr>
+          <a:lstStyle xmlns:a="http://schemas.openxmlformats.org/drawingml/2006/main"/>
+          <a:p xmlns:a="http://schemas.openxmlformats.org/drawingml/2006/main">
+            <a:pPr>
+              <a:defRPr sz="1600" b="1">
+                <a:solidFill>
+                  <a:srgbClr val="FFFFFF"/>
+                </a:solidFill>
+                <a:latin typeface="Arial"/>
+                <a:ea typeface="Arial"/>
+                <a:cs typeface="Arial"/>
+              </a:defRPr>
+            </a:pPr>
+            <a:r>
+              <a:rPr sz="1600" b="1">
+                <a:solidFill>
+                  <a:srgbClr val="FFFFFF"/>
+                </a:solidFill>
+                <a:latin typeface="Arial"/>
+                <a:ea typeface="Arial"/>
+                <a:cs typeface="Arial"/>
+              </a:rPr>
+              <a:t>WVU DSPIRA</a:t>
+            </a:r>
+          </a:p>
+        </p:txBody>
+      </p:sp>
+      <p:sp>
+        <p:nvSpPr>
+          <p:cNvPr id="25" name="WVU DSPIRA university"/>
+          <p:cNvSpPr>
+            <a:spLocks xmlns:a="http://schemas.openxmlformats.org/drawingml/2006/main" noGrp="1"/>
+          </p:cNvSpPr>
+          <p:nvPr/>
+        </p:nvSpPr>
+        <p:spPr>
+          <a:xfrm xmlns:a="http://schemas.openxmlformats.org/drawingml/2006/main">
+            <a:off x="6286500" y="114300"/>
+            <a:ext cx="2628900" cy="171450"/>
+          </a:xfrm>
+          <a:prstGeom xmlns:a="http://schemas.openxmlformats.org/drawingml/2006/main" prst="rect">
+            <a:avLst/>
+          </a:prstGeom>
+          <a:noFill xmlns:a="http://schemas.openxmlformats.org/drawingml/2006/main"/>
+          <a:ln xmlns:a="http://schemas.openxmlformats.org/drawingml/2006/main" w="0">
+            <a:noFill/>
+          </a:ln>
+        </p:spPr>
+        <p:txBody>
+          <a:bodyPr xmlns:a="http://schemas.openxmlformats.org/drawingml/2006/main">
+            <a:noAutofit/>
+          </a:bodyPr>
+          <a:lstStyle xmlns:a="http://schemas.openxmlformats.org/drawingml/2006/main"/>
+          <a:p xmlns:a="http://schemas.openxmlformats.org/drawingml/2006/main">
+            <a:pPr algn="r">
+              <a:defRPr sz="900">
+                <a:solidFill>
+                  <a:srgbClr val="FFFFFF"/>
+                </a:solidFill>
+                <a:latin typeface="Arial"/>
+                <a:ea typeface="Arial"/>
+                <a:cs typeface="Arial"/>
+              </a:defRPr>
+            </a:pPr>
+            <a:r>
+              <a:rPr sz="900">
+                <a:solidFill>
+                  <a:srgbClr val="FFFFFF"/>
+                </a:solidFill>
+                <a:latin typeface="Arial"/>
+                <a:ea typeface="Arial"/>
+                <a:cs typeface="Arial"/>
+              </a:rPr>
+              <a:t>WEST VIRGINIA UNIVERSITY</a:t>
+            </a:r>
+          </a:p>
+        </p:txBody>
       </p:sp>
     </p:spTree>
     <p:extLst>
@@ -7090,67 +7446,6 @@
       </p:sp>
       <p:sp>
         <p:nvSpPr>
-          <p:cNvPr id="12" name="">
-            <a:extLst xmlns:a="http://schemas.openxmlformats.org/drawingml/2006/main">
-              <a:ext uri="{FF2B5EF4-FFF2-40B4-BE49-F238E27FC236}">
-                <a16:creationId xmlns:a16="http://schemas.microsoft.com/office/drawing/2014/main" id="{9DB975BD-4267-4075-8B5C-8D2ADEE131F1}"/>
-              </a:ext>
-            </a:extLst>
-          </p:cNvPr>
-          <p:cNvSpPr>
-            <a:spLocks xmlns:a="http://schemas.openxmlformats.org/drawingml/2006/main" noGrp="1"/>
-          </p:cNvSpPr>
-          <p:nvPr/>
-        </p:nvSpPr>
-        <p:spPr>
-          <a:xfrm xmlns:a="http://schemas.openxmlformats.org/drawingml/2006/main">
-            <a:off x="228600" y="76200"/>
-            <a:ext cx="8686800" cy="228600"/>
-          </a:xfrm>
-          <a:prstGeom xmlns:a="http://schemas.openxmlformats.org/drawingml/2006/main" prst="rect">
-            <a:avLst/>
-          </a:prstGeom>
-          <a:noFill xmlns:a="http://schemas.openxmlformats.org/drawingml/2006/main"/>
-          <a:ln xmlns:a="http://schemas.openxmlformats.org/drawingml/2006/main" w="0">
-            <a:noFill/>
-          </a:ln>
-        </p:spPr>
-        <p:txBody>
-          <a:bodyPr xmlns:a="http://schemas.openxmlformats.org/drawingml/2006/main" wrap="none" lIns="0" tIns="0" rIns="0" bIns="0" anchor="t">
-            <a:noAutofit/>
-          </a:bodyPr>
-          <a:lstStyle xmlns:a="http://schemas.openxmlformats.org/drawingml/2006/main"/>
-          <a:p xmlns:a="http://schemas.openxmlformats.org/drawingml/2006/main">
-            <a:pPr>
-              <a:lnSpc>
-                <a:spcPct val="100000"/>
-              </a:lnSpc>
-              <a:buNone/>
-              <a:defRPr sz="1200" b="1" i="0">
-                <a:solidFill>
-                  <a:srgbClr val="002855"/>
-                </a:solidFill>
-                <a:latin typeface="Arial"/>
-                <a:ea typeface="Arial"/>
-                <a:cs typeface="Arial"/>
-              </a:defRPr>
-            </a:pPr>
-            <a:r>
-              <a:rPr sz="1200" b="1" i="0">
-                <a:solidFill>
-                  <a:srgbClr val="002855"/>
-                </a:solidFill>
-                <a:latin typeface="Arial"/>
-                <a:ea typeface="Arial"/>
-                <a:cs typeface="Arial"/>
-              </a:rPr>
-              <a:t>WVU DSPIRA</a:t>
-            </a:r>
-          </a:p>
-        </p:txBody>
-      </p:sp>
-      <p:sp>
-        <p:nvSpPr>
           <p:cNvPr id="13" name="">
             <a:extLst xmlns:a="http://schemas.openxmlformats.org/drawingml/2006/main">
               <a:ext uri="{FF2B5EF4-FFF2-40B4-BE49-F238E27FC236}">
@@ -7267,6 +7562,156 @@
                 <a:cs typeface="Arial"/>
               </a:rPr>
               <a:t>13 of 27</a:t>
+            </a:r>
+          </a:p>
+        </p:txBody>
+      </p:sp>
+      <p:sp>
+        <p:nvSpPr>
+          <p:cNvPr id="16" name="WVU DSPIRA navy band"/>
+          <p:cNvSpPr>
+            <a:spLocks xmlns:a="http://schemas.openxmlformats.org/drawingml/2006/main" noGrp="1"/>
+          </p:cNvSpPr>
+          <p:nvPr/>
+        </p:nvSpPr>
+        <p:spPr>
+          <a:xfrm xmlns:a="http://schemas.openxmlformats.org/drawingml/2006/main">
+            <a:off x="0" y="0"/>
+            <a:ext cx="9144000" cy="323850"/>
+          </a:xfrm>
+          <a:prstGeom xmlns:a="http://schemas.openxmlformats.org/drawingml/2006/main" prst="rect">
+            <a:avLst/>
+          </a:prstGeom>
+          <a:solidFill xmlns:a="http://schemas.openxmlformats.org/drawingml/2006/main">
+            <a:srgbClr val="002855"/>
+          </a:solidFill>
+          <a:ln xmlns:a="http://schemas.openxmlformats.org/drawingml/2006/main" w="0">
+            <a:noFill/>
+          </a:ln>
+        </p:spPr>
+      </p:sp>
+      <p:sp>
+        <p:nvSpPr>
+          <p:cNvPr id="17" name="WVU DSPIRA gold rule"/>
+          <p:cNvSpPr>
+            <a:spLocks xmlns:a="http://schemas.openxmlformats.org/drawingml/2006/main" noGrp="1"/>
+          </p:cNvSpPr>
+          <p:nvPr/>
+        </p:nvSpPr>
+        <p:spPr>
+          <a:xfrm xmlns:a="http://schemas.openxmlformats.org/drawingml/2006/main">
+            <a:off x="0" y="323850"/>
+            <a:ext cx="9144000" cy="19050"/>
+          </a:xfrm>
+          <a:prstGeom xmlns:a="http://schemas.openxmlformats.org/drawingml/2006/main" prst="rect">
+            <a:avLst/>
+          </a:prstGeom>
+          <a:solidFill xmlns:a="http://schemas.openxmlformats.org/drawingml/2006/main">
+            <a:srgbClr val="EEAA00"/>
+          </a:solidFill>
+          <a:ln xmlns:a="http://schemas.openxmlformats.org/drawingml/2006/main" w="0">
+            <a:noFill/>
+          </a:ln>
+        </p:spPr>
+      </p:sp>
+      <p:sp>
+        <p:nvSpPr>
+          <p:cNvPr id="18" name="WVU DSPIRA name"/>
+          <p:cNvSpPr>
+            <a:spLocks xmlns:a="http://schemas.openxmlformats.org/drawingml/2006/main" noGrp="1"/>
+          </p:cNvSpPr>
+          <p:nvPr/>
+        </p:nvSpPr>
+        <p:spPr>
+          <a:xfrm xmlns:a="http://schemas.openxmlformats.org/drawingml/2006/main">
+            <a:off x="228600" y="19050"/>
+            <a:ext cx="2857500" cy="257175"/>
+          </a:xfrm>
+          <a:prstGeom xmlns:a="http://schemas.openxmlformats.org/drawingml/2006/main" prst="rect">
+            <a:avLst/>
+          </a:prstGeom>
+          <a:noFill xmlns:a="http://schemas.openxmlformats.org/drawingml/2006/main"/>
+          <a:ln xmlns:a="http://schemas.openxmlformats.org/drawingml/2006/main" w="0">
+            <a:noFill/>
+          </a:ln>
+        </p:spPr>
+        <p:txBody>
+          <a:bodyPr xmlns:a="http://schemas.openxmlformats.org/drawingml/2006/main">
+            <a:noAutofit/>
+          </a:bodyPr>
+          <a:lstStyle xmlns:a="http://schemas.openxmlformats.org/drawingml/2006/main"/>
+          <a:p xmlns:a="http://schemas.openxmlformats.org/drawingml/2006/main">
+            <a:pPr>
+              <a:defRPr sz="1600" b="1">
+                <a:solidFill>
+                  <a:srgbClr val="FFFFFF"/>
+                </a:solidFill>
+                <a:latin typeface="Arial"/>
+                <a:ea typeface="Arial"/>
+                <a:cs typeface="Arial"/>
+              </a:defRPr>
+            </a:pPr>
+            <a:r>
+              <a:rPr sz="1600" b="1">
+                <a:solidFill>
+                  <a:srgbClr val="FFFFFF"/>
+                </a:solidFill>
+                <a:latin typeface="Arial"/>
+                <a:ea typeface="Arial"/>
+                <a:cs typeface="Arial"/>
+              </a:rPr>
+              <a:t>WVU DSPIRA</a:t>
+            </a:r>
+          </a:p>
+        </p:txBody>
+      </p:sp>
+      <p:sp>
+        <p:nvSpPr>
+          <p:cNvPr id="19" name="WVU DSPIRA university"/>
+          <p:cNvSpPr>
+            <a:spLocks xmlns:a="http://schemas.openxmlformats.org/drawingml/2006/main" noGrp="1"/>
+          </p:cNvSpPr>
+          <p:nvPr/>
+        </p:nvSpPr>
+        <p:spPr>
+          <a:xfrm xmlns:a="http://schemas.openxmlformats.org/drawingml/2006/main">
+            <a:off x="6286500" y="114300"/>
+            <a:ext cx="2628900" cy="171450"/>
+          </a:xfrm>
+          <a:prstGeom xmlns:a="http://schemas.openxmlformats.org/drawingml/2006/main" prst="rect">
+            <a:avLst/>
+          </a:prstGeom>
+          <a:noFill xmlns:a="http://schemas.openxmlformats.org/drawingml/2006/main"/>
+          <a:ln xmlns:a="http://schemas.openxmlformats.org/drawingml/2006/main" w="0">
+            <a:noFill/>
+          </a:ln>
+        </p:spPr>
+        <p:txBody>
+          <a:bodyPr xmlns:a="http://schemas.openxmlformats.org/drawingml/2006/main">
+            <a:noAutofit/>
+          </a:bodyPr>
+          <a:lstStyle xmlns:a="http://schemas.openxmlformats.org/drawingml/2006/main"/>
+          <a:p xmlns:a="http://schemas.openxmlformats.org/drawingml/2006/main">
+            <a:pPr algn="r">
+              <a:defRPr sz="900">
+                <a:solidFill>
+                  <a:srgbClr val="FFFFFF"/>
+                </a:solidFill>
+                <a:latin typeface="Arial"/>
+                <a:ea typeface="Arial"/>
+                <a:cs typeface="Arial"/>
+              </a:defRPr>
+            </a:pPr>
+            <a:r>
+              <a:rPr sz="900">
+                <a:solidFill>
+                  <a:srgbClr val="FFFFFF"/>
+                </a:solidFill>
+                <a:latin typeface="Arial"/>
+                <a:ea typeface="Arial"/>
+                <a:cs typeface="Arial"/>
+              </a:rPr>
+              <a:t>WEST VIRGINIA UNIVERSITY</a:t>
             </a:r>
           </a:p>
         </p:txBody>
@@ -8056,67 +8501,6 @@
       </p:sp>
       <p:sp>
         <p:nvSpPr>
-          <p:cNvPr id="14" name="">
-            <a:extLst xmlns:a="http://schemas.openxmlformats.org/drawingml/2006/main">
-              <a:ext uri="{FF2B5EF4-FFF2-40B4-BE49-F238E27FC236}">
-                <a16:creationId xmlns:a16="http://schemas.microsoft.com/office/drawing/2014/main" id="{00ABB912-84B1-4F72-BCD8-4F8B75FC0835}"/>
-              </a:ext>
-            </a:extLst>
-          </p:cNvPr>
-          <p:cNvSpPr>
-            <a:spLocks xmlns:a="http://schemas.openxmlformats.org/drawingml/2006/main" noGrp="1"/>
-          </p:cNvSpPr>
-          <p:nvPr/>
-        </p:nvSpPr>
-        <p:spPr>
-          <a:xfrm xmlns:a="http://schemas.openxmlformats.org/drawingml/2006/main">
-            <a:off x="228600" y="76200"/>
-            <a:ext cx="8686800" cy="228600"/>
-          </a:xfrm>
-          <a:prstGeom xmlns:a="http://schemas.openxmlformats.org/drawingml/2006/main" prst="rect">
-            <a:avLst/>
-          </a:prstGeom>
-          <a:noFill xmlns:a="http://schemas.openxmlformats.org/drawingml/2006/main"/>
-          <a:ln xmlns:a="http://schemas.openxmlformats.org/drawingml/2006/main" w="0">
-            <a:noFill/>
-          </a:ln>
-        </p:spPr>
-        <p:txBody>
-          <a:bodyPr xmlns:a="http://schemas.openxmlformats.org/drawingml/2006/main" wrap="none" lIns="0" tIns="0" rIns="0" bIns="0" anchor="t">
-            <a:noAutofit/>
-          </a:bodyPr>
-          <a:lstStyle xmlns:a="http://schemas.openxmlformats.org/drawingml/2006/main"/>
-          <a:p xmlns:a="http://schemas.openxmlformats.org/drawingml/2006/main">
-            <a:pPr>
-              <a:lnSpc>
-                <a:spcPct val="100000"/>
-              </a:lnSpc>
-              <a:buNone/>
-              <a:defRPr sz="1200" b="1" i="0">
-                <a:solidFill>
-                  <a:srgbClr val="002855"/>
-                </a:solidFill>
-                <a:latin typeface="Arial"/>
-                <a:ea typeface="Arial"/>
-                <a:cs typeface="Arial"/>
-              </a:defRPr>
-            </a:pPr>
-            <a:r>
-              <a:rPr sz="1200" b="1" i="0">
-                <a:solidFill>
-                  <a:srgbClr val="002855"/>
-                </a:solidFill>
-                <a:latin typeface="Arial"/>
-                <a:ea typeface="Arial"/>
-                <a:cs typeface="Arial"/>
-              </a:rPr>
-              <a:t>WVU DSPIRA</a:t>
-            </a:r>
-          </a:p>
-        </p:txBody>
-      </p:sp>
-      <p:sp>
-        <p:nvSpPr>
           <p:cNvPr id="15" name="">
             <a:extLst xmlns:a="http://schemas.openxmlformats.org/drawingml/2006/main">
               <a:ext uri="{FF2B5EF4-FFF2-40B4-BE49-F238E27FC236}">
@@ -8233,6 +8617,156 @@
                 <a:cs typeface="Arial"/>
               </a:rPr>
               <a:t>14 of 27</a:t>
+            </a:r>
+          </a:p>
+        </p:txBody>
+      </p:sp>
+      <p:sp>
+        <p:nvSpPr>
+          <p:cNvPr id="18" name="WVU DSPIRA navy band"/>
+          <p:cNvSpPr>
+            <a:spLocks xmlns:a="http://schemas.openxmlformats.org/drawingml/2006/main" noGrp="1"/>
+          </p:cNvSpPr>
+          <p:nvPr/>
+        </p:nvSpPr>
+        <p:spPr>
+          <a:xfrm xmlns:a="http://schemas.openxmlformats.org/drawingml/2006/main">
+            <a:off x="0" y="0"/>
+            <a:ext cx="9144000" cy="323850"/>
+          </a:xfrm>
+          <a:prstGeom xmlns:a="http://schemas.openxmlformats.org/drawingml/2006/main" prst="rect">
+            <a:avLst/>
+          </a:prstGeom>
+          <a:solidFill xmlns:a="http://schemas.openxmlformats.org/drawingml/2006/main">
+            <a:srgbClr val="002855"/>
+          </a:solidFill>
+          <a:ln xmlns:a="http://schemas.openxmlformats.org/drawingml/2006/main" w="0">
+            <a:noFill/>
+          </a:ln>
+        </p:spPr>
+      </p:sp>
+      <p:sp>
+        <p:nvSpPr>
+          <p:cNvPr id="19" name="WVU DSPIRA gold rule"/>
+          <p:cNvSpPr>
+            <a:spLocks xmlns:a="http://schemas.openxmlformats.org/drawingml/2006/main" noGrp="1"/>
+          </p:cNvSpPr>
+          <p:nvPr/>
+        </p:nvSpPr>
+        <p:spPr>
+          <a:xfrm xmlns:a="http://schemas.openxmlformats.org/drawingml/2006/main">
+            <a:off x="0" y="323850"/>
+            <a:ext cx="9144000" cy="19050"/>
+          </a:xfrm>
+          <a:prstGeom xmlns:a="http://schemas.openxmlformats.org/drawingml/2006/main" prst="rect">
+            <a:avLst/>
+          </a:prstGeom>
+          <a:solidFill xmlns:a="http://schemas.openxmlformats.org/drawingml/2006/main">
+            <a:srgbClr val="EEAA00"/>
+          </a:solidFill>
+          <a:ln xmlns:a="http://schemas.openxmlformats.org/drawingml/2006/main" w="0">
+            <a:noFill/>
+          </a:ln>
+        </p:spPr>
+      </p:sp>
+      <p:sp>
+        <p:nvSpPr>
+          <p:cNvPr id="20" name="WVU DSPIRA name"/>
+          <p:cNvSpPr>
+            <a:spLocks xmlns:a="http://schemas.openxmlformats.org/drawingml/2006/main" noGrp="1"/>
+          </p:cNvSpPr>
+          <p:nvPr/>
+        </p:nvSpPr>
+        <p:spPr>
+          <a:xfrm xmlns:a="http://schemas.openxmlformats.org/drawingml/2006/main">
+            <a:off x="228600" y="19050"/>
+            <a:ext cx="2857500" cy="257175"/>
+          </a:xfrm>
+          <a:prstGeom xmlns:a="http://schemas.openxmlformats.org/drawingml/2006/main" prst="rect">
+            <a:avLst/>
+          </a:prstGeom>
+          <a:noFill xmlns:a="http://schemas.openxmlformats.org/drawingml/2006/main"/>
+          <a:ln xmlns:a="http://schemas.openxmlformats.org/drawingml/2006/main" w="0">
+            <a:noFill/>
+          </a:ln>
+        </p:spPr>
+        <p:txBody>
+          <a:bodyPr xmlns:a="http://schemas.openxmlformats.org/drawingml/2006/main">
+            <a:noAutofit/>
+          </a:bodyPr>
+          <a:lstStyle xmlns:a="http://schemas.openxmlformats.org/drawingml/2006/main"/>
+          <a:p xmlns:a="http://schemas.openxmlformats.org/drawingml/2006/main">
+            <a:pPr>
+              <a:defRPr sz="1600" b="1">
+                <a:solidFill>
+                  <a:srgbClr val="FFFFFF"/>
+                </a:solidFill>
+                <a:latin typeface="Arial"/>
+                <a:ea typeface="Arial"/>
+                <a:cs typeface="Arial"/>
+              </a:defRPr>
+            </a:pPr>
+            <a:r>
+              <a:rPr sz="1600" b="1">
+                <a:solidFill>
+                  <a:srgbClr val="FFFFFF"/>
+                </a:solidFill>
+                <a:latin typeface="Arial"/>
+                <a:ea typeface="Arial"/>
+                <a:cs typeface="Arial"/>
+              </a:rPr>
+              <a:t>WVU DSPIRA</a:t>
+            </a:r>
+          </a:p>
+        </p:txBody>
+      </p:sp>
+      <p:sp>
+        <p:nvSpPr>
+          <p:cNvPr id="21" name="WVU DSPIRA university"/>
+          <p:cNvSpPr>
+            <a:spLocks xmlns:a="http://schemas.openxmlformats.org/drawingml/2006/main" noGrp="1"/>
+          </p:cNvSpPr>
+          <p:nvPr/>
+        </p:nvSpPr>
+        <p:spPr>
+          <a:xfrm xmlns:a="http://schemas.openxmlformats.org/drawingml/2006/main">
+            <a:off x="6286500" y="114300"/>
+            <a:ext cx="2628900" cy="171450"/>
+          </a:xfrm>
+          <a:prstGeom xmlns:a="http://schemas.openxmlformats.org/drawingml/2006/main" prst="rect">
+            <a:avLst/>
+          </a:prstGeom>
+          <a:noFill xmlns:a="http://schemas.openxmlformats.org/drawingml/2006/main"/>
+          <a:ln xmlns:a="http://schemas.openxmlformats.org/drawingml/2006/main" w="0">
+            <a:noFill/>
+          </a:ln>
+        </p:spPr>
+        <p:txBody>
+          <a:bodyPr xmlns:a="http://schemas.openxmlformats.org/drawingml/2006/main">
+            <a:noAutofit/>
+          </a:bodyPr>
+          <a:lstStyle xmlns:a="http://schemas.openxmlformats.org/drawingml/2006/main"/>
+          <a:p xmlns:a="http://schemas.openxmlformats.org/drawingml/2006/main">
+            <a:pPr algn="r">
+              <a:defRPr sz="900">
+                <a:solidFill>
+                  <a:srgbClr val="FFFFFF"/>
+                </a:solidFill>
+                <a:latin typeface="Arial"/>
+                <a:ea typeface="Arial"/>
+                <a:cs typeface="Arial"/>
+              </a:defRPr>
+            </a:pPr>
+            <a:r>
+              <a:rPr sz="900">
+                <a:solidFill>
+                  <a:srgbClr val="FFFFFF"/>
+                </a:solidFill>
+                <a:latin typeface="Arial"/>
+                <a:ea typeface="Arial"/>
+                <a:cs typeface="Arial"/>
+              </a:rPr>
+              <a:t>WEST VIRGINIA UNIVERSITY</a:t>
             </a:r>
           </a:p>
         </p:txBody>
@@ -8656,67 +9190,6 @@
       </p:sp>
       <p:sp>
         <p:nvSpPr>
-          <p:cNvPr id="8" name="">
-            <a:extLst xmlns:a="http://schemas.openxmlformats.org/drawingml/2006/main">
-              <a:ext uri="{FF2B5EF4-FFF2-40B4-BE49-F238E27FC236}">
-                <a16:creationId xmlns:a16="http://schemas.microsoft.com/office/drawing/2014/main" id="{AAC4CBCF-AB6C-42F2-8FA3-664AB00B0E82}"/>
-              </a:ext>
-            </a:extLst>
-          </p:cNvPr>
-          <p:cNvSpPr>
-            <a:spLocks xmlns:a="http://schemas.openxmlformats.org/drawingml/2006/main" noGrp="1"/>
-          </p:cNvSpPr>
-          <p:nvPr/>
-        </p:nvSpPr>
-        <p:spPr>
-          <a:xfrm xmlns:a="http://schemas.openxmlformats.org/drawingml/2006/main">
-            <a:off x="228600" y="76200"/>
-            <a:ext cx="8686800" cy="228600"/>
-          </a:xfrm>
-          <a:prstGeom xmlns:a="http://schemas.openxmlformats.org/drawingml/2006/main" prst="rect">
-            <a:avLst/>
-          </a:prstGeom>
-          <a:noFill xmlns:a="http://schemas.openxmlformats.org/drawingml/2006/main"/>
-          <a:ln xmlns:a="http://schemas.openxmlformats.org/drawingml/2006/main" w="0">
-            <a:noFill/>
-          </a:ln>
-        </p:spPr>
-        <p:txBody>
-          <a:bodyPr xmlns:a="http://schemas.openxmlformats.org/drawingml/2006/main" wrap="none" lIns="0" tIns="0" rIns="0" bIns="0" anchor="t">
-            <a:noAutofit/>
-          </a:bodyPr>
-          <a:lstStyle xmlns:a="http://schemas.openxmlformats.org/drawingml/2006/main"/>
-          <a:p xmlns:a="http://schemas.openxmlformats.org/drawingml/2006/main">
-            <a:pPr>
-              <a:lnSpc>
-                <a:spcPct val="100000"/>
-              </a:lnSpc>
-              <a:buNone/>
-              <a:defRPr sz="1200" b="1" i="0">
-                <a:solidFill>
-                  <a:srgbClr val="002855"/>
-                </a:solidFill>
-                <a:latin typeface="Arial"/>
-                <a:ea typeface="Arial"/>
-                <a:cs typeface="Arial"/>
-              </a:defRPr>
-            </a:pPr>
-            <a:r>
-              <a:rPr sz="1200" b="1" i="0">
-                <a:solidFill>
-                  <a:srgbClr val="002855"/>
-                </a:solidFill>
-                <a:latin typeface="Arial"/>
-                <a:ea typeface="Arial"/>
-                <a:cs typeface="Arial"/>
-              </a:rPr>
-              <a:t>WVU DSPIRA</a:t>
-            </a:r>
-          </a:p>
-        </p:txBody>
-      </p:sp>
-      <p:sp>
-        <p:nvSpPr>
           <p:cNvPr id="9" name="">
             <a:extLst xmlns:a="http://schemas.openxmlformats.org/drawingml/2006/main">
               <a:ext uri="{FF2B5EF4-FFF2-40B4-BE49-F238E27FC236}">
@@ -8833,6 +9306,156 @@
                 <a:cs typeface="Arial"/>
               </a:rPr>
               <a:t>15 of 27</a:t>
+            </a:r>
+          </a:p>
+        </p:txBody>
+      </p:sp>
+      <p:sp>
+        <p:nvSpPr>
+          <p:cNvPr id="12" name="WVU DSPIRA navy band"/>
+          <p:cNvSpPr>
+            <a:spLocks xmlns:a="http://schemas.openxmlformats.org/drawingml/2006/main" noGrp="1"/>
+          </p:cNvSpPr>
+          <p:nvPr/>
+        </p:nvSpPr>
+        <p:spPr>
+          <a:xfrm xmlns:a="http://schemas.openxmlformats.org/drawingml/2006/main">
+            <a:off x="0" y="0"/>
+            <a:ext cx="9144000" cy="323850"/>
+          </a:xfrm>
+          <a:prstGeom xmlns:a="http://schemas.openxmlformats.org/drawingml/2006/main" prst="rect">
+            <a:avLst/>
+          </a:prstGeom>
+          <a:solidFill xmlns:a="http://schemas.openxmlformats.org/drawingml/2006/main">
+            <a:srgbClr val="002855"/>
+          </a:solidFill>
+          <a:ln xmlns:a="http://schemas.openxmlformats.org/drawingml/2006/main" w="0">
+            <a:noFill/>
+          </a:ln>
+        </p:spPr>
+      </p:sp>
+      <p:sp>
+        <p:nvSpPr>
+          <p:cNvPr id="13" name="WVU DSPIRA gold rule"/>
+          <p:cNvSpPr>
+            <a:spLocks xmlns:a="http://schemas.openxmlformats.org/drawingml/2006/main" noGrp="1"/>
+          </p:cNvSpPr>
+          <p:nvPr/>
+        </p:nvSpPr>
+        <p:spPr>
+          <a:xfrm xmlns:a="http://schemas.openxmlformats.org/drawingml/2006/main">
+            <a:off x="0" y="323850"/>
+            <a:ext cx="9144000" cy="19050"/>
+          </a:xfrm>
+          <a:prstGeom xmlns:a="http://schemas.openxmlformats.org/drawingml/2006/main" prst="rect">
+            <a:avLst/>
+          </a:prstGeom>
+          <a:solidFill xmlns:a="http://schemas.openxmlformats.org/drawingml/2006/main">
+            <a:srgbClr val="EEAA00"/>
+          </a:solidFill>
+          <a:ln xmlns:a="http://schemas.openxmlformats.org/drawingml/2006/main" w="0">
+            <a:noFill/>
+          </a:ln>
+        </p:spPr>
+      </p:sp>
+      <p:sp>
+        <p:nvSpPr>
+          <p:cNvPr id="14" name="WVU DSPIRA name"/>
+          <p:cNvSpPr>
+            <a:spLocks xmlns:a="http://schemas.openxmlformats.org/drawingml/2006/main" noGrp="1"/>
+          </p:cNvSpPr>
+          <p:nvPr/>
+        </p:nvSpPr>
+        <p:spPr>
+          <a:xfrm xmlns:a="http://schemas.openxmlformats.org/drawingml/2006/main">
+            <a:off x="228600" y="19050"/>
+            <a:ext cx="2857500" cy="257175"/>
+          </a:xfrm>
+          <a:prstGeom xmlns:a="http://schemas.openxmlformats.org/drawingml/2006/main" prst="rect">
+            <a:avLst/>
+          </a:prstGeom>
+          <a:noFill xmlns:a="http://schemas.openxmlformats.org/drawingml/2006/main"/>
+          <a:ln xmlns:a="http://schemas.openxmlformats.org/drawingml/2006/main" w="0">
+            <a:noFill/>
+          </a:ln>
+        </p:spPr>
+        <p:txBody>
+          <a:bodyPr xmlns:a="http://schemas.openxmlformats.org/drawingml/2006/main">
+            <a:noAutofit/>
+          </a:bodyPr>
+          <a:lstStyle xmlns:a="http://schemas.openxmlformats.org/drawingml/2006/main"/>
+          <a:p xmlns:a="http://schemas.openxmlformats.org/drawingml/2006/main">
+            <a:pPr>
+              <a:defRPr sz="1600" b="1">
+                <a:solidFill>
+                  <a:srgbClr val="FFFFFF"/>
+                </a:solidFill>
+                <a:latin typeface="Arial"/>
+                <a:ea typeface="Arial"/>
+                <a:cs typeface="Arial"/>
+              </a:defRPr>
+            </a:pPr>
+            <a:r>
+              <a:rPr sz="1600" b="1">
+                <a:solidFill>
+                  <a:srgbClr val="FFFFFF"/>
+                </a:solidFill>
+                <a:latin typeface="Arial"/>
+                <a:ea typeface="Arial"/>
+                <a:cs typeface="Arial"/>
+              </a:rPr>
+              <a:t>WVU DSPIRA</a:t>
+            </a:r>
+          </a:p>
+        </p:txBody>
+      </p:sp>
+      <p:sp>
+        <p:nvSpPr>
+          <p:cNvPr id="15" name="WVU DSPIRA university"/>
+          <p:cNvSpPr>
+            <a:spLocks xmlns:a="http://schemas.openxmlformats.org/drawingml/2006/main" noGrp="1"/>
+          </p:cNvSpPr>
+          <p:nvPr/>
+        </p:nvSpPr>
+        <p:spPr>
+          <a:xfrm xmlns:a="http://schemas.openxmlformats.org/drawingml/2006/main">
+            <a:off x="6286500" y="114300"/>
+            <a:ext cx="2628900" cy="171450"/>
+          </a:xfrm>
+          <a:prstGeom xmlns:a="http://schemas.openxmlformats.org/drawingml/2006/main" prst="rect">
+            <a:avLst/>
+          </a:prstGeom>
+          <a:noFill xmlns:a="http://schemas.openxmlformats.org/drawingml/2006/main"/>
+          <a:ln xmlns:a="http://schemas.openxmlformats.org/drawingml/2006/main" w="0">
+            <a:noFill/>
+          </a:ln>
+        </p:spPr>
+        <p:txBody>
+          <a:bodyPr xmlns:a="http://schemas.openxmlformats.org/drawingml/2006/main">
+            <a:noAutofit/>
+          </a:bodyPr>
+          <a:lstStyle xmlns:a="http://schemas.openxmlformats.org/drawingml/2006/main"/>
+          <a:p xmlns:a="http://schemas.openxmlformats.org/drawingml/2006/main">
+            <a:pPr algn="r">
+              <a:defRPr sz="900">
+                <a:solidFill>
+                  <a:srgbClr val="FFFFFF"/>
+                </a:solidFill>
+                <a:latin typeface="Arial"/>
+                <a:ea typeface="Arial"/>
+                <a:cs typeface="Arial"/>
+              </a:defRPr>
+            </a:pPr>
+            <a:r>
+              <a:rPr sz="900">
+                <a:solidFill>
+                  <a:srgbClr val="FFFFFF"/>
+                </a:solidFill>
+                <a:latin typeface="Arial"/>
+                <a:ea typeface="Arial"/>
+                <a:cs typeface="Arial"/>
+              </a:rPr>
+              <a:t>WEST VIRGINIA UNIVERSITY</a:t>
             </a:r>
           </a:p>
         </p:txBody>
@@ -9683,67 +10306,6 @@
       </p:sp>
       <p:sp>
         <p:nvSpPr>
-          <p:cNvPr id="15" name="">
-            <a:extLst xmlns:a="http://schemas.openxmlformats.org/drawingml/2006/main">
-              <a:ext uri="{FF2B5EF4-FFF2-40B4-BE49-F238E27FC236}">
-                <a16:creationId xmlns:a16="http://schemas.microsoft.com/office/drawing/2014/main" id="{F5D6CC79-F96A-452D-B2E0-936F958A90B2}"/>
-              </a:ext>
-            </a:extLst>
-          </p:cNvPr>
-          <p:cNvSpPr>
-            <a:spLocks xmlns:a="http://schemas.openxmlformats.org/drawingml/2006/main" noGrp="1"/>
-          </p:cNvSpPr>
-          <p:nvPr/>
-        </p:nvSpPr>
-        <p:spPr>
-          <a:xfrm xmlns:a="http://schemas.openxmlformats.org/drawingml/2006/main">
-            <a:off x="228600" y="76200"/>
-            <a:ext cx="8686800" cy="228600"/>
-          </a:xfrm>
-          <a:prstGeom xmlns:a="http://schemas.openxmlformats.org/drawingml/2006/main" prst="rect">
-            <a:avLst/>
-          </a:prstGeom>
-          <a:noFill xmlns:a="http://schemas.openxmlformats.org/drawingml/2006/main"/>
-          <a:ln xmlns:a="http://schemas.openxmlformats.org/drawingml/2006/main" w="0">
-            <a:noFill/>
-          </a:ln>
-        </p:spPr>
-        <p:txBody>
-          <a:bodyPr xmlns:a="http://schemas.openxmlformats.org/drawingml/2006/main" wrap="none" lIns="0" tIns="0" rIns="0" bIns="0" anchor="t">
-            <a:noAutofit/>
-          </a:bodyPr>
-          <a:lstStyle xmlns:a="http://schemas.openxmlformats.org/drawingml/2006/main"/>
-          <a:p xmlns:a="http://schemas.openxmlformats.org/drawingml/2006/main">
-            <a:pPr>
-              <a:lnSpc>
-                <a:spcPct val="100000"/>
-              </a:lnSpc>
-              <a:buNone/>
-              <a:defRPr sz="1200" b="1" i="0">
-                <a:solidFill>
-                  <a:srgbClr val="002855"/>
-                </a:solidFill>
-                <a:latin typeface="Arial"/>
-                <a:ea typeface="Arial"/>
-                <a:cs typeface="Arial"/>
-              </a:defRPr>
-            </a:pPr>
-            <a:r>
-              <a:rPr sz="1200" b="1" i="0">
-                <a:solidFill>
-                  <a:srgbClr val="002855"/>
-                </a:solidFill>
-                <a:latin typeface="Arial"/>
-                <a:ea typeface="Arial"/>
-                <a:cs typeface="Arial"/>
-              </a:rPr>
-              <a:t>WVU DSPIRA</a:t>
-            </a:r>
-          </a:p>
-        </p:txBody>
-      </p:sp>
-      <p:sp>
-        <p:nvSpPr>
           <p:cNvPr id="16" name="">
             <a:extLst xmlns:a="http://schemas.openxmlformats.org/drawingml/2006/main">
               <a:ext uri="{FF2B5EF4-FFF2-40B4-BE49-F238E27FC236}">
@@ -9860,6 +10422,156 @@
                 <a:cs typeface="Arial"/>
               </a:rPr>
               <a:t>16 of 27</a:t>
+            </a:r>
+          </a:p>
+        </p:txBody>
+      </p:sp>
+      <p:sp>
+        <p:nvSpPr>
+          <p:cNvPr id="19" name="WVU DSPIRA navy band"/>
+          <p:cNvSpPr>
+            <a:spLocks xmlns:a="http://schemas.openxmlformats.org/drawingml/2006/main" noGrp="1"/>
+          </p:cNvSpPr>
+          <p:nvPr/>
+        </p:nvSpPr>
+        <p:spPr>
+          <a:xfrm xmlns:a="http://schemas.openxmlformats.org/drawingml/2006/main">
+            <a:off x="0" y="0"/>
+            <a:ext cx="9144000" cy="323850"/>
+          </a:xfrm>
+          <a:prstGeom xmlns:a="http://schemas.openxmlformats.org/drawingml/2006/main" prst="rect">
+            <a:avLst/>
+          </a:prstGeom>
+          <a:solidFill xmlns:a="http://schemas.openxmlformats.org/drawingml/2006/main">
+            <a:srgbClr val="002855"/>
+          </a:solidFill>
+          <a:ln xmlns:a="http://schemas.openxmlformats.org/drawingml/2006/main" w="0">
+            <a:noFill/>
+          </a:ln>
+        </p:spPr>
+      </p:sp>
+      <p:sp>
+        <p:nvSpPr>
+          <p:cNvPr id="20" name="WVU DSPIRA gold rule"/>
+          <p:cNvSpPr>
+            <a:spLocks xmlns:a="http://schemas.openxmlformats.org/drawingml/2006/main" noGrp="1"/>
+          </p:cNvSpPr>
+          <p:nvPr/>
+        </p:nvSpPr>
+        <p:spPr>
+          <a:xfrm xmlns:a="http://schemas.openxmlformats.org/drawingml/2006/main">
+            <a:off x="0" y="323850"/>
+            <a:ext cx="9144000" cy="19050"/>
+          </a:xfrm>
+          <a:prstGeom xmlns:a="http://schemas.openxmlformats.org/drawingml/2006/main" prst="rect">
+            <a:avLst/>
+          </a:prstGeom>
+          <a:solidFill xmlns:a="http://schemas.openxmlformats.org/drawingml/2006/main">
+            <a:srgbClr val="EEAA00"/>
+          </a:solidFill>
+          <a:ln xmlns:a="http://schemas.openxmlformats.org/drawingml/2006/main" w="0">
+            <a:noFill/>
+          </a:ln>
+        </p:spPr>
+      </p:sp>
+      <p:sp>
+        <p:nvSpPr>
+          <p:cNvPr id="21" name="WVU DSPIRA name"/>
+          <p:cNvSpPr>
+            <a:spLocks xmlns:a="http://schemas.openxmlformats.org/drawingml/2006/main" noGrp="1"/>
+          </p:cNvSpPr>
+          <p:nvPr/>
+        </p:nvSpPr>
+        <p:spPr>
+          <a:xfrm xmlns:a="http://schemas.openxmlformats.org/drawingml/2006/main">
+            <a:off x="228600" y="19050"/>
+            <a:ext cx="2857500" cy="257175"/>
+          </a:xfrm>
+          <a:prstGeom xmlns:a="http://schemas.openxmlformats.org/drawingml/2006/main" prst="rect">
+            <a:avLst/>
+          </a:prstGeom>
+          <a:noFill xmlns:a="http://schemas.openxmlformats.org/drawingml/2006/main"/>
+          <a:ln xmlns:a="http://schemas.openxmlformats.org/drawingml/2006/main" w="0">
+            <a:noFill/>
+          </a:ln>
+        </p:spPr>
+        <p:txBody>
+          <a:bodyPr xmlns:a="http://schemas.openxmlformats.org/drawingml/2006/main">
+            <a:noAutofit/>
+          </a:bodyPr>
+          <a:lstStyle xmlns:a="http://schemas.openxmlformats.org/drawingml/2006/main"/>
+          <a:p xmlns:a="http://schemas.openxmlformats.org/drawingml/2006/main">
+            <a:pPr>
+              <a:defRPr sz="1600" b="1">
+                <a:solidFill>
+                  <a:srgbClr val="FFFFFF"/>
+                </a:solidFill>
+                <a:latin typeface="Arial"/>
+                <a:ea typeface="Arial"/>
+                <a:cs typeface="Arial"/>
+              </a:defRPr>
+            </a:pPr>
+            <a:r>
+              <a:rPr sz="1600" b="1">
+                <a:solidFill>
+                  <a:srgbClr val="FFFFFF"/>
+                </a:solidFill>
+                <a:latin typeface="Arial"/>
+                <a:ea typeface="Arial"/>
+                <a:cs typeface="Arial"/>
+              </a:rPr>
+              <a:t>WVU DSPIRA</a:t>
+            </a:r>
+          </a:p>
+        </p:txBody>
+      </p:sp>
+      <p:sp>
+        <p:nvSpPr>
+          <p:cNvPr id="22" name="WVU DSPIRA university"/>
+          <p:cNvSpPr>
+            <a:spLocks xmlns:a="http://schemas.openxmlformats.org/drawingml/2006/main" noGrp="1"/>
+          </p:cNvSpPr>
+          <p:nvPr/>
+        </p:nvSpPr>
+        <p:spPr>
+          <a:xfrm xmlns:a="http://schemas.openxmlformats.org/drawingml/2006/main">
+            <a:off x="6286500" y="114300"/>
+            <a:ext cx="2628900" cy="171450"/>
+          </a:xfrm>
+          <a:prstGeom xmlns:a="http://schemas.openxmlformats.org/drawingml/2006/main" prst="rect">
+            <a:avLst/>
+          </a:prstGeom>
+          <a:noFill xmlns:a="http://schemas.openxmlformats.org/drawingml/2006/main"/>
+          <a:ln xmlns:a="http://schemas.openxmlformats.org/drawingml/2006/main" w="0">
+            <a:noFill/>
+          </a:ln>
+        </p:spPr>
+        <p:txBody>
+          <a:bodyPr xmlns:a="http://schemas.openxmlformats.org/drawingml/2006/main">
+            <a:noAutofit/>
+          </a:bodyPr>
+          <a:lstStyle xmlns:a="http://schemas.openxmlformats.org/drawingml/2006/main"/>
+          <a:p xmlns:a="http://schemas.openxmlformats.org/drawingml/2006/main">
+            <a:pPr algn="r">
+              <a:defRPr sz="900">
+                <a:solidFill>
+                  <a:srgbClr val="FFFFFF"/>
+                </a:solidFill>
+                <a:latin typeface="Arial"/>
+                <a:ea typeface="Arial"/>
+                <a:cs typeface="Arial"/>
+              </a:defRPr>
+            </a:pPr>
+            <a:r>
+              <a:rPr sz="900">
+                <a:solidFill>
+                  <a:srgbClr val="FFFFFF"/>
+                </a:solidFill>
+                <a:latin typeface="Arial"/>
+                <a:ea typeface="Arial"/>
+                <a:cs typeface="Arial"/>
+              </a:rPr>
+              <a:t>WEST VIRGINIA UNIVERSITY</a:t>
             </a:r>
           </a:p>
         </p:txBody>
@@ -10710,67 +11422,6 @@
       </p:sp>
       <p:sp>
         <p:nvSpPr>
-          <p:cNvPr id="15" name="">
-            <a:extLst xmlns:a="http://schemas.openxmlformats.org/drawingml/2006/main">
-              <a:ext uri="{FF2B5EF4-FFF2-40B4-BE49-F238E27FC236}">
-                <a16:creationId xmlns:a16="http://schemas.microsoft.com/office/drawing/2014/main" id="{DD9693A8-CA3F-4D06-A806-5D78C831B601}"/>
-              </a:ext>
-            </a:extLst>
-          </p:cNvPr>
-          <p:cNvSpPr>
-            <a:spLocks xmlns:a="http://schemas.openxmlformats.org/drawingml/2006/main" noGrp="1"/>
-          </p:cNvSpPr>
-          <p:nvPr/>
-        </p:nvSpPr>
-        <p:spPr>
-          <a:xfrm xmlns:a="http://schemas.openxmlformats.org/drawingml/2006/main">
-            <a:off x="228600" y="76200"/>
-            <a:ext cx="8686800" cy="228600"/>
-          </a:xfrm>
-          <a:prstGeom xmlns:a="http://schemas.openxmlformats.org/drawingml/2006/main" prst="rect">
-            <a:avLst/>
-          </a:prstGeom>
-          <a:noFill xmlns:a="http://schemas.openxmlformats.org/drawingml/2006/main"/>
-          <a:ln xmlns:a="http://schemas.openxmlformats.org/drawingml/2006/main" w="0">
-            <a:noFill/>
-          </a:ln>
-        </p:spPr>
-        <p:txBody>
-          <a:bodyPr xmlns:a="http://schemas.openxmlformats.org/drawingml/2006/main" wrap="none" lIns="0" tIns="0" rIns="0" bIns="0" anchor="t">
-            <a:noAutofit/>
-          </a:bodyPr>
-          <a:lstStyle xmlns:a="http://schemas.openxmlformats.org/drawingml/2006/main"/>
-          <a:p xmlns:a="http://schemas.openxmlformats.org/drawingml/2006/main">
-            <a:pPr>
-              <a:lnSpc>
-                <a:spcPct val="100000"/>
-              </a:lnSpc>
-              <a:buNone/>
-              <a:defRPr sz="1200" b="1" i="0">
-                <a:solidFill>
-                  <a:srgbClr val="002855"/>
-                </a:solidFill>
-                <a:latin typeface="Arial"/>
-                <a:ea typeface="Arial"/>
-                <a:cs typeface="Arial"/>
-              </a:defRPr>
-            </a:pPr>
-            <a:r>
-              <a:rPr sz="1200" b="1" i="0">
-                <a:solidFill>
-                  <a:srgbClr val="002855"/>
-                </a:solidFill>
-                <a:latin typeface="Arial"/>
-                <a:ea typeface="Arial"/>
-                <a:cs typeface="Arial"/>
-              </a:rPr>
-              <a:t>WVU DSPIRA</a:t>
-            </a:r>
-          </a:p>
-        </p:txBody>
-      </p:sp>
-      <p:sp>
-        <p:nvSpPr>
           <p:cNvPr id="16" name="">
             <a:extLst xmlns:a="http://schemas.openxmlformats.org/drawingml/2006/main">
               <a:ext uri="{FF2B5EF4-FFF2-40B4-BE49-F238E27FC236}">
@@ -10887,6 +11538,156 @@
                 <a:cs typeface="Arial"/>
               </a:rPr>
               <a:t>17 of 27</a:t>
+            </a:r>
+          </a:p>
+        </p:txBody>
+      </p:sp>
+      <p:sp>
+        <p:nvSpPr>
+          <p:cNvPr id="19" name="WVU DSPIRA navy band"/>
+          <p:cNvSpPr>
+            <a:spLocks xmlns:a="http://schemas.openxmlformats.org/drawingml/2006/main" noGrp="1"/>
+          </p:cNvSpPr>
+          <p:nvPr/>
+        </p:nvSpPr>
+        <p:spPr>
+          <a:xfrm xmlns:a="http://schemas.openxmlformats.org/drawingml/2006/main">
+            <a:off x="0" y="0"/>
+            <a:ext cx="9144000" cy="323850"/>
+          </a:xfrm>
+          <a:prstGeom xmlns:a="http://schemas.openxmlformats.org/drawingml/2006/main" prst="rect">
+            <a:avLst/>
+          </a:prstGeom>
+          <a:solidFill xmlns:a="http://schemas.openxmlformats.org/drawingml/2006/main">
+            <a:srgbClr val="002855"/>
+          </a:solidFill>
+          <a:ln xmlns:a="http://schemas.openxmlformats.org/drawingml/2006/main" w="0">
+            <a:noFill/>
+          </a:ln>
+        </p:spPr>
+      </p:sp>
+      <p:sp>
+        <p:nvSpPr>
+          <p:cNvPr id="20" name="WVU DSPIRA gold rule"/>
+          <p:cNvSpPr>
+            <a:spLocks xmlns:a="http://schemas.openxmlformats.org/drawingml/2006/main" noGrp="1"/>
+          </p:cNvSpPr>
+          <p:nvPr/>
+        </p:nvSpPr>
+        <p:spPr>
+          <a:xfrm xmlns:a="http://schemas.openxmlformats.org/drawingml/2006/main">
+            <a:off x="0" y="323850"/>
+            <a:ext cx="9144000" cy="19050"/>
+          </a:xfrm>
+          <a:prstGeom xmlns:a="http://schemas.openxmlformats.org/drawingml/2006/main" prst="rect">
+            <a:avLst/>
+          </a:prstGeom>
+          <a:solidFill xmlns:a="http://schemas.openxmlformats.org/drawingml/2006/main">
+            <a:srgbClr val="EEAA00"/>
+          </a:solidFill>
+          <a:ln xmlns:a="http://schemas.openxmlformats.org/drawingml/2006/main" w="0">
+            <a:noFill/>
+          </a:ln>
+        </p:spPr>
+      </p:sp>
+      <p:sp>
+        <p:nvSpPr>
+          <p:cNvPr id="21" name="WVU DSPIRA name"/>
+          <p:cNvSpPr>
+            <a:spLocks xmlns:a="http://schemas.openxmlformats.org/drawingml/2006/main" noGrp="1"/>
+          </p:cNvSpPr>
+          <p:nvPr/>
+        </p:nvSpPr>
+        <p:spPr>
+          <a:xfrm xmlns:a="http://schemas.openxmlformats.org/drawingml/2006/main">
+            <a:off x="228600" y="19050"/>
+            <a:ext cx="2857500" cy="257175"/>
+          </a:xfrm>
+          <a:prstGeom xmlns:a="http://schemas.openxmlformats.org/drawingml/2006/main" prst="rect">
+            <a:avLst/>
+          </a:prstGeom>
+          <a:noFill xmlns:a="http://schemas.openxmlformats.org/drawingml/2006/main"/>
+          <a:ln xmlns:a="http://schemas.openxmlformats.org/drawingml/2006/main" w="0">
+            <a:noFill/>
+          </a:ln>
+        </p:spPr>
+        <p:txBody>
+          <a:bodyPr xmlns:a="http://schemas.openxmlformats.org/drawingml/2006/main">
+            <a:noAutofit/>
+          </a:bodyPr>
+          <a:lstStyle xmlns:a="http://schemas.openxmlformats.org/drawingml/2006/main"/>
+          <a:p xmlns:a="http://schemas.openxmlformats.org/drawingml/2006/main">
+            <a:pPr>
+              <a:defRPr sz="1600" b="1">
+                <a:solidFill>
+                  <a:srgbClr val="FFFFFF"/>
+                </a:solidFill>
+                <a:latin typeface="Arial"/>
+                <a:ea typeface="Arial"/>
+                <a:cs typeface="Arial"/>
+              </a:defRPr>
+            </a:pPr>
+            <a:r>
+              <a:rPr sz="1600" b="1">
+                <a:solidFill>
+                  <a:srgbClr val="FFFFFF"/>
+                </a:solidFill>
+                <a:latin typeface="Arial"/>
+                <a:ea typeface="Arial"/>
+                <a:cs typeface="Arial"/>
+              </a:rPr>
+              <a:t>WVU DSPIRA</a:t>
+            </a:r>
+          </a:p>
+        </p:txBody>
+      </p:sp>
+      <p:sp>
+        <p:nvSpPr>
+          <p:cNvPr id="22" name="WVU DSPIRA university"/>
+          <p:cNvSpPr>
+            <a:spLocks xmlns:a="http://schemas.openxmlformats.org/drawingml/2006/main" noGrp="1"/>
+          </p:cNvSpPr>
+          <p:nvPr/>
+        </p:nvSpPr>
+        <p:spPr>
+          <a:xfrm xmlns:a="http://schemas.openxmlformats.org/drawingml/2006/main">
+            <a:off x="6286500" y="114300"/>
+            <a:ext cx="2628900" cy="171450"/>
+          </a:xfrm>
+          <a:prstGeom xmlns:a="http://schemas.openxmlformats.org/drawingml/2006/main" prst="rect">
+            <a:avLst/>
+          </a:prstGeom>
+          <a:noFill xmlns:a="http://schemas.openxmlformats.org/drawingml/2006/main"/>
+          <a:ln xmlns:a="http://schemas.openxmlformats.org/drawingml/2006/main" w="0">
+            <a:noFill/>
+          </a:ln>
+        </p:spPr>
+        <p:txBody>
+          <a:bodyPr xmlns:a="http://schemas.openxmlformats.org/drawingml/2006/main">
+            <a:noAutofit/>
+          </a:bodyPr>
+          <a:lstStyle xmlns:a="http://schemas.openxmlformats.org/drawingml/2006/main"/>
+          <a:p xmlns:a="http://schemas.openxmlformats.org/drawingml/2006/main">
+            <a:pPr algn="r">
+              <a:defRPr sz="900">
+                <a:solidFill>
+                  <a:srgbClr val="FFFFFF"/>
+                </a:solidFill>
+                <a:latin typeface="Arial"/>
+                <a:ea typeface="Arial"/>
+                <a:cs typeface="Arial"/>
+              </a:defRPr>
+            </a:pPr>
+            <a:r>
+              <a:rPr sz="900">
+                <a:solidFill>
+                  <a:srgbClr val="FFFFFF"/>
+                </a:solidFill>
+                <a:latin typeface="Arial"/>
+                <a:ea typeface="Arial"/>
+                <a:cs typeface="Arial"/>
+              </a:rPr>
+              <a:t>WEST VIRGINIA UNIVERSITY</a:t>
             </a:r>
           </a:p>
         </p:txBody>
@@ -11432,67 +12233,6 @@
       </p:sp>
       <p:sp>
         <p:nvSpPr>
-          <p:cNvPr id="10" name="">
-            <a:extLst xmlns:a="http://schemas.openxmlformats.org/drawingml/2006/main">
-              <a:ext uri="{FF2B5EF4-FFF2-40B4-BE49-F238E27FC236}">
-                <a16:creationId xmlns:a16="http://schemas.microsoft.com/office/drawing/2014/main" id="{A429FD48-DB53-45E2-9221-D170661F6A89}"/>
-              </a:ext>
-            </a:extLst>
-          </p:cNvPr>
-          <p:cNvSpPr>
-            <a:spLocks xmlns:a="http://schemas.openxmlformats.org/drawingml/2006/main" noGrp="1"/>
-          </p:cNvSpPr>
-          <p:nvPr/>
-        </p:nvSpPr>
-        <p:spPr>
-          <a:xfrm xmlns:a="http://schemas.openxmlformats.org/drawingml/2006/main">
-            <a:off x="228600" y="76200"/>
-            <a:ext cx="8686800" cy="228600"/>
-          </a:xfrm>
-          <a:prstGeom xmlns:a="http://schemas.openxmlformats.org/drawingml/2006/main" prst="rect">
-            <a:avLst/>
-          </a:prstGeom>
-          <a:noFill xmlns:a="http://schemas.openxmlformats.org/drawingml/2006/main"/>
-          <a:ln xmlns:a="http://schemas.openxmlformats.org/drawingml/2006/main" w="0">
-            <a:noFill/>
-          </a:ln>
-        </p:spPr>
-        <p:txBody>
-          <a:bodyPr xmlns:a="http://schemas.openxmlformats.org/drawingml/2006/main" wrap="none" lIns="0" tIns="0" rIns="0" bIns="0" anchor="t">
-            <a:noAutofit/>
-          </a:bodyPr>
-          <a:lstStyle xmlns:a="http://schemas.openxmlformats.org/drawingml/2006/main"/>
-          <a:p xmlns:a="http://schemas.openxmlformats.org/drawingml/2006/main">
-            <a:pPr>
-              <a:lnSpc>
-                <a:spcPct val="100000"/>
-              </a:lnSpc>
-              <a:buNone/>
-              <a:defRPr sz="1200" b="1" i="0">
-                <a:solidFill>
-                  <a:srgbClr val="002855"/>
-                </a:solidFill>
-                <a:latin typeface="Arial"/>
-                <a:ea typeface="Arial"/>
-                <a:cs typeface="Arial"/>
-              </a:defRPr>
-            </a:pPr>
-            <a:r>
-              <a:rPr sz="1200" b="1" i="0">
-                <a:solidFill>
-                  <a:srgbClr val="002855"/>
-                </a:solidFill>
-                <a:latin typeface="Arial"/>
-                <a:ea typeface="Arial"/>
-                <a:cs typeface="Arial"/>
-              </a:rPr>
-              <a:t>WVU DSPIRA</a:t>
-            </a:r>
-          </a:p>
-        </p:txBody>
-      </p:sp>
-      <p:sp>
-        <p:nvSpPr>
           <p:cNvPr id="11" name="">
             <a:extLst xmlns:a="http://schemas.openxmlformats.org/drawingml/2006/main">
               <a:ext uri="{FF2B5EF4-FFF2-40B4-BE49-F238E27FC236}">
@@ -11609,6 +12349,156 @@
                 <a:cs typeface="Arial"/>
               </a:rPr>
               <a:t>18 of 27</a:t>
+            </a:r>
+          </a:p>
+        </p:txBody>
+      </p:sp>
+      <p:sp>
+        <p:nvSpPr>
+          <p:cNvPr id="14" name="WVU DSPIRA navy band"/>
+          <p:cNvSpPr>
+            <a:spLocks xmlns:a="http://schemas.openxmlformats.org/drawingml/2006/main" noGrp="1"/>
+          </p:cNvSpPr>
+          <p:nvPr/>
+        </p:nvSpPr>
+        <p:spPr>
+          <a:xfrm xmlns:a="http://schemas.openxmlformats.org/drawingml/2006/main">
+            <a:off x="0" y="0"/>
+            <a:ext cx="9144000" cy="323850"/>
+          </a:xfrm>
+          <a:prstGeom xmlns:a="http://schemas.openxmlformats.org/drawingml/2006/main" prst="rect">
+            <a:avLst/>
+          </a:prstGeom>
+          <a:solidFill xmlns:a="http://schemas.openxmlformats.org/drawingml/2006/main">
+            <a:srgbClr val="002855"/>
+          </a:solidFill>
+          <a:ln xmlns:a="http://schemas.openxmlformats.org/drawingml/2006/main" w="0">
+            <a:noFill/>
+          </a:ln>
+        </p:spPr>
+      </p:sp>
+      <p:sp>
+        <p:nvSpPr>
+          <p:cNvPr id="15" name="WVU DSPIRA gold rule"/>
+          <p:cNvSpPr>
+            <a:spLocks xmlns:a="http://schemas.openxmlformats.org/drawingml/2006/main" noGrp="1"/>
+          </p:cNvSpPr>
+          <p:nvPr/>
+        </p:nvSpPr>
+        <p:spPr>
+          <a:xfrm xmlns:a="http://schemas.openxmlformats.org/drawingml/2006/main">
+            <a:off x="0" y="323850"/>
+            <a:ext cx="9144000" cy="19050"/>
+          </a:xfrm>
+          <a:prstGeom xmlns:a="http://schemas.openxmlformats.org/drawingml/2006/main" prst="rect">
+            <a:avLst/>
+          </a:prstGeom>
+          <a:solidFill xmlns:a="http://schemas.openxmlformats.org/drawingml/2006/main">
+            <a:srgbClr val="EEAA00"/>
+          </a:solidFill>
+          <a:ln xmlns:a="http://schemas.openxmlformats.org/drawingml/2006/main" w="0">
+            <a:noFill/>
+          </a:ln>
+        </p:spPr>
+      </p:sp>
+      <p:sp>
+        <p:nvSpPr>
+          <p:cNvPr id="16" name="WVU DSPIRA name"/>
+          <p:cNvSpPr>
+            <a:spLocks xmlns:a="http://schemas.openxmlformats.org/drawingml/2006/main" noGrp="1"/>
+          </p:cNvSpPr>
+          <p:nvPr/>
+        </p:nvSpPr>
+        <p:spPr>
+          <a:xfrm xmlns:a="http://schemas.openxmlformats.org/drawingml/2006/main">
+            <a:off x="228600" y="19050"/>
+            <a:ext cx="2857500" cy="257175"/>
+          </a:xfrm>
+          <a:prstGeom xmlns:a="http://schemas.openxmlformats.org/drawingml/2006/main" prst="rect">
+            <a:avLst/>
+          </a:prstGeom>
+          <a:noFill xmlns:a="http://schemas.openxmlformats.org/drawingml/2006/main"/>
+          <a:ln xmlns:a="http://schemas.openxmlformats.org/drawingml/2006/main" w="0">
+            <a:noFill/>
+          </a:ln>
+        </p:spPr>
+        <p:txBody>
+          <a:bodyPr xmlns:a="http://schemas.openxmlformats.org/drawingml/2006/main">
+            <a:noAutofit/>
+          </a:bodyPr>
+          <a:lstStyle xmlns:a="http://schemas.openxmlformats.org/drawingml/2006/main"/>
+          <a:p xmlns:a="http://schemas.openxmlformats.org/drawingml/2006/main">
+            <a:pPr>
+              <a:defRPr sz="1600" b="1">
+                <a:solidFill>
+                  <a:srgbClr val="FFFFFF"/>
+                </a:solidFill>
+                <a:latin typeface="Arial"/>
+                <a:ea typeface="Arial"/>
+                <a:cs typeface="Arial"/>
+              </a:defRPr>
+            </a:pPr>
+            <a:r>
+              <a:rPr sz="1600" b="1">
+                <a:solidFill>
+                  <a:srgbClr val="FFFFFF"/>
+                </a:solidFill>
+                <a:latin typeface="Arial"/>
+                <a:ea typeface="Arial"/>
+                <a:cs typeface="Arial"/>
+              </a:rPr>
+              <a:t>WVU DSPIRA</a:t>
+            </a:r>
+          </a:p>
+        </p:txBody>
+      </p:sp>
+      <p:sp>
+        <p:nvSpPr>
+          <p:cNvPr id="17" name="WVU DSPIRA university"/>
+          <p:cNvSpPr>
+            <a:spLocks xmlns:a="http://schemas.openxmlformats.org/drawingml/2006/main" noGrp="1"/>
+          </p:cNvSpPr>
+          <p:nvPr/>
+        </p:nvSpPr>
+        <p:spPr>
+          <a:xfrm xmlns:a="http://schemas.openxmlformats.org/drawingml/2006/main">
+            <a:off x="6286500" y="114300"/>
+            <a:ext cx="2628900" cy="171450"/>
+          </a:xfrm>
+          <a:prstGeom xmlns:a="http://schemas.openxmlformats.org/drawingml/2006/main" prst="rect">
+            <a:avLst/>
+          </a:prstGeom>
+          <a:noFill xmlns:a="http://schemas.openxmlformats.org/drawingml/2006/main"/>
+          <a:ln xmlns:a="http://schemas.openxmlformats.org/drawingml/2006/main" w="0">
+            <a:noFill/>
+          </a:ln>
+        </p:spPr>
+        <p:txBody>
+          <a:bodyPr xmlns:a="http://schemas.openxmlformats.org/drawingml/2006/main">
+            <a:noAutofit/>
+          </a:bodyPr>
+          <a:lstStyle xmlns:a="http://schemas.openxmlformats.org/drawingml/2006/main"/>
+          <a:p xmlns:a="http://schemas.openxmlformats.org/drawingml/2006/main">
+            <a:pPr algn="r">
+              <a:defRPr sz="900">
+                <a:solidFill>
+                  <a:srgbClr val="FFFFFF"/>
+                </a:solidFill>
+                <a:latin typeface="Arial"/>
+                <a:ea typeface="Arial"/>
+                <a:cs typeface="Arial"/>
+              </a:defRPr>
+            </a:pPr>
+            <a:r>
+              <a:rPr sz="900">
+                <a:solidFill>
+                  <a:srgbClr val="FFFFFF"/>
+                </a:solidFill>
+                <a:latin typeface="Arial"/>
+                <a:ea typeface="Arial"/>
+                <a:cs typeface="Arial"/>
+              </a:rPr>
+              <a:t>WEST VIRGINIA UNIVERSITY</a:t>
             </a:r>
           </a:p>
         </p:txBody>
@@ -12215,67 +13105,6 @@
       </p:sp>
       <p:sp>
         <p:nvSpPr>
-          <p:cNvPr id="11" name="">
-            <a:extLst xmlns:a="http://schemas.openxmlformats.org/drawingml/2006/main">
-              <a:ext uri="{FF2B5EF4-FFF2-40B4-BE49-F238E27FC236}">
-                <a16:creationId xmlns:a16="http://schemas.microsoft.com/office/drawing/2014/main" id="{24FBCCB5-E8F9-4D2E-BF8B-C045236AE177}"/>
-              </a:ext>
-            </a:extLst>
-          </p:cNvPr>
-          <p:cNvSpPr>
-            <a:spLocks xmlns:a="http://schemas.openxmlformats.org/drawingml/2006/main" noGrp="1"/>
-          </p:cNvSpPr>
-          <p:nvPr/>
-        </p:nvSpPr>
-        <p:spPr>
-          <a:xfrm xmlns:a="http://schemas.openxmlformats.org/drawingml/2006/main">
-            <a:off x="228600" y="76200"/>
-            <a:ext cx="8686800" cy="228600"/>
-          </a:xfrm>
-          <a:prstGeom xmlns:a="http://schemas.openxmlformats.org/drawingml/2006/main" prst="rect">
-            <a:avLst/>
-          </a:prstGeom>
-          <a:noFill xmlns:a="http://schemas.openxmlformats.org/drawingml/2006/main"/>
-          <a:ln xmlns:a="http://schemas.openxmlformats.org/drawingml/2006/main" w="0">
-            <a:noFill/>
-          </a:ln>
-        </p:spPr>
-        <p:txBody>
-          <a:bodyPr xmlns:a="http://schemas.openxmlformats.org/drawingml/2006/main" wrap="none" lIns="0" tIns="0" rIns="0" bIns="0" anchor="t">
-            <a:noAutofit/>
-          </a:bodyPr>
-          <a:lstStyle xmlns:a="http://schemas.openxmlformats.org/drawingml/2006/main"/>
-          <a:p xmlns:a="http://schemas.openxmlformats.org/drawingml/2006/main">
-            <a:pPr>
-              <a:lnSpc>
-                <a:spcPct val="100000"/>
-              </a:lnSpc>
-              <a:buNone/>
-              <a:defRPr sz="1200" b="1" i="0">
-                <a:solidFill>
-                  <a:srgbClr val="002855"/>
-                </a:solidFill>
-                <a:latin typeface="Arial"/>
-                <a:ea typeface="Arial"/>
-                <a:cs typeface="Arial"/>
-              </a:defRPr>
-            </a:pPr>
-            <a:r>
-              <a:rPr sz="1200" b="1" i="0">
-                <a:solidFill>
-                  <a:srgbClr val="002855"/>
-                </a:solidFill>
-                <a:latin typeface="Arial"/>
-                <a:ea typeface="Arial"/>
-                <a:cs typeface="Arial"/>
-              </a:rPr>
-              <a:t>WVU DSPIRA</a:t>
-            </a:r>
-          </a:p>
-        </p:txBody>
-      </p:sp>
-      <p:sp>
-        <p:nvSpPr>
           <p:cNvPr id="12" name="">
             <a:extLst xmlns:a="http://schemas.openxmlformats.org/drawingml/2006/main">
               <a:ext uri="{FF2B5EF4-FFF2-40B4-BE49-F238E27FC236}">
@@ -12392,6 +13221,156 @@
                 <a:cs typeface="Arial"/>
               </a:rPr>
               <a:t>19 of 27</a:t>
+            </a:r>
+          </a:p>
+        </p:txBody>
+      </p:sp>
+      <p:sp>
+        <p:nvSpPr>
+          <p:cNvPr id="15" name="WVU DSPIRA navy band"/>
+          <p:cNvSpPr>
+            <a:spLocks xmlns:a="http://schemas.openxmlformats.org/drawingml/2006/main" noGrp="1"/>
+          </p:cNvSpPr>
+          <p:nvPr/>
+        </p:nvSpPr>
+        <p:spPr>
+          <a:xfrm xmlns:a="http://schemas.openxmlformats.org/drawingml/2006/main">
+            <a:off x="0" y="0"/>
+            <a:ext cx="9144000" cy="323850"/>
+          </a:xfrm>
+          <a:prstGeom xmlns:a="http://schemas.openxmlformats.org/drawingml/2006/main" prst="rect">
+            <a:avLst/>
+          </a:prstGeom>
+          <a:solidFill xmlns:a="http://schemas.openxmlformats.org/drawingml/2006/main">
+            <a:srgbClr val="002855"/>
+          </a:solidFill>
+          <a:ln xmlns:a="http://schemas.openxmlformats.org/drawingml/2006/main" w="0">
+            <a:noFill/>
+          </a:ln>
+        </p:spPr>
+      </p:sp>
+      <p:sp>
+        <p:nvSpPr>
+          <p:cNvPr id="16" name="WVU DSPIRA gold rule"/>
+          <p:cNvSpPr>
+            <a:spLocks xmlns:a="http://schemas.openxmlformats.org/drawingml/2006/main" noGrp="1"/>
+          </p:cNvSpPr>
+          <p:nvPr/>
+        </p:nvSpPr>
+        <p:spPr>
+          <a:xfrm xmlns:a="http://schemas.openxmlformats.org/drawingml/2006/main">
+            <a:off x="0" y="323850"/>
+            <a:ext cx="9144000" cy="19050"/>
+          </a:xfrm>
+          <a:prstGeom xmlns:a="http://schemas.openxmlformats.org/drawingml/2006/main" prst="rect">
+            <a:avLst/>
+          </a:prstGeom>
+          <a:solidFill xmlns:a="http://schemas.openxmlformats.org/drawingml/2006/main">
+            <a:srgbClr val="EEAA00"/>
+          </a:solidFill>
+          <a:ln xmlns:a="http://schemas.openxmlformats.org/drawingml/2006/main" w="0">
+            <a:noFill/>
+          </a:ln>
+        </p:spPr>
+      </p:sp>
+      <p:sp>
+        <p:nvSpPr>
+          <p:cNvPr id="17" name="WVU DSPIRA name"/>
+          <p:cNvSpPr>
+            <a:spLocks xmlns:a="http://schemas.openxmlformats.org/drawingml/2006/main" noGrp="1"/>
+          </p:cNvSpPr>
+          <p:nvPr/>
+        </p:nvSpPr>
+        <p:spPr>
+          <a:xfrm xmlns:a="http://schemas.openxmlformats.org/drawingml/2006/main">
+            <a:off x="228600" y="19050"/>
+            <a:ext cx="2857500" cy="257175"/>
+          </a:xfrm>
+          <a:prstGeom xmlns:a="http://schemas.openxmlformats.org/drawingml/2006/main" prst="rect">
+            <a:avLst/>
+          </a:prstGeom>
+          <a:noFill xmlns:a="http://schemas.openxmlformats.org/drawingml/2006/main"/>
+          <a:ln xmlns:a="http://schemas.openxmlformats.org/drawingml/2006/main" w="0">
+            <a:noFill/>
+          </a:ln>
+        </p:spPr>
+        <p:txBody>
+          <a:bodyPr xmlns:a="http://schemas.openxmlformats.org/drawingml/2006/main">
+            <a:noAutofit/>
+          </a:bodyPr>
+          <a:lstStyle xmlns:a="http://schemas.openxmlformats.org/drawingml/2006/main"/>
+          <a:p xmlns:a="http://schemas.openxmlformats.org/drawingml/2006/main">
+            <a:pPr>
+              <a:defRPr sz="1600" b="1">
+                <a:solidFill>
+                  <a:srgbClr val="FFFFFF"/>
+                </a:solidFill>
+                <a:latin typeface="Arial"/>
+                <a:ea typeface="Arial"/>
+                <a:cs typeface="Arial"/>
+              </a:defRPr>
+            </a:pPr>
+            <a:r>
+              <a:rPr sz="1600" b="1">
+                <a:solidFill>
+                  <a:srgbClr val="FFFFFF"/>
+                </a:solidFill>
+                <a:latin typeface="Arial"/>
+                <a:ea typeface="Arial"/>
+                <a:cs typeface="Arial"/>
+              </a:rPr>
+              <a:t>WVU DSPIRA</a:t>
+            </a:r>
+          </a:p>
+        </p:txBody>
+      </p:sp>
+      <p:sp>
+        <p:nvSpPr>
+          <p:cNvPr id="18" name="WVU DSPIRA university"/>
+          <p:cNvSpPr>
+            <a:spLocks xmlns:a="http://schemas.openxmlformats.org/drawingml/2006/main" noGrp="1"/>
+          </p:cNvSpPr>
+          <p:nvPr/>
+        </p:nvSpPr>
+        <p:spPr>
+          <a:xfrm xmlns:a="http://schemas.openxmlformats.org/drawingml/2006/main">
+            <a:off x="6286500" y="114300"/>
+            <a:ext cx="2628900" cy="171450"/>
+          </a:xfrm>
+          <a:prstGeom xmlns:a="http://schemas.openxmlformats.org/drawingml/2006/main" prst="rect">
+            <a:avLst/>
+          </a:prstGeom>
+          <a:noFill xmlns:a="http://schemas.openxmlformats.org/drawingml/2006/main"/>
+          <a:ln xmlns:a="http://schemas.openxmlformats.org/drawingml/2006/main" w="0">
+            <a:noFill/>
+          </a:ln>
+        </p:spPr>
+        <p:txBody>
+          <a:bodyPr xmlns:a="http://schemas.openxmlformats.org/drawingml/2006/main">
+            <a:noAutofit/>
+          </a:bodyPr>
+          <a:lstStyle xmlns:a="http://schemas.openxmlformats.org/drawingml/2006/main"/>
+          <a:p xmlns:a="http://schemas.openxmlformats.org/drawingml/2006/main">
+            <a:pPr algn="r">
+              <a:defRPr sz="900">
+                <a:solidFill>
+                  <a:srgbClr val="FFFFFF"/>
+                </a:solidFill>
+                <a:latin typeface="Arial"/>
+                <a:ea typeface="Arial"/>
+                <a:cs typeface="Arial"/>
+              </a:defRPr>
+            </a:pPr>
+            <a:r>
+              <a:rPr sz="900">
+                <a:solidFill>
+                  <a:srgbClr val="FFFFFF"/>
+                </a:solidFill>
+                <a:latin typeface="Arial"/>
+                <a:ea typeface="Arial"/>
+                <a:cs typeface="Arial"/>
+              </a:rPr>
+              <a:t>WEST VIRGINIA UNIVERSITY</a:t>
             </a:r>
           </a:p>
         </p:txBody>
@@ -12998,67 +13977,6 @@
       </p:sp>
       <p:sp>
         <p:nvSpPr>
-          <p:cNvPr id="11" name="">
-            <a:extLst xmlns:a="http://schemas.openxmlformats.org/drawingml/2006/main">
-              <a:ext uri="{FF2B5EF4-FFF2-40B4-BE49-F238E27FC236}">
-                <a16:creationId xmlns:a16="http://schemas.microsoft.com/office/drawing/2014/main" id="{4EB6F5A8-4802-4503-B151-4CEB007A97A6}"/>
-              </a:ext>
-            </a:extLst>
-          </p:cNvPr>
-          <p:cNvSpPr>
-            <a:spLocks xmlns:a="http://schemas.openxmlformats.org/drawingml/2006/main" noGrp="1"/>
-          </p:cNvSpPr>
-          <p:nvPr/>
-        </p:nvSpPr>
-        <p:spPr>
-          <a:xfrm xmlns:a="http://schemas.openxmlformats.org/drawingml/2006/main">
-            <a:off x="228600" y="76200"/>
-            <a:ext cx="8686800" cy="228600"/>
-          </a:xfrm>
-          <a:prstGeom xmlns:a="http://schemas.openxmlformats.org/drawingml/2006/main" prst="rect">
-            <a:avLst/>
-          </a:prstGeom>
-          <a:noFill xmlns:a="http://schemas.openxmlformats.org/drawingml/2006/main"/>
-          <a:ln xmlns:a="http://schemas.openxmlformats.org/drawingml/2006/main" w="0">
-            <a:noFill/>
-          </a:ln>
-        </p:spPr>
-        <p:txBody>
-          <a:bodyPr xmlns:a="http://schemas.openxmlformats.org/drawingml/2006/main" wrap="none" lIns="0" tIns="0" rIns="0" bIns="0" anchor="t">
-            <a:noAutofit/>
-          </a:bodyPr>
-          <a:lstStyle xmlns:a="http://schemas.openxmlformats.org/drawingml/2006/main"/>
-          <a:p xmlns:a="http://schemas.openxmlformats.org/drawingml/2006/main">
-            <a:pPr>
-              <a:lnSpc>
-                <a:spcPct val="100000"/>
-              </a:lnSpc>
-              <a:buNone/>
-              <a:defRPr sz="1200" b="1" i="0">
-                <a:solidFill>
-                  <a:srgbClr val="002855"/>
-                </a:solidFill>
-                <a:latin typeface="Arial"/>
-                <a:ea typeface="Arial"/>
-                <a:cs typeface="Arial"/>
-              </a:defRPr>
-            </a:pPr>
-            <a:r>
-              <a:rPr sz="1200" b="1" i="0">
-                <a:solidFill>
-                  <a:srgbClr val="002855"/>
-                </a:solidFill>
-                <a:latin typeface="Arial"/>
-                <a:ea typeface="Arial"/>
-                <a:cs typeface="Arial"/>
-              </a:rPr>
-              <a:t>WVU DSPIRA</a:t>
-            </a:r>
-          </a:p>
-        </p:txBody>
-      </p:sp>
-      <p:sp>
-        <p:nvSpPr>
           <p:cNvPr id="12" name="">
             <a:extLst xmlns:a="http://schemas.openxmlformats.org/drawingml/2006/main">
               <a:ext uri="{FF2B5EF4-FFF2-40B4-BE49-F238E27FC236}">
@@ -13175,6 +14093,156 @@
                 <a:cs typeface="Arial"/>
               </a:rPr>
               <a:t>2 of 27</a:t>
+            </a:r>
+          </a:p>
+        </p:txBody>
+      </p:sp>
+      <p:sp>
+        <p:nvSpPr>
+          <p:cNvPr id="15" name="WVU DSPIRA navy band"/>
+          <p:cNvSpPr>
+            <a:spLocks xmlns:a="http://schemas.openxmlformats.org/drawingml/2006/main" noGrp="1"/>
+          </p:cNvSpPr>
+          <p:nvPr/>
+        </p:nvSpPr>
+        <p:spPr>
+          <a:xfrm xmlns:a="http://schemas.openxmlformats.org/drawingml/2006/main">
+            <a:off x="0" y="0"/>
+            <a:ext cx="9144000" cy="323850"/>
+          </a:xfrm>
+          <a:prstGeom xmlns:a="http://schemas.openxmlformats.org/drawingml/2006/main" prst="rect">
+            <a:avLst/>
+          </a:prstGeom>
+          <a:solidFill xmlns:a="http://schemas.openxmlformats.org/drawingml/2006/main">
+            <a:srgbClr val="002855"/>
+          </a:solidFill>
+          <a:ln xmlns:a="http://schemas.openxmlformats.org/drawingml/2006/main" w="0">
+            <a:noFill/>
+          </a:ln>
+        </p:spPr>
+      </p:sp>
+      <p:sp>
+        <p:nvSpPr>
+          <p:cNvPr id="16" name="WVU DSPIRA gold rule"/>
+          <p:cNvSpPr>
+            <a:spLocks xmlns:a="http://schemas.openxmlformats.org/drawingml/2006/main" noGrp="1"/>
+          </p:cNvSpPr>
+          <p:nvPr/>
+        </p:nvSpPr>
+        <p:spPr>
+          <a:xfrm xmlns:a="http://schemas.openxmlformats.org/drawingml/2006/main">
+            <a:off x="0" y="323850"/>
+            <a:ext cx="9144000" cy="19050"/>
+          </a:xfrm>
+          <a:prstGeom xmlns:a="http://schemas.openxmlformats.org/drawingml/2006/main" prst="rect">
+            <a:avLst/>
+          </a:prstGeom>
+          <a:solidFill xmlns:a="http://schemas.openxmlformats.org/drawingml/2006/main">
+            <a:srgbClr val="EEAA00"/>
+          </a:solidFill>
+          <a:ln xmlns:a="http://schemas.openxmlformats.org/drawingml/2006/main" w="0">
+            <a:noFill/>
+          </a:ln>
+        </p:spPr>
+      </p:sp>
+      <p:sp>
+        <p:nvSpPr>
+          <p:cNvPr id="17" name="WVU DSPIRA name"/>
+          <p:cNvSpPr>
+            <a:spLocks xmlns:a="http://schemas.openxmlformats.org/drawingml/2006/main" noGrp="1"/>
+          </p:cNvSpPr>
+          <p:nvPr/>
+        </p:nvSpPr>
+        <p:spPr>
+          <a:xfrm xmlns:a="http://schemas.openxmlformats.org/drawingml/2006/main">
+            <a:off x="228600" y="19050"/>
+            <a:ext cx="2857500" cy="257175"/>
+          </a:xfrm>
+          <a:prstGeom xmlns:a="http://schemas.openxmlformats.org/drawingml/2006/main" prst="rect">
+            <a:avLst/>
+          </a:prstGeom>
+          <a:noFill xmlns:a="http://schemas.openxmlformats.org/drawingml/2006/main"/>
+          <a:ln xmlns:a="http://schemas.openxmlformats.org/drawingml/2006/main" w="0">
+            <a:noFill/>
+          </a:ln>
+        </p:spPr>
+        <p:txBody>
+          <a:bodyPr xmlns:a="http://schemas.openxmlformats.org/drawingml/2006/main">
+            <a:noAutofit/>
+          </a:bodyPr>
+          <a:lstStyle xmlns:a="http://schemas.openxmlformats.org/drawingml/2006/main"/>
+          <a:p xmlns:a="http://schemas.openxmlformats.org/drawingml/2006/main">
+            <a:pPr>
+              <a:defRPr sz="1600" b="1">
+                <a:solidFill>
+                  <a:srgbClr val="FFFFFF"/>
+                </a:solidFill>
+                <a:latin typeface="Arial"/>
+                <a:ea typeface="Arial"/>
+                <a:cs typeface="Arial"/>
+              </a:defRPr>
+            </a:pPr>
+            <a:r>
+              <a:rPr sz="1600" b="1">
+                <a:solidFill>
+                  <a:srgbClr val="FFFFFF"/>
+                </a:solidFill>
+                <a:latin typeface="Arial"/>
+                <a:ea typeface="Arial"/>
+                <a:cs typeface="Arial"/>
+              </a:rPr>
+              <a:t>WVU DSPIRA</a:t>
+            </a:r>
+          </a:p>
+        </p:txBody>
+      </p:sp>
+      <p:sp>
+        <p:nvSpPr>
+          <p:cNvPr id="18" name="WVU DSPIRA university"/>
+          <p:cNvSpPr>
+            <a:spLocks xmlns:a="http://schemas.openxmlformats.org/drawingml/2006/main" noGrp="1"/>
+          </p:cNvSpPr>
+          <p:nvPr/>
+        </p:nvSpPr>
+        <p:spPr>
+          <a:xfrm xmlns:a="http://schemas.openxmlformats.org/drawingml/2006/main">
+            <a:off x="6286500" y="114300"/>
+            <a:ext cx="2628900" cy="171450"/>
+          </a:xfrm>
+          <a:prstGeom xmlns:a="http://schemas.openxmlformats.org/drawingml/2006/main" prst="rect">
+            <a:avLst/>
+          </a:prstGeom>
+          <a:noFill xmlns:a="http://schemas.openxmlformats.org/drawingml/2006/main"/>
+          <a:ln xmlns:a="http://schemas.openxmlformats.org/drawingml/2006/main" w="0">
+            <a:noFill/>
+          </a:ln>
+        </p:spPr>
+        <p:txBody>
+          <a:bodyPr xmlns:a="http://schemas.openxmlformats.org/drawingml/2006/main">
+            <a:noAutofit/>
+          </a:bodyPr>
+          <a:lstStyle xmlns:a="http://schemas.openxmlformats.org/drawingml/2006/main"/>
+          <a:p xmlns:a="http://schemas.openxmlformats.org/drawingml/2006/main">
+            <a:pPr algn="r">
+              <a:defRPr sz="900">
+                <a:solidFill>
+                  <a:srgbClr val="FFFFFF"/>
+                </a:solidFill>
+                <a:latin typeface="Arial"/>
+                <a:ea typeface="Arial"/>
+                <a:cs typeface="Arial"/>
+              </a:defRPr>
+            </a:pPr>
+            <a:r>
+              <a:rPr sz="900">
+                <a:solidFill>
+                  <a:srgbClr val="FFFFFF"/>
+                </a:solidFill>
+                <a:latin typeface="Arial"/>
+                <a:ea typeface="Arial"/>
+                <a:cs typeface="Arial"/>
+              </a:rPr>
+              <a:t>WEST VIRGINIA UNIVERSITY</a:t>
             </a:r>
           </a:p>
         </p:txBody>
@@ -13964,67 +15032,6 @@
       </p:sp>
       <p:sp>
         <p:nvSpPr>
-          <p:cNvPr id="14" name="">
-            <a:extLst xmlns:a="http://schemas.openxmlformats.org/drawingml/2006/main">
-              <a:ext uri="{FF2B5EF4-FFF2-40B4-BE49-F238E27FC236}">
-                <a16:creationId xmlns:a16="http://schemas.microsoft.com/office/drawing/2014/main" id="{389F6576-9320-4DB1-AB38-A752153BD520}"/>
-              </a:ext>
-            </a:extLst>
-          </p:cNvPr>
-          <p:cNvSpPr>
-            <a:spLocks xmlns:a="http://schemas.openxmlformats.org/drawingml/2006/main" noGrp="1"/>
-          </p:cNvSpPr>
-          <p:nvPr/>
-        </p:nvSpPr>
-        <p:spPr>
-          <a:xfrm xmlns:a="http://schemas.openxmlformats.org/drawingml/2006/main">
-            <a:off x="228600" y="76200"/>
-            <a:ext cx="8686800" cy="228600"/>
-          </a:xfrm>
-          <a:prstGeom xmlns:a="http://schemas.openxmlformats.org/drawingml/2006/main" prst="rect">
-            <a:avLst/>
-          </a:prstGeom>
-          <a:noFill xmlns:a="http://schemas.openxmlformats.org/drawingml/2006/main"/>
-          <a:ln xmlns:a="http://schemas.openxmlformats.org/drawingml/2006/main" w="0">
-            <a:noFill/>
-          </a:ln>
-        </p:spPr>
-        <p:txBody>
-          <a:bodyPr xmlns:a="http://schemas.openxmlformats.org/drawingml/2006/main" wrap="none" lIns="0" tIns="0" rIns="0" bIns="0" anchor="t">
-            <a:noAutofit/>
-          </a:bodyPr>
-          <a:lstStyle xmlns:a="http://schemas.openxmlformats.org/drawingml/2006/main"/>
-          <a:p xmlns:a="http://schemas.openxmlformats.org/drawingml/2006/main">
-            <a:pPr>
-              <a:lnSpc>
-                <a:spcPct val="100000"/>
-              </a:lnSpc>
-              <a:buNone/>
-              <a:defRPr sz="1200" b="1" i="0">
-                <a:solidFill>
-                  <a:srgbClr val="002855"/>
-                </a:solidFill>
-                <a:latin typeface="Arial"/>
-                <a:ea typeface="Arial"/>
-                <a:cs typeface="Arial"/>
-              </a:defRPr>
-            </a:pPr>
-            <a:r>
-              <a:rPr sz="1200" b="1" i="0">
-                <a:solidFill>
-                  <a:srgbClr val="002855"/>
-                </a:solidFill>
-                <a:latin typeface="Arial"/>
-                <a:ea typeface="Arial"/>
-                <a:cs typeface="Arial"/>
-              </a:rPr>
-              <a:t>WVU DSPIRA</a:t>
-            </a:r>
-          </a:p>
-        </p:txBody>
-      </p:sp>
-      <p:sp>
-        <p:nvSpPr>
           <p:cNvPr id="15" name="">
             <a:extLst xmlns:a="http://schemas.openxmlformats.org/drawingml/2006/main">
               <a:ext uri="{FF2B5EF4-FFF2-40B4-BE49-F238E27FC236}">
@@ -14141,6 +15148,156 @@
                 <a:cs typeface="Arial"/>
               </a:rPr>
               <a:t>20 of 27</a:t>
+            </a:r>
+          </a:p>
+        </p:txBody>
+      </p:sp>
+      <p:sp>
+        <p:nvSpPr>
+          <p:cNvPr id="18" name="WVU DSPIRA navy band"/>
+          <p:cNvSpPr>
+            <a:spLocks xmlns:a="http://schemas.openxmlformats.org/drawingml/2006/main" noGrp="1"/>
+          </p:cNvSpPr>
+          <p:nvPr/>
+        </p:nvSpPr>
+        <p:spPr>
+          <a:xfrm xmlns:a="http://schemas.openxmlformats.org/drawingml/2006/main">
+            <a:off x="0" y="0"/>
+            <a:ext cx="9144000" cy="323850"/>
+          </a:xfrm>
+          <a:prstGeom xmlns:a="http://schemas.openxmlformats.org/drawingml/2006/main" prst="rect">
+            <a:avLst/>
+          </a:prstGeom>
+          <a:solidFill xmlns:a="http://schemas.openxmlformats.org/drawingml/2006/main">
+            <a:srgbClr val="002855"/>
+          </a:solidFill>
+          <a:ln xmlns:a="http://schemas.openxmlformats.org/drawingml/2006/main" w="0">
+            <a:noFill/>
+          </a:ln>
+        </p:spPr>
+      </p:sp>
+      <p:sp>
+        <p:nvSpPr>
+          <p:cNvPr id="19" name="WVU DSPIRA gold rule"/>
+          <p:cNvSpPr>
+            <a:spLocks xmlns:a="http://schemas.openxmlformats.org/drawingml/2006/main" noGrp="1"/>
+          </p:cNvSpPr>
+          <p:nvPr/>
+        </p:nvSpPr>
+        <p:spPr>
+          <a:xfrm xmlns:a="http://schemas.openxmlformats.org/drawingml/2006/main">
+            <a:off x="0" y="323850"/>
+            <a:ext cx="9144000" cy="19050"/>
+          </a:xfrm>
+          <a:prstGeom xmlns:a="http://schemas.openxmlformats.org/drawingml/2006/main" prst="rect">
+            <a:avLst/>
+          </a:prstGeom>
+          <a:solidFill xmlns:a="http://schemas.openxmlformats.org/drawingml/2006/main">
+            <a:srgbClr val="EEAA00"/>
+          </a:solidFill>
+          <a:ln xmlns:a="http://schemas.openxmlformats.org/drawingml/2006/main" w="0">
+            <a:noFill/>
+          </a:ln>
+        </p:spPr>
+      </p:sp>
+      <p:sp>
+        <p:nvSpPr>
+          <p:cNvPr id="20" name="WVU DSPIRA name"/>
+          <p:cNvSpPr>
+            <a:spLocks xmlns:a="http://schemas.openxmlformats.org/drawingml/2006/main" noGrp="1"/>
+          </p:cNvSpPr>
+          <p:nvPr/>
+        </p:nvSpPr>
+        <p:spPr>
+          <a:xfrm xmlns:a="http://schemas.openxmlformats.org/drawingml/2006/main">
+            <a:off x="228600" y="19050"/>
+            <a:ext cx="2857500" cy="257175"/>
+          </a:xfrm>
+          <a:prstGeom xmlns:a="http://schemas.openxmlformats.org/drawingml/2006/main" prst="rect">
+            <a:avLst/>
+          </a:prstGeom>
+          <a:noFill xmlns:a="http://schemas.openxmlformats.org/drawingml/2006/main"/>
+          <a:ln xmlns:a="http://schemas.openxmlformats.org/drawingml/2006/main" w="0">
+            <a:noFill/>
+          </a:ln>
+        </p:spPr>
+        <p:txBody>
+          <a:bodyPr xmlns:a="http://schemas.openxmlformats.org/drawingml/2006/main">
+            <a:noAutofit/>
+          </a:bodyPr>
+          <a:lstStyle xmlns:a="http://schemas.openxmlformats.org/drawingml/2006/main"/>
+          <a:p xmlns:a="http://schemas.openxmlformats.org/drawingml/2006/main">
+            <a:pPr>
+              <a:defRPr sz="1600" b="1">
+                <a:solidFill>
+                  <a:srgbClr val="FFFFFF"/>
+                </a:solidFill>
+                <a:latin typeface="Arial"/>
+                <a:ea typeface="Arial"/>
+                <a:cs typeface="Arial"/>
+              </a:defRPr>
+            </a:pPr>
+            <a:r>
+              <a:rPr sz="1600" b="1">
+                <a:solidFill>
+                  <a:srgbClr val="FFFFFF"/>
+                </a:solidFill>
+                <a:latin typeface="Arial"/>
+                <a:ea typeface="Arial"/>
+                <a:cs typeface="Arial"/>
+              </a:rPr>
+              <a:t>WVU DSPIRA</a:t>
+            </a:r>
+          </a:p>
+        </p:txBody>
+      </p:sp>
+      <p:sp>
+        <p:nvSpPr>
+          <p:cNvPr id="21" name="WVU DSPIRA university"/>
+          <p:cNvSpPr>
+            <a:spLocks xmlns:a="http://schemas.openxmlformats.org/drawingml/2006/main" noGrp="1"/>
+          </p:cNvSpPr>
+          <p:nvPr/>
+        </p:nvSpPr>
+        <p:spPr>
+          <a:xfrm xmlns:a="http://schemas.openxmlformats.org/drawingml/2006/main">
+            <a:off x="6286500" y="114300"/>
+            <a:ext cx="2628900" cy="171450"/>
+          </a:xfrm>
+          <a:prstGeom xmlns:a="http://schemas.openxmlformats.org/drawingml/2006/main" prst="rect">
+            <a:avLst/>
+          </a:prstGeom>
+          <a:noFill xmlns:a="http://schemas.openxmlformats.org/drawingml/2006/main"/>
+          <a:ln xmlns:a="http://schemas.openxmlformats.org/drawingml/2006/main" w="0">
+            <a:noFill/>
+          </a:ln>
+        </p:spPr>
+        <p:txBody>
+          <a:bodyPr xmlns:a="http://schemas.openxmlformats.org/drawingml/2006/main">
+            <a:noAutofit/>
+          </a:bodyPr>
+          <a:lstStyle xmlns:a="http://schemas.openxmlformats.org/drawingml/2006/main"/>
+          <a:p xmlns:a="http://schemas.openxmlformats.org/drawingml/2006/main">
+            <a:pPr algn="r">
+              <a:defRPr sz="900">
+                <a:solidFill>
+                  <a:srgbClr val="FFFFFF"/>
+                </a:solidFill>
+                <a:latin typeface="Arial"/>
+                <a:ea typeface="Arial"/>
+                <a:cs typeface="Arial"/>
+              </a:defRPr>
+            </a:pPr>
+            <a:r>
+              <a:rPr sz="900">
+                <a:solidFill>
+                  <a:srgbClr val="FFFFFF"/>
+                </a:solidFill>
+                <a:latin typeface="Arial"/>
+                <a:ea typeface="Arial"/>
+                <a:cs typeface="Arial"/>
+              </a:rPr>
+              <a:t>WEST VIRGINIA UNIVERSITY</a:t>
             </a:r>
           </a:p>
         </p:txBody>
@@ -14747,67 +15904,6 @@
       </p:sp>
       <p:sp>
         <p:nvSpPr>
-          <p:cNvPr id="11" name="">
-            <a:extLst xmlns:a="http://schemas.openxmlformats.org/drawingml/2006/main">
-              <a:ext uri="{FF2B5EF4-FFF2-40B4-BE49-F238E27FC236}">
-                <a16:creationId xmlns:a16="http://schemas.microsoft.com/office/drawing/2014/main" id="{5EA98309-313B-4E0F-B6DC-B60D427402D6}"/>
-              </a:ext>
-            </a:extLst>
-          </p:cNvPr>
-          <p:cNvSpPr>
-            <a:spLocks xmlns:a="http://schemas.openxmlformats.org/drawingml/2006/main" noGrp="1"/>
-          </p:cNvSpPr>
-          <p:nvPr/>
-        </p:nvSpPr>
-        <p:spPr>
-          <a:xfrm xmlns:a="http://schemas.openxmlformats.org/drawingml/2006/main">
-            <a:off x="228600" y="76200"/>
-            <a:ext cx="8686800" cy="228600"/>
-          </a:xfrm>
-          <a:prstGeom xmlns:a="http://schemas.openxmlformats.org/drawingml/2006/main" prst="rect">
-            <a:avLst/>
-          </a:prstGeom>
-          <a:noFill xmlns:a="http://schemas.openxmlformats.org/drawingml/2006/main"/>
-          <a:ln xmlns:a="http://schemas.openxmlformats.org/drawingml/2006/main" w="0">
-            <a:noFill/>
-          </a:ln>
-        </p:spPr>
-        <p:txBody>
-          <a:bodyPr xmlns:a="http://schemas.openxmlformats.org/drawingml/2006/main" wrap="none" lIns="0" tIns="0" rIns="0" bIns="0" anchor="t">
-            <a:noAutofit/>
-          </a:bodyPr>
-          <a:lstStyle xmlns:a="http://schemas.openxmlformats.org/drawingml/2006/main"/>
-          <a:p xmlns:a="http://schemas.openxmlformats.org/drawingml/2006/main">
-            <a:pPr>
-              <a:lnSpc>
-                <a:spcPct val="100000"/>
-              </a:lnSpc>
-              <a:buNone/>
-              <a:defRPr sz="1200" b="1" i="0">
-                <a:solidFill>
-                  <a:srgbClr val="002855"/>
-                </a:solidFill>
-                <a:latin typeface="Arial"/>
-                <a:ea typeface="Arial"/>
-                <a:cs typeface="Arial"/>
-              </a:defRPr>
-            </a:pPr>
-            <a:r>
-              <a:rPr sz="1200" b="1" i="0">
-                <a:solidFill>
-                  <a:srgbClr val="002855"/>
-                </a:solidFill>
-                <a:latin typeface="Arial"/>
-                <a:ea typeface="Arial"/>
-                <a:cs typeface="Arial"/>
-              </a:rPr>
-              <a:t>WVU DSPIRA</a:t>
-            </a:r>
-          </a:p>
-        </p:txBody>
-      </p:sp>
-      <p:sp>
-        <p:nvSpPr>
           <p:cNvPr id="12" name="">
             <a:extLst xmlns:a="http://schemas.openxmlformats.org/drawingml/2006/main">
               <a:ext uri="{FF2B5EF4-FFF2-40B4-BE49-F238E27FC236}">
@@ -14924,6 +16020,156 @@
                 <a:cs typeface="Arial"/>
               </a:rPr>
               <a:t>21 of 27</a:t>
+            </a:r>
+          </a:p>
+        </p:txBody>
+      </p:sp>
+      <p:sp>
+        <p:nvSpPr>
+          <p:cNvPr id="15" name="WVU DSPIRA navy band"/>
+          <p:cNvSpPr>
+            <a:spLocks xmlns:a="http://schemas.openxmlformats.org/drawingml/2006/main" noGrp="1"/>
+          </p:cNvSpPr>
+          <p:nvPr/>
+        </p:nvSpPr>
+        <p:spPr>
+          <a:xfrm xmlns:a="http://schemas.openxmlformats.org/drawingml/2006/main">
+            <a:off x="0" y="0"/>
+            <a:ext cx="9144000" cy="323850"/>
+          </a:xfrm>
+          <a:prstGeom xmlns:a="http://schemas.openxmlformats.org/drawingml/2006/main" prst="rect">
+            <a:avLst/>
+          </a:prstGeom>
+          <a:solidFill xmlns:a="http://schemas.openxmlformats.org/drawingml/2006/main">
+            <a:srgbClr val="002855"/>
+          </a:solidFill>
+          <a:ln xmlns:a="http://schemas.openxmlformats.org/drawingml/2006/main" w="0">
+            <a:noFill/>
+          </a:ln>
+        </p:spPr>
+      </p:sp>
+      <p:sp>
+        <p:nvSpPr>
+          <p:cNvPr id="16" name="WVU DSPIRA gold rule"/>
+          <p:cNvSpPr>
+            <a:spLocks xmlns:a="http://schemas.openxmlformats.org/drawingml/2006/main" noGrp="1"/>
+          </p:cNvSpPr>
+          <p:nvPr/>
+        </p:nvSpPr>
+        <p:spPr>
+          <a:xfrm xmlns:a="http://schemas.openxmlformats.org/drawingml/2006/main">
+            <a:off x="0" y="323850"/>
+            <a:ext cx="9144000" cy="19050"/>
+          </a:xfrm>
+          <a:prstGeom xmlns:a="http://schemas.openxmlformats.org/drawingml/2006/main" prst="rect">
+            <a:avLst/>
+          </a:prstGeom>
+          <a:solidFill xmlns:a="http://schemas.openxmlformats.org/drawingml/2006/main">
+            <a:srgbClr val="EEAA00"/>
+          </a:solidFill>
+          <a:ln xmlns:a="http://schemas.openxmlformats.org/drawingml/2006/main" w="0">
+            <a:noFill/>
+          </a:ln>
+        </p:spPr>
+      </p:sp>
+      <p:sp>
+        <p:nvSpPr>
+          <p:cNvPr id="17" name="WVU DSPIRA name"/>
+          <p:cNvSpPr>
+            <a:spLocks xmlns:a="http://schemas.openxmlformats.org/drawingml/2006/main" noGrp="1"/>
+          </p:cNvSpPr>
+          <p:nvPr/>
+        </p:nvSpPr>
+        <p:spPr>
+          <a:xfrm xmlns:a="http://schemas.openxmlformats.org/drawingml/2006/main">
+            <a:off x="228600" y="19050"/>
+            <a:ext cx="2857500" cy="257175"/>
+          </a:xfrm>
+          <a:prstGeom xmlns:a="http://schemas.openxmlformats.org/drawingml/2006/main" prst="rect">
+            <a:avLst/>
+          </a:prstGeom>
+          <a:noFill xmlns:a="http://schemas.openxmlformats.org/drawingml/2006/main"/>
+          <a:ln xmlns:a="http://schemas.openxmlformats.org/drawingml/2006/main" w="0">
+            <a:noFill/>
+          </a:ln>
+        </p:spPr>
+        <p:txBody>
+          <a:bodyPr xmlns:a="http://schemas.openxmlformats.org/drawingml/2006/main">
+            <a:noAutofit/>
+          </a:bodyPr>
+          <a:lstStyle xmlns:a="http://schemas.openxmlformats.org/drawingml/2006/main"/>
+          <a:p xmlns:a="http://schemas.openxmlformats.org/drawingml/2006/main">
+            <a:pPr>
+              <a:defRPr sz="1600" b="1">
+                <a:solidFill>
+                  <a:srgbClr val="FFFFFF"/>
+                </a:solidFill>
+                <a:latin typeface="Arial"/>
+                <a:ea typeface="Arial"/>
+                <a:cs typeface="Arial"/>
+              </a:defRPr>
+            </a:pPr>
+            <a:r>
+              <a:rPr sz="1600" b="1">
+                <a:solidFill>
+                  <a:srgbClr val="FFFFFF"/>
+                </a:solidFill>
+                <a:latin typeface="Arial"/>
+                <a:ea typeface="Arial"/>
+                <a:cs typeface="Arial"/>
+              </a:rPr>
+              <a:t>WVU DSPIRA</a:t>
+            </a:r>
+          </a:p>
+        </p:txBody>
+      </p:sp>
+      <p:sp>
+        <p:nvSpPr>
+          <p:cNvPr id="18" name="WVU DSPIRA university"/>
+          <p:cNvSpPr>
+            <a:spLocks xmlns:a="http://schemas.openxmlformats.org/drawingml/2006/main" noGrp="1"/>
+          </p:cNvSpPr>
+          <p:nvPr/>
+        </p:nvSpPr>
+        <p:spPr>
+          <a:xfrm xmlns:a="http://schemas.openxmlformats.org/drawingml/2006/main">
+            <a:off x="6286500" y="114300"/>
+            <a:ext cx="2628900" cy="171450"/>
+          </a:xfrm>
+          <a:prstGeom xmlns:a="http://schemas.openxmlformats.org/drawingml/2006/main" prst="rect">
+            <a:avLst/>
+          </a:prstGeom>
+          <a:noFill xmlns:a="http://schemas.openxmlformats.org/drawingml/2006/main"/>
+          <a:ln xmlns:a="http://schemas.openxmlformats.org/drawingml/2006/main" w="0">
+            <a:noFill/>
+          </a:ln>
+        </p:spPr>
+        <p:txBody>
+          <a:bodyPr xmlns:a="http://schemas.openxmlformats.org/drawingml/2006/main">
+            <a:noAutofit/>
+          </a:bodyPr>
+          <a:lstStyle xmlns:a="http://schemas.openxmlformats.org/drawingml/2006/main"/>
+          <a:p xmlns:a="http://schemas.openxmlformats.org/drawingml/2006/main">
+            <a:pPr algn="r">
+              <a:defRPr sz="900">
+                <a:solidFill>
+                  <a:srgbClr val="FFFFFF"/>
+                </a:solidFill>
+                <a:latin typeface="Arial"/>
+                <a:ea typeface="Arial"/>
+                <a:cs typeface="Arial"/>
+              </a:defRPr>
+            </a:pPr>
+            <a:r>
+              <a:rPr sz="900">
+                <a:solidFill>
+                  <a:srgbClr val="FFFFFF"/>
+                </a:solidFill>
+                <a:latin typeface="Arial"/>
+                <a:ea typeface="Arial"/>
+                <a:cs typeface="Arial"/>
+              </a:rPr>
+              <a:t>WEST VIRGINIA UNIVERSITY</a:t>
             </a:r>
           </a:p>
         </p:txBody>
@@ -15774,67 +17020,6 @@
       </p:sp>
       <p:sp>
         <p:nvSpPr>
-          <p:cNvPr id="15" name="">
-            <a:extLst xmlns:a="http://schemas.openxmlformats.org/drawingml/2006/main">
-              <a:ext uri="{FF2B5EF4-FFF2-40B4-BE49-F238E27FC236}">
-                <a16:creationId xmlns:a16="http://schemas.microsoft.com/office/drawing/2014/main" id="{607198C0-C098-4E73-9B70-0FEB9FBE3D3D}"/>
-              </a:ext>
-            </a:extLst>
-          </p:cNvPr>
-          <p:cNvSpPr>
-            <a:spLocks xmlns:a="http://schemas.openxmlformats.org/drawingml/2006/main" noGrp="1"/>
-          </p:cNvSpPr>
-          <p:nvPr/>
-        </p:nvSpPr>
-        <p:spPr>
-          <a:xfrm xmlns:a="http://schemas.openxmlformats.org/drawingml/2006/main">
-            <a:off x="228600" y="76200"/>
-            <a:ext cx="8686800" cy="228600"/>
-          </a:xfrm>
-          <a:prstGeom xmlns:a="http://schemas.openxmlformats.org/drawingml/2006/main" prst="rect">
-            <a:avLst/>
-          </a:prstGeom>
-          <a:noFill xmlns:a="http://schemas.openxmlformats.org/drawingml/2006/main"/>
-          <a:ln xmlns:a="http://schemas.openxmlformats.org/drawingml/2006/main" w="0">
-            <a:noFill/>
-          </a:ln>
-        </p:spPr>
-        <p:txBody>
-          <a:bodyPr xmlns:a="http://schemas.openxmlformats.org/drawingml/2006/main" wrap="none" lIns="0" tIns="0" rIns="0" bIns="0" anchor="t">
-            <a:noAutofit/>
-          </a:bodyPr>
-          <a:lstStyle xmlns:a="http://schemas.openxmlformats.org/drawingml/2006/main"/>
-          <a:p xmlns:a="http://schemas.openxmlformats.org/drawingml/2006/main">
-            <a:pPr>
-              <a:lnSpc>
-                <a:spcPct val="100000"/>
-              </a:lnSpc>
-              <a:buNone/>
-              <a:defRPr sz="1200" b="1" i="0">
-                <a:solidFill>
-                  <a:srgbClr val="002855"/>
-                </a:solidFill>
-                <a:latin typeface="Arial"/>
-                <a:ea typeface="Arial"/>
-                <a:cs typeface="Arial"/>
-              </a:defRPr>
-            </a:pPr>
-            <a:r>
-              <a:rPr sz="1200" b="1" i="0">
-                <a:solidFill>
-                  <a:srgbClr val="002855"/>
-                </a:solidFill>
-                <a:latin typeface="Arial"/>
-                <a:ea typeface="Arial"/>
-                <a:cs typeface="Arial"/>
-              </a:rPr>
-              <a:t>WVU DSPIRA</a:t>
-            </a:r>
-          </a:p>
-        </p:txBody>
-      </p:sp>
-      <p:sp>
-        <p:nvSpPr>
           <p:cNvPr id="16" name="">
             <a:extLst xmlns:a="http://schemas.openxmlformats.org/drawingml/2006/main">
               <a:ext uri="{FF2B5EF4-FFF2-40B4-BE49-F238E27FC236}">
@@ -15951,6 +17136,156 @@
                 <a:cs typeface="Arial"/>
               </a:rPr>
               <a:t>22 of 27</a:t>
+            </a:r>
+          </a:p>
+        </p:txBody>
+      </p:sp>
+      <p:sp>
+        <p:nvSpPr>
+          <p:cNvPr id="19" name="WVU DSPIRA navy band"/>
+          <p:cNvSpPr>
+            <a:spLocks xmlns:a="http://schemas.openxmlformats.org/drawingml/2006/main" noGrp="1"/>
+          </p:cNvSpPr>
+          <p:nvPr/>
+        </p:nvSpPr>
+        <p:spPr>
+          <a:xfrm xmlns:a="http://schemas.openxmlformats.org/drawingml/2006/main">
+            <a:off x="0" y="0"/>
+            <a:ext cx="9144000" cy="323850"/>
+          </a:xfrm>
+          <a:prstGeom xmlns:a="http://schemas.openxmlformats.org/drawingml/2006/main" prst="rect">
+            <a:avLst/>
+          </a:prstGeom>
+          <a:solidFill xmlns:a="http://schemas.openxmlformats.org/drawingml/2006/main">
+            <a:srgbClr val="002855"/>
+          </a:solidFill>
+          <a:ln xmlns:a="http://schemas.openxmlformats.org/drawingml/2006/main" w="0">
+            <a:noFill/>
+          </a:ln>
+        </p:spPr>
+      </p:sp>
+      <p:sp>
+        <p:nvSpPr>
+          <p:cNvPr id="20" name="WVU DSPIRA gold rule"/>
+          <p:cNvSpPr>
+            <a:spLocks xmlns:a="http://schemas.openxmlformats.org/drawingml/2006/main" noGrp="1"/>
+          </p:cNvSpPr>
+          <p:nvPr/>
+        </p:nvSpPr>
+        <p:spPr>
+          <a:xfrm xmlns:a="http://schemas.openxmlformats.org/drawingml/2006/main">
+            <a:off x="0" y="323850"/>
+            <a:ext cx="9144000" cy="19050"/>
+          </a:xfrm>
+          <a:prstGeom xmlns:a="http://schemas.openxmlformats.org/drawingml/2006/main" prst="rect">
+            <a:avLst/>
+          </a:prstGeom>
+          <a:solidFill xmlns:a="http://schemas.openxmlformats.org/drawingml/2006/main">
+            <a:srgbClr val="EEAA00"/>
+          </a:solidFill>
+          <a:ln xmlns:a="http://schemas.openxmlformats.org/drawingml/2006/main" w="0">
+            <a:noFill/>
+          </a:ln>
+        </p:spPr>
+      </p:sp>
+      <p:sp>
+        <p:nvSpPr>
+          <p:cNvPr id="21" name="WVU DSPIRA name"/>
+          <p:cNvSpPr>
+            <a:spLocks xmlns:a="http://schemas.openxmlformats.org/drawingml/2006/main" noGrp="1"/>
+          </p:cNvSpPr>
+          <p:nvPr/>
+        </p:nvSpPr>
+        <p:spPr>
+          <a:xfrm xmlns:a="http://schemas.openxmlformats.org/drawingml/2006/main">
+            <a:off x="228600" y="19050"/>
+            <a:ext cx="2857500" cy="257175"/>
+          </a:xfrm>
+          <a:prstGeom xmlns:a="http://schemas.openxmlformats.org/drawingml/2006/main" prst="rect">
+            <a:avLst/>
+          </a:prstGeom>
+          <a:noFill xmlns:a="http://schemas.openxmlformats.org/drawingml/2006/main"/>
+          <a:ln xmlns:a="http://schemas.openxmlformats.org/drawingml/2006/main" w="0">
+            <a:noFill/>
+          </a:ln>
+        </p:spPr>
+        <p:txBody>
+          <a:bodyPr xmlns:a="http://schemas.openxmlformats.org/drawingml/2006/main">
+            <a:noAutofit/>
+          </a:bodyPr>
+          <a:lstStyle xmlns:a="http://schemas.openxmlformats.org/drawingml/2006/main"/>
+          <a:p xmlns:a="http://schemas.openxmlformats.org/drawingml/2006/main">
+            <a:pPr>
+              <a:defRPr sz="1600" b="1">
+                <a:solidFill>
+                  <a:srgbClr val="FFFFFF"/>
+                </a:solidFill>
+                <a:latin typeface="Arial"/>
+                <a:ea typeface="Arial"/>
+                <a:cs typeface="Arial"/>
+              </a:defRPr>
+            </a:pPr>
+            <a:r>
+              <a:rPr sz="1600" b="1">
+                <a:solidFill>
+                  <a:srgbClr val="FFFFFF"/>
+                </a:solidFill>
+                <a:latin typeface="Arial"/>
+                <a:ea typeface="Arial"/>
+                <a:cs typeface="Arial"/>
+              </a:rPr>
+              <a:t>WVU DSPIRA</a:t>
+            </a:r>
+          </a:p>
+        </p:txBody>
+      </p:sp>
+      <p:sp>
+        <p:nvSpPr>
+          <p:cNvPr id="22" name="WVU DSPIRA university"/>
+          <p:cNvSpPr>
+            <a:spLocks xmlns:a="http://schemas.openxmlformats.org/drawingml/2006/main" noGrp="1"/>
+          </p:cNvSpPr>
+          <p:nvPr/>
+        </p:nvSpPr>
+        <p:spPr>
+          <a:xfrm xmlns:a="http://schemas.openxmlformats.org/drawingml/2006/main">
+            <a:off x="6286500" y="114300"/>
+            <a:ext cx="2628900" cy="171450"/>
+          </a:xfrm>
+          <a:prstGeom xmlns:a="http://schemas.openxmlformats.org/drawingml/2006/main" prst="rect">
+            <a:avLst/>
+          </a:prstGeom>
+          <a:noFill xmlns:a="http://schemas.openxmlformats.org/drawingml/2006/main"/>
+          <a:ln xmlns:a="http://schemas.openxmlformats.org/drawingml/2006/main" w="0">
+            <a:noFill/>
+          </a:ln>
+        </p:spPr>
+        <p:txBody>
+          <a:bodyPr xmlns:a="http://schemas.openxmlformats.org/drawingml/2006/main">
+            <a:noAutofit/>
+          </a:bodyPr>
+          <a:lstStyle xmlns:a="http://schemas.openxmlformats.org/drawingml/2006/main"/>
+          <a:p xmlns:a="http://schemas.openxmlformats.org/drawingml/2006/main">
+            <a:pPr algn="r">
+              <a:defRPr sz="900">
+                <a:solidFill>
+                  <a:srgbClr val="FFFFFF"/>
+                </a:solidFill>
+                <a:latin typeface="Arial"/>
+                <a:ea typeface="Arial"/>
+                <a:cs typeface="Arial"/>
+              </a:defRPr>
+            </a:pPr>
+            <a:r>
+              <a:rPr sz="900">
+                <a:solidFill>
+                  <a:srgbClr val="FFFFFF"/>
+                </a:solidFill>
+                <a:latin typeface="Arial"/>
+                <a:ea typeface="Arial"/>
+                <a:cs typeface="Arial"/>
+              </a:rPr>
+              <a:t>WEST VIRGINIA UNIVERSITY</a:t>
             </a:r>
           </a:p>
         </p:txBody>
@@ -16984,67 +18319,6 @@
       </p:sp>
       <p:sp>
         <p:nvSpPr>
-          <p:cNvPr id="18" name="">
-            <a:extLst xmlns:a="http://schemas.openxmlformats.org/drawingml/2006/main">
-              <a:ext uri="{FF2B5EF4-FFF2-40B4-BE49-F238E27FC236}">
-                <a16:creationId xmlns:a16="http://schemas.microsoft.com/office/drawing/2014/main" id="{18D4B5BE-AE82-4016-A080-80DE34775B2B}"/>
-              </a:ext>
-            </a:extLst>
-          </p:cNvPr>
-          <p:cNvSpPr>
-            <a:spLocks xmlns:a="http://schemas.openxmlformats.org/drawingml/2006/main" noGrp="1"/>
-          </p:cNvSpPr>
-          <p:nvPr/>
-        </p:nvSpPr>
-        <p:spPr>
-          <a:xfrm xmlns:a="http://schemas.openxmlformats.org/drawingml/2006/main">
-            <a:off x="228600" y="76200"/>
-            <a:ext cx="8686800" cy="228600"/>
-          </a:xfrm>
-          <a:prstGeom xmlns:a="http://schemas.openxmlformats.org/drawingml/2006/main" prst="rect">
-            <a:avLst/>
-          </a:prstGeom>
-          <a:noFill xmlns:a="http://schemas.openxmlformats.org/drawingml/2006/main"/>
-          <a:ln xmlns:a="http://schemas.openxmlformats.org/drawingml/2006/main" w="0">
-            <a:noFill/>
-          </a:ln>
-        </p:spPr>
-        <p:txBody>
-          <a:bodyPr xmlns:a="http://schemas.openxmlformats.org/drawingml/2006/main" wrap="none" lIns="0" tIns="0" rIns="0" bIns="0" anchor="t">
-            <a:noAutofit/>
-          </a:bodyPr>
-          <a:lstStyle xmlns:a="http://schemas.openxmlformats.org/drawingml/2006/main"/>
-          <a:p xmlns:a="http://schemas.openxmlformats.org/drawingml/2006/main">
-            <a:pPr>
-              <a:lnSpc>
-                <a:spcPct val="100000"/>
-              </a:lnSpc>
-              <a:buNone/>
-              <a:defRPr sz="1200" b="1" i="0">
-                <a:solidFill>
-                  <a:srgbClr val="002855"/>
-                </a:solidFill>
-                <a:latin typeface="Arial"/>
-                <a:ea typeface="Arial"/>
-                <a:cs typeface="Arial"/>
-              </a:defRPr>
-            </a:pPr>
-            <a:r>
-              <a:rPr sz="1200" b="1" i="0">
-                <a:solidFill>
-                  <a:srgbClr val="002855"/>
-                </a:solidFill>
-                <a:latin typeface="Arial"/>
-                <a:ea typeface="Arial"/>
-                <a:cs typeface="Arial"/>
-              </a:rPr>
-              <a:t>WVU DSPIRA</a:t>
-            </a:r>
-          </a:p>
-        </p:txBody>
-      </p:sp>
-      <p:sp>
-        <p:nvSpPr>
           <p:cNvPr id="19" name="">
             <a:extLst xmlns:a="http://schemas.openxmlformats.org/drawingml/2006/main">
               <a:ext uri="{FF2B5EF4-FFF2-40B4-BE49-F238E27FC236}">
@@ -17161,6 +18435,156 @@
                 <a:cs typeface="Arial"/>
               </a:rPr>
               <a:t>23 of 27</a:t>
+            </a:r>
+          </a:p>
+        </p:txBody>
+      </p:sp>
+      <p:sp>
+        <p:nvSpPr>
+          <p:cNvPr id="22" name="WVU DSPIRA navy band"/>
+          <p:cNvSpPr>
+            <a:spLocks xmlns:a="http://schemas.openxmlformats.org/drawingml/2006/main" noGrp="1"/>
+          </p:cNvSpPr>
+          <p:nvPr/>
+        </p:nvSpPr>
+        <p:spPr>
+          <a:xfrm xmlns:a="http://schemas.openxmlformats.org/drawingml/2006/main">
+            <a:off x="0" y="0"/>
+            <a:ext cx="9144000" cy="323850"/>
+          </a:xfrm>
+          <a:prstGeom xmlns:a="http://schemas.openxmlformats.org/drawingml/2006/main" prst="rect">
+            <a:avLst/>
+          </a:prstGeom>
+          <a:solidFill xmlns:a="http://schemas.openxmlformats.org/drawingml/2006/main">
+            <a:srgbClr val="002855"/>
+          </a:solidFill>
+          <a:ln xmlns:a="http://schemas.openxmlformats.org/drawingml/2006/main" w="0">
+            <a:noFill/>
+          </a:ln>
+        </p:spPr>
+      </p:sp>
+      <p:sp>
+        <p:nvSpPr>
+          <p:cNvPr id="23" name="WVU DSPIRA gold rule"/>
+          <p:cNvSpPr>
+            <a:spLocks xmlns:a="http://schemas.openxmlformats.org/drawingml/2006/main" noGrp="1"/>
+          </p:cNvSpPr>
+          <p:nvPr/>
+        </p:nvSpPr>
+        <p:spPr>
+          <a:xfrm xmlns:a="http://schemas.openxmlformats.org/drawingml/2006/main">
+            <a:off x="0" y="323850"/>
+            <a:ext cx="9144000" cy="19050"/>
+          </a:xfrm>
+          <a:prstGeom xmlns:a="http://schemas.openxmlformats.org/drawingml/2006/main" prst="rect">
+            <a:avLst/>
+          </a:prstGeom>
+          <a:solidFill xmlns:a="http://schemas.openxmlformats.org/drawingml/2006/main">
+            <a:srgbClr val="EEAA00"/>
+          </a:solidFill>
+          <a:ln xmlns:a="http://schemas.openxmlformats.org/drawingml/2006/main" w="0">
+            <a:noFill/>
+          </a:ln>
+        </p:spPr>
+      </p:sp>
+      <p:sp>
+        <p:nvSpPr>
+          <p:cNvPr id="24" name="WVU DSPIRA name"/>
+          <p:cNvSpPr>
+            <a:spLocks xmlns:a="http://schemas.openxmlformats.org/drawingml/2006/main" noGrp="1"/>
+          </p:cNvSpPr>
+          <p:nvPr/>
+        </p:nvSpPr>
+        <p:spPr>
+          <a:xfrm xmlns:a="http://schemas.openxmlformats.org/drawingml/2006/main">
+            <a:off x="228600" y="19050"/>
+            <a:ext cx="2857500" cy="257175"/>
+          </a:xfrm>
+          <a:prstGeom xmlns:a="http://schemas.openxmlformats.org/drawingml/2006/main" prst="rect">
+            <a:avLst/>
+          </a:prstGeom>
+          <a:noFill xmlns:a="http://schemas.openxmlformats.org/drawingml/2006/main"/>
+          <a:ln xmlns:a="http://schemas.openxmlformats.org/drawingml/2006/main" w="0">
+            <a:noFill/>
+          </a:ln>
+        </p:spPr>
+        <p:txBody>
+          <a:bodyPr xmlns:a="http://schemas.openxmlformats.org/drawingml/2006/main">
+            <a:noAutofit/>
+          </a:bodyPr>
+          <a:lstStyle xmlns:a="http://schemas.openxmlformats.org/drawingml/2006/main"/>
+          <a:p xmlns:a="http://schemas.openxmlformats.org/drawingml/2006/main">
+            <a:pPr>
+              <a:defRPr sz="1600" b="1">
+                <a:solidFill>
+                  <a:srgbClr val="FFFFFF"/>
+                </a:solidFill>
+                <a:latin typeface="Arial"/>
+                <a:ea typeface="Arial"/>
+                <a:cs typeface="Arial"/>
+              </a:defRPr>
+            </a:pPr>
+            <a:r>
+              <a:rPr sz="1600" b="1">
+                <a:solidFill>
+                  <a:srgbClr val="FFFFFF"/>
+                </a:solidFill>
+                <a:latin typeface="Arial"/>
+                <a:ea typeface="Arial"/>
+                <a:cs typeface="Arial"/>
+              </a:rPr>
+              <a:t>WVU DSPIRA</a:t>
+            </a:r>
+          </a:p>
+        </p:txBody>
+      </p:sp>
+      <p:sp>
+        <p:nvSpPr>
+          <p:cNvPr id="25" name="WVU DSPIRA university"/>
+          <p:cNvSpPr>
+            <a:spLocks xmlns:a="http://schemas.openxmlformats.org/drawingml/2006/main" noGrp="1"/>
+          </p:cNvSpPr>
+          <p:nvPr/>
+        </p:nvSpPr>
+        <p:spPr>
+          <a:xfrm xmlns:a="http://schemas.openxmlformats.org/drawingml/2006/main">
+            <a:off x="6286500" y="114300"/>
+            <a:ext cx="2628900" cy="171450"/>
+          </a:xfrm>
+          <a:prstGeom xmlns:a="http://schemas.openxmlformats.org/drawingml/2006/main" prst="rect">
+            <a:avLst/>
+          </a:prstGeom>
+          <a:noFill xmlns:a="http://schemas.openxmlformats.org/drawingml/2006/main"/>
+          <a:ln xmlns:a="http://schemas.openxmlformats.org/drawingml/2006/main" w="0">
+            <a:noFill/>
+          </a:ln>
+        </p:spPr>
+        <p:txBody>
+          <a:bodyPr xmlns:a="http://schemas.openxmlformats.org/drawingml/2006/main">
+            <a:noAutofit/>
+          </a:bodyPr>
+          <a:lstStyle xmlns:a="http://schemas.openxmlformats.org/drawingml/2006/main"/>
+          <a:p xmlns:a="http://schemas.openxmlformats.org/drawingml/2006/main">
+            <a:pPr algn="r">
+              <a:defRPr sz="900">
+                <a:solidFill>
+                  <a:srgbClr val="FFFFFF"/>
+                </a:solidFill>
+                <a:latin typeface="Arial"/>
+                <a:ea typeface="Arial"/>
+                <a:cs typeface="Arial"/>
+              </a:defRPr>
+            </a:pPr>
+            <a:r>
+              <a:rPr sz="900">
+                <a:solidFill>
+                  <a:srgbClr val="FFFFFF"/>
+                </a:solidFill>
+                <a:latin typeface="Arial"/>
+                <a:ea typeface="Arial"/>
+                <a:cs typeface="Arial"/>
+              </a:rPr>
+              <a:t>WEST VIRGINIA UNIVERSITY</a:t>
             </a:r>
           </a:p>
         </p:txBody>
@@ -17218,67 +18642,6 @@
       </p:pic>
       <p:sp>
         <p:nvSpPr>
-          <p:cNvPr id="2" name="">
-            <a:extLst xmlns:a="http://schemas.openxmlformats.org/drawingml/2006/main">
-              <a:ext uri="{FF2B5EF4-FFF2-40B4-BE49-F238E27FC236}">
-                <a16:creationId xmlns:a16="http://schemas.microsoft.com/office/drawing/2014/main" id="{99F65E5C-83CB-49A7-AF53-53D259C72127}"/>
-              </a:ext>
-            </a:extLst>
-          </p:cNvPr>
-          <p:cNvSpPr>
-            <a:spLocks xmlns:a="http://schemas.openxmlformats.org/drawingml/2006/main" noGrp="1"/>
-          </p:cNvSpPr>
-          <p:nvPr/>
-        </p:nvSpPr>
-        <p:spPr>
-          <a:xfrm xmlns:a="http://schemas.openxmlformats.org/drawingml/2006/main">
-            <a:off x="228600" y="76200"/>
-            <a:ext cx="8686800" cy="228600"/>
-          </a:xfrm>
-          <a:prstGeom xmlns:a="http://schemas.openxmlformats.org/drawingml/2006/main" prst="rect">
-            <a:avLst/>
-          </a:prstGeom>
-          <a:noFill xmlns:a="http://schemas.openxmlformats.org/drawingml/2006/main"/>
-          <a:ln xmlns:a="http://schemas.openxmlformats.org/drawingml/2006/main" w="0">
-            <a:noFill/>
-          </a:ln>
-        </p:spPr>
-        <p:txBody>
-          <a:bodyPr xmlns:a="http://schemas.openxmlformats.org/drawingml/2006/main" wrap="none" lIns="0" tIns="0" rIns="0" bIns="0" anchor="t">
-            <a:noAutofit/>
-          </a:bodyPr>
-          <a:lstStyle xmlns:a="http://schemas.openxmlformats.org/drawingml/2006/main"/>
-          <a:p xmlns:a="http://schemas.openxmlformats.org/drawingml/2006/main">
-            <a:pPr>
-              <a:lnSpc>
-                <a:spcPct val="100000"/>
-              </a:lnSpc>
-              <a:buNone/>
-              <a:defRPr sz="1200" b="1" i="0">
-                <a:solidFill>
-                  <a:srgbClr val="002855"/>
-                </a:solidFill>
-                <a:latin typeface="Arial"/>
-                <a:ea typeface="Arial"/>
-                <a:cs typeface="Arial"/>
-              </a:defRPr>
-            </a:pPr>
-            <a:r>
-              <a:rPr sz="1200" b="1" i="0">
-                <a:solidFill>
-                  <a:srgbClr val="002855"/>
-                </a:solidFill>
-                <a:latin typeface="Arial"/>
-                <a:ea typeface="Arial"/>
-                <a:cs typeface="Arial"/>
-              </a:rPr>
-              <a:t>WVU DSPIRA</a:t>
-            </a:r>
-          </a:p>
-        </p:txBody>
-      </p:sp>
-      <p:sp>
-        <p:nvSpPr>
           <p:cNvPr id="3" name="">
             <a:extLst xmlns:a="http://schemas.openxmlformats.org/drawingml/2006/main">
               <a:ext uri="{FF2B5EF4-FFF2-40B4-BE49-F238E27FC236}">
@@ -17395,6 +18758,156 @@
                 <a:cs typeface="Arial"/>
               </a:rPr>
               <a:t>24 of 27</a:t>
+            </a:r>
+          </a:p>
+        </p:txBody>
+      </p:sp>
+      <p:sp>
+        <p:nvSpPr>
+          <p:cNvPr id="6" name="WVU DSPIRA navy band"/>
+          <p:cNvSpPr>
+            <a:spLocks xmlns:a="http://schemas.openxmlformats.org/drawingml/2006/main" noGrp="1"/>
+          </p:cNvSpPr>
+          <p:nvPr/>
+        </p:nvSpPr>
+        <p:spPr>
+          <a:xfrm xmlns:a="http://schemas.openxmlformats.org/drawingml/2006/main">
+            <a:off x="0" y="0"/>
+            <a:ext cx="9144000" cy="323850"/>
+          </a:xfrm>
+          <a:prstGeom xmlns:a="http://schemas.openxmlformats.org/drawingml/2006/main" prst="rect">
+            <a:avLst/>
+          </a:prstGeom>
+          <a:solidFill xmlns:a="http://schemas.openxmlformats.org/drawingml/2006/main">
+            <a:srgbClr val="002855"/>
+          </a:solidFill>
+          <a:ln xmlns:a="http://schemas.openxmlformats.org/drawingml/2006/main" w="0">
+            <a:noFill/>
+          </a:ln>
+        </p:spPr>
+      </p:sp>
+      <p:sp>
+        <p:nvSpPr>
+          <p:cNvPr id="7" name="WVU DSPIRA gold rule"/>
+          <p:cNvSpPr>
+            <a:spLocks xmlns:a="http://schemas.openxmlformats.org/drawingml/2006/main" noGrp="1"/>
+          </p:cNvSpPr>
+          <p:nvPr/>
+        </p:nvSpPr>
+        <p:spPr>
+          <a:xfrm xmlns:a="http://schemas.openxmlformats.org/drawingml/2006/main">
+            <a:off x="0" y="323850"/>
+            <a:ext cx="9144000" cy="19050"/>
+          </a:xfrm>
+          <a:prstGeom xmlns:a="http://schemas.openxmlformats.org/drawingml/2006/main" prst="rect">
+            <a:avLst/>
+          </a:prstGeom>
+          <a:solidFill xmlns:a="http://schemas.openxmlformats.org/drawingml/2006/main">
+            <a:srgbClr val="EEAA00"/>
+          </a:solidFill>
+          <a:ln xmlns:a="http://schemas.openxmlformats.org/drawingml/2006/main" w="0">
+            <a:noFill/>
+          </a:ln>
+        </p:spPr>
+      </p:sp>
+      <p:sp>
+        <p:nvSpPr>
+          <p:cNvPr id="8" name="WVU DSPIRA name"/>
+          <p:cNvSpPr>
+            <a:spLocks xmlns:a="http://schemas.openxmlformats.org/drawingml/2006/main" noGrp="1"/>
+          </p:cNvSpPr>
+          <p:nvPr/>
+        </p:nvSpPr>
+        <p:spPr>
+          <a:xfrm xmlns:a="http://schemas.openxmlformats.org/drawingml/2006/main">
+            <a:off x="228600" y="19050"/>
+            <a:ext cx="2857500" cy="257175"/>
+          </a:xfrm>
+          <a:prstGeom xmlns:a="http://schemas.openxmlformats.org/drawingml/2006/main" prst="rect">
+            <a:avLst/>
+          </a:prstGeom>
+          <a:noFill xmlns:a="http://schemas.openxmlformats.org/drawingml/2006/main"/>
+          <a:ln xmlns:a="http://schemas.openxmlformats.org/drawingml/2006/main" w="0">
+            <a:noFill/>
+          </a:ln>
+        </p:spPr>
+        <p:txBody>
+          <a:bodyPr xmlns:a="http://schemas.openxmlformats.org/drawingml/2006/main">
+            <a:noAutofit/>
+          </a:bodyPr>
+          <a:lstStyle xmlns:a="http://schemas.openxmlformats.org/drawingml/2006/main"/>
+          <a:p xmlns:a="http://schemas.openxmlformats.org/drawingml/2006/main">
+            <a:pPr>
+              <a:defRPr sz="1600" b="1">
+                <a:solidFill>
+                  <a:srgbClr val="FFFFFF"/>
+                </a:solidFill>
+                <a:latin typeface="Arial"/>
+                <a:ea typeface="Arial"/>
+                <a:cs typeface="Arial"/>
+              </a:defRPr>
+            </a:pPr>
+            <a:r>
+              <a:rPr sz="1600" b="1">
+                <a:solidFill>
+                  <a:srgbClr val="FFFFFF"/>
+                </a:solidFill>
+                <a:latin typeface="Arial"/>
+                <a:ea typeface="Arial"/>
+                <a:cs typeface="Arial"/>
+              </a:rPr>
+              <a:t>WVU DSPIRA</a:t>
+            </a:r>
+          </a:p>
+        </p:txBody>
+      </p:sp>
+      <p:sp>
+        <p:nvSpPr>
+          <p:cNvPr id="9" name="WVU DSPIRA university"/>
+          <p:cNvSpPr>
+            <a:spLocks xmlns:a="http://schemas.openxmlformats.org/drawingml/2006/main" noGrp="1"/>
+          </p:cNvSpPr>
+          <p:nvPr/>
+        </p:nvSpPr>
+        <p:spPr>
+          <a:xfrm xmlns:a="http://schemas.openxmlformats.org/drawingml/2006/main">
+            <a:off x="6286500" y="114300"/>
+            <a:ext cx="2628900" cy="171450"/>
+          </a:xfrm>
+          <a:prstGeom xmlns:a="http://schemas.openxmlformats.org/drawingml/2006/main" prst="rect">
+            <a:avLst/>
+          </a:prstGeom>
+          <a:noFill xmlns:a="http://schemas.openxmlformats.org/drawingml/2006/main"/>
+          <a:ln xmlns:a="http://schemas.openxmlformats.org/drawingml/2006/main" w="0">
+            <a:noFill/>
+          </a:ln>
+        </p:spPr>
+        <p:txBody>
+          <a:bodyPr xmlns:a="http://schemas.openxmlformats.org/drawingml/2006/main">
+            <a:noAutofit/>
+          </a:bodyPr>
+          <a:lstStyle xmlns:a="http://schemas.openxmlformats.org/drawingml/2006/main"/>
+          <a:p xmlns:a="http://schemas.openxmlformats.org/drawingml/2006/main">
+            <a:pPr algn="r">
+              <a:defRPr sz="900">
+                <a:solidFill>
+                  <a:srgbClr val="FFFFFF"/>
+                </a:solidFill>
+                <a:latin typeface="Arial"/>
+                <a:ea typeface="Arial"/>
+                <a:cs typeface="Arial"/>
+              </a:defRPr>
+            </a:pPr>
+            <a:r>
+              <a:rPr sz="900">
+                <a:solidFill>
+                  <a:srgbClr val="FFFFFF"/>
+                </a:solidFill>
+                <a:latin typeface="Arial"/>
+                <a:ea typeface="Arial"/>
+                <a:cs typeface="Arial"/>
+              </a:rPr>
+              <a:t>WEST VIRGINIA UNIVERSITY</a:t>
             </a:r>
           </a:p>
         </p:txBody>
@@ -18733,67 +20246,6 @@
       </p:sp>
       <p:sp>
         <p:nvSpPr>
-          <p:cNvPr id="23" name="">
-            <a:extLst xmlns:a="http://schemas.openxmlformats.org/drawingml/2006/main">
-              <a:ext uri="{FF2B5EF4-FFF2-40B4-BE49-F238E27FC236}">
-                <a16:creationId xmlns:a16="http://schemas.microsoft.com/office/drawing/2014/main" id="{4F537A89-B2F8-4197-8CB1-B2B902954E02}"/>
-              </a:ext>
-            </a:extLst>
-          </p:cNvPr>
-          <p:cNvSpPr>
-            <a:spLocks xmlns:a="http://schemas.openxmlformats.org/drawingml/2006/main" noGrp="1"/>
-          </p:cNvSpPr>
-          <p:nvPr/>
-        </p:nvSpPr>
-        <p:spPr>
-          <a:xfrm xmlns:a="http://schemas.openxmlformats.org/drawingml/2006/main">
-            <a:off x="228600" y="76200"/>
-            <a:ext cx="8686800" cy="228600"/>
-          </a:xfrm>
-          <a:prstGeom xmlns:a="http://schemas.openxmlformats.org/drawingml/2006/main" prst="rect">
-            <a:avLst/>
-          </a:prstGeom>
-          <a:noFill xmlns:a="http://schemas.openxmlformats.org/drawingml/2006/main"/>
-          <a:ln xmlns:a="http://schemas.openxmlformats.org/drawingml/2006/main" w="0">
-            <a:noFill/>
-          </a:ln>
-        </p:spPr>
-        <p:txBody>
-          <a:bodyPr xmlns:a="http://schemas.openxmlformats.org/drawingml/2006/main" wrap="none" lIns="0" tIns="0" rIns="0" bIns="0" anchor="t">
-            <a:noAutofit/>
-          </a:bodyPr>
-          <a:lstStyle xmlns:a="http://schemas.openxmlformats.org/drawingml/2006/main"/>
-          <a:p xmlns:a="http://schemas.openxmlformats.org/drawingml/2006/main">
-            <a:pPr>
-              <a:lnSpc>
-                <a:spcPct val="100000"/>
-              </a:lnSpc>
-              <a:buNone/>
-              <a:defRPr sz="1200" b="1" i="0">
-                <a:solidFill>
-                  <a:srgbClr val="002855"/>
-                </a:solidFill>
-                <a:latin typeface="Arial"/>
-                <a:ea typeface="Arial"/>
-                <a:cs typeface="Arial"/>
-              </a:defRPr>
-            </a:pPr>
-            <a:r>
-              <a:rPr sz="1200" b="1" i="0">
-                <a:solidFill>
-                  <a:srgbClr val="002855"/>
-                </a:solidFill>
-                <a:latin typeface="Arial"/>
-                <a:ea typeface="Arial"/>
-                <a:cs typeface="Arial"/>
-              </a:rPr>
-              <a:t>WVU DSPIRA</a:t>
-            </a:r>
-          </a:p>
-        </p:txBody>
-      </p:sp>
-      <p:sp>
-        <p:nvSpPr>
           <p:cNvPr id="24" name="">
             <a:extLst xmlns:a="http://schemas.openxmlformats.org/drawingml/2006/main">
               <a:ext uri="{FF2B5EF4-FFF2-40B4-BE49-F238E27FC236}">
@@ -18910,6 +20362,156 @@
                 <a:cs typeface="Arial"/>
               </a:rPr>
               <a:t>25 of 27</a:t>
+            </a:r>
+          </a:p>
+        </p:txBody>
+      </p:sp>
+      <p:sp>
+        <p:nvSpPr>
+          <p:cNvPr id="27" name="WVU DSPIRA navy band"/>
+          <p:cNvSpPr>
+            <a:spLocks xmlns:a="http://schemas.openxmlformats.org/drawingml/2006/main" noGrp="1"/>
+          </p:cNvSpPr>
+          <p:nvPr/>
+        </p:nvSpPr>
+        <p:spPr>
+          <a:xfrm xmlns:a="http://schemas.openxmlformats.org/drawingml/2006/main">
+            <a:off x="0" y="0"/>
+            <a:ext cx="9144000" cy="323850"/>
+          </a:xfrm>
+          <a:prstGeom xmlns:a="http://schemas.openxmlformats.org/drawingml/2006/main" prst="rect">
+            <a:avLst/>
+          </a:prstGeom>
+          <a:solidFill xmlns:a="http://schemas.openxmlformats.org/drawingml/2006/main">
+            <a:srgbClr val="002855"/>
+          </a:solidFill>
+          <a:ln xmlns:a="http://schemas.openxmlformats.org/drawingml/2006/main" w="0">
+            <a:noFill/>
+          </a:ln>
+        </p:spPr>
+      </p:sp>
+      <p:sp>
+        <p:nvSpPr>
+          <p:cNvPr id="28" name="WVU DSPIRA gold rule"/>
+          <p:cNvSpPr>
+            <a:spLocks xmlns:a="http://schemas.openxmlformats.org/drawingml/2006/main" noGrp="1"/>
+          </p:cNvSpPr>
+          <p:nvPr/>
+        </p:nvSpPr>
+        <p:spPr>
+          <a:xfrm xmlns:a="http://schemas.openxmlformats.org/drawingml/2006/main">
+            <a:off x="0" y="323850"/>
+            <a:ext cx="9144000" cy="19050"/>
+          </a:xfrm>
+          <a:prstGeom xmlns:a="http://schemas.openxmlformats.org/drawingml/2006/main" prst="rect">
+            <a:avLst/>
+          </a:prstGeom>
+          <a:solidFill xmlns:a="http://schemas.openxmlformats.org/drawingml/2006/main">
+            <a:srgbClr val="EEAA00"/>
+          </a:solidFill>
+          <a:ln xmlns:a="http://schemas.openxmlformats.org/drawingml/2006/main" w="0">
+            <a:noFill/>
+          </a:ln>
+        </p:spPr>
+      </p:sp>
+      <p:sp>
+        <p:nvSpPr>
+          <p:cNvPr id="29" name="WVU DSPIRA name"/>
+          <p:cNvSpPr>
+            <a:spLocks xmlns:a="http://schemas.openxmlformats.org/drawingml/2006/main" noGrp="1"/>
+          </p:cNvSpPr>
+          <p:nvPr/>
+        </p:nvSpPr>
+        <p:spPr>
+          <a:xfrm xmlns:a="http://schemas.openxmlformats.org/drawingml/2006/main">
+            <a:off x="228600" y="19050"/>
+            <a:ext cx="2857500" cy="257175"/>
+          </a:xfrm>
+          <a:prstGeom xmlns:a="http://schemas.openxmlformats.org/drawingml/2006/main" prst="rect">
+            <a:avLst/>
+          </a:prstGeom>
+          <a:noFill xmlns:a="http://schemas.openxmlformats.org/drawingml/2006/main"/>
+          <a:ln xmlns:a="http://schemas.openxmlformats.org/drawingml/2006/main" w="0">
+            <a:noFill/>
+          </a:ln>
+        </p:spPr>
+        <p:txBody>
+          <a:bodyPr xmlns:a="http://schemas.openxmlformats.org/drawingml/2006/main">
+            <a:noAutofit/>
+          </a:bodyPr>
+          <a:lstStyle xmlns:a="http://schemas.openxmlformats.org/drawingml/2006/main"/>
+          <a:p xmlns:a="http://schemas.openxmlformats.org/drawingml/2006/main">
+            <a:pPr>
+              <a:defRPr sz="1600" b="1">
+                <a:solidFill>
+                  <a:srgbClr val="FFFFFF"/>
+                </a:solidFill>
+                <a:latin typeface="Arial"/>
+                <a:ea typeface="Arial"/>
+                <a:cs typeface="Arial"/>
+              </a:defRPr>
+            </a:pPr>
+            <a:r>
+              <a:rPr sz="1600" b="1">
+                <a:solidFill>
+                  <a:srgbClr val="FFFFFF"/>
+                </a:solidFill>
+                <a:latin typeface="Arial"/>
+                <a:ea typeface="Arial"/>
+                <a:cs typeface="Arial"/>
+              </a:rPr>
+              <a:t>WVU DSPIRA</a:t>
+            </a:r>
+          </a:p>
+        </p:txBody>
+      </p:sp>
+      <p:sp>
+        <p:nvSpPr>
+          <p:cNvPr id="30" name="WVU DSPIRA university"/>
+          <p:cNvSpPr>
+            <a:spLocks xmlns:a="http://schemas.openxmlformats.org/drawingml/2006/main" noGrp="1"/>
+          </p:cNvSpPr>
+          <p:nvPr/>
+        </p:nvSpPr>
+        <p:spPr>
+          <a:xfrm xmlns:a="http://schemas.openxmlformats.org/drawingml/2006/main">
+            <a:off x="6286500" y="114300"/>
+            <a:ext cx="2628900" cy="171450"/>
+          </a:xfrm>
+          <a:prstGeom xmlns:a="http://schemas.openxmlformats.org/drawingml/2006/main" prst="rect">
+            <a:avLst/>
+          </a:prstGeom>
+          <a:noFill xmlns:a="http://schemas.openxmlformats.org/drawingml/2006/main"/>
+          <a:ln xmlns:a="http://schemas.openxmlformats.org/drawingml/2006/main" w="0">
+            <a:noFill/>
+          </a:ln>
+        </p:spPr>
+        <p:txBody>
+          <a:bodyPr xmlns:a="http://schemas.openxmlformats.org/drawingml/2006/main">
+            <a:noAutofit/>
+          </a:bodyPr>
+          <a:lstStyle xmlns:a="http://schemas.openxmlformats.org/drawingml/2006/main"/>
+          <a:p xmlns:a="http://schemas.openxmlformats.org/drawingml/2006/main">
+            <a:pPr algn="r">
+              <a:defRPr sz="900">
+                <a:solidFill>
+                  <a:srgbClr val="FFFFFF"/>
+                </a:solidFill>
+                <a:latin typeface="Arial"/>
+                <a:ea typeface="Arial"/>
+                <a:cs typeface="Arial"/>
+              </a:defRPr>
+            </a:pPr>
+            <a:r>
+              <a:rPr sz="900">
+                <a:solidFill>
+                  <a:srgbClr val="FFFFFF"/>
+                </a:solidFill>
+                <a:latin typeface="Arial"/>
+                <a:ea typeface="Arial"/>
+                <a:cs typeface="Arial"/>
+              </a:rPr>
+              <a:t>WEST VIRGINIA UNIVERSITY</a:t>
             </a:r>
           </a:p>
         </p:txBody>
@@ -19638,67 +21240,6 @@
       </p:sp>
       <p:sp>
         <p:nvSpPr>
-          <p:cNvPr id="13" name="">
-            <a:extLst xmlns:a="http://schemas.openxmlformats.org/drawingml/2006/main">
-              <a:ext uri="{FF2B5EF4-FFF2-40B4-BE49-F238E27FC236}">
-                <a16:creationId xmlns:a16="http://schemas.microsoft.com/office/drawing/2014/main" id="{9A976B6F-7FD3-4C6E-9CAC-BFE61A274C59}"/>
-              </a:ext>
-            </a:extLst>
-          </p:cNvPr>
-          <p:cNvSpPr>
-            <a:spLocks xmlns:a="http://schemas.openxmlformats.org/drawingml/2006/main" noGrp="1"/>
-          </p:cNvSpPr>
-          <p:nvPr/>
-        </p:nvSpPr>
-        <p:spPr>
-          <a:xfrm xmlns:a="http://schemas.openxmlformats.org/drawingml/2006/main">
-            <a:off x="228600" y="76200"/>
-            <a:ext cx="8686800" cy="228600"/>
-          </a:xfrm>
-          <a:prstGeom xmlns:a="http://schemas.openxmlformats.org/drawingml/2006/main" prst="rect">
-            <a:avLst/>
-          </a:prstGeom>
-          <a:noFill xmlns:a="http://schemas.openxmlformats.org/drawingml/2006/main"/>
-          <a:ln xmlns:a="http://schemas.openxmlformats.org/drawingml/2006/main" w="0">
-            <a:noFill/>
-          </a:ln>
-        </p:spPr>
-        <p:txBody>
-          <a:bodyPr xmlns:a="http://schemas.openxmlformats.org/drawingml/2006/main" wrap="none" lIns="0" tIns="0" rIns="0" bIns="0" anchor="t">
-            <a:noAutofit/>
-          </a:bodyPr>
-          <a:lstStyle xmlns:a="http://schemas.openxmlformats.org/drawingml/2006/main"/>
-          <a:p xmlns:a="http://schemas.openxmlformats.org/drawingml/2006/main">
-            <a:pPr>
-              <a:lnSpc>
-                <a:spcPct val="100000"/>
-              </a:lnSpc>
-              <a:buNone/>
-              <a:defRPr sz="1200" b="1" i="0">
-                <a:solidFill>
-                  <a:srgbClr val="002855"/>
-                </a:solidFill>
-                <a:latin typeface="Arial"/>
-                <a:ea typeface="Arial"/>
-                <a:cs typeface="Arial"/>
-              </a:defRPr>
-            </a:pPr>
-            <a:r>
-              <a:rPr sz="1200" b="1" i="0">
-                <a:solidFill>
-                  <a:srgbClr val="002855"/>
-                </a:solidFill>
-                <a:latin typeface="Arial"/>
-                <a:ea typeface="Arial"/>
-                <a:cs typeface="Arial"/>
-              </a:rPr>
-              <a:t>WVU DSPIRA</a:t>
-            </a:r>
-          </a:p>
-        </p:txBody>
-      </p:sp>
-      <p:sp>
-        <p:nvSpPr>
           <p:cNvPr id="14" name="">
             <a:extLst xmlns:a="http://schemas.openxmlformats.org/drawingml/2006/main">
               <a:ext uri="{FF2B5EF4-FFF2-40B4-BE49-F238E27FC236}">
@@ -19815,6 +21356,156 @@
                 <a:cs typeface="Arial"/>
               </a:rPr>
               <a:t>26 of 27</a:t>
+            </a:r>
+          </a:p>
+        </p:txBody>
+      </p:sp>
+      <p:sp>
+        <p:nvSpPr>
+          <p:cNvPr id="17" name="WVU DSPIRA navy band"/>
+          <p:cNvSpPr>
+            <a:spLocks xmlns:a="http://schemas.openxmlformats.org/drawingml/2006/main" noGrp="1"/>
+          </p:cNvSpPr>
+          <p:nvPr/>
+        </p:nvSpPr>
+        <p:spPr>
+          <a:xfrm xmlns:a="http://schemas.openxmlformats.org/drawingml/2006/main">
+            <a:off x="0" y="0"/>
+            <a:ext cx="9144000" cy="323850"/>
+          </a:xfrm>
+          <a:prstGeom xmlns:a="http://schemas.openxmlformats.org/drawingml/2006/main" prst="rect">
+            <a:avLst/>
+          </a:prstGeom>
+          <a:solidFill xmlns:a="http://schemas.openxmlformats.org/drawingml/2006/main">
+            <a:srgbClr val="002855"/>
+          </a:solidFill>
+          <a:ln xmlns:a="http://schemas.openxmlformats.org/drawingml/2006/main" w="0">
+            <a:noFill/>
+          </a:ln>
+        </p:spPr>
+      </p:sp>
+      <p:sp>
+        <p:nvSpPr>
+          <p:cNvPr id="18" name="WVU DSPIRA gold rule"/>
+          <p:cNvSpPr>
+            <a:spLocks xmlns:a="http://schemas.openxmlformats.org/drawingml/2006/main" noGrp="1"/>
+          </p:cNvSpPr>
+          <p:nvPr/>
+        </p:nvSpPr>
+        <p:spPr>
+          <a:xfrm xmlns:a="http://schemas.openxmlformats.org/drawingml/2006/main">
+            <a:off x="0" y="323850"/>
+            <a:ext cx="9144000" cy="19050"/>
+          </a:xfrm>
+          <a:prstGeom xmlns:a="http://schemas.openxmlformats.org/drawingml/2006/main" prst="rect">
+            <a:avLst/>
+          </a:prstGeom>
+          <a:solidFill xmlns:a="http://schemas.openxmlformats.org/drawingml/2006/main">
+            <a:srgbClr val="EEAA00"/>
+          </a:solidFill>
+          <a:ln xmlns:a="http://schemas.openxmlformats.org/drawingml/2006/main" w="0">
+            <a:noFill/>
+          </a:ln>
+        </p:spPr>
+      </p:sp>
+      <p:sp>
+        <p:nvSpPr>
+          <p:cNvPr id="19" name="WVU DSPIRA name"/>
+          <p:cNvSpPr>
+            <a:spLocks xmlns:a="http://schemas.openxmlformats.org/drawingml/2006/main" noGrp="1"/>
+          </p:cNvSpPr>
+          <p:nvPr/>
+        </p:nvSpPr>
+        <p:spPr>
+          <a:xfrm xmlns:a="http://schemas.openxmlformats.org/drawingml/2006/main">
+            <a:off x="228600" y="19050"/>
+            <a:ext cx="2857500" cy="257175"/>
+          </a:xfrm>
+          <a:prstGeom xmlns:a="http://schemas.openxmlformats.org/drawingml/2006/main" prst="rect">
+            <a:avLst/>
+          </a:prstGeom>
+          <a:noFill xmlns:a="http://schemas.openxmlformats.org/drawingml/2006/main"/>
+          <a:ln xmlns:a="http://schemas.openxmlformats.org/drawingml/2006/main" w="0">
+            <a:noFill/>
+          </a:ln>
+        </p:spPr>
+        <p:txBody>
+          <a:bodyPr xmlns:a="http://schemas.openxmlformats.org/drawingml/2006/main">
+            <a:noAutofit/>
+          </a:bodyPr>
+          <a:lstStyle xmlns:a="http://schemas.openxmlformats.org/drawingml/2006/main"/>
+          <a:p xmlns:a="http://schemas.openxmlformats.org/drawingml/2006/main">
+            <a:pPr>
+              <a:defRPr sz="1600" b="1">
+                <a:solidFill>
+                  <a:srgbClr val="FFFFFF"/>
+                </a:solidFill>
+                <a:latin typeface="Arial"/>
+                <a:ea typeface="Arial"/>
+                <a:cs typeface="Arial"/>
+              </a:defRPr>
+            </a:pPr>
+            <a:r>
+              <a:rPr sz="1600" b="1">
+                <a:solidFill>
+                  <a:srgbClr val="FFFFFF"/>
+                </a:solidFill>
+                <a:latin typeface="Arial"/>
+                <a:ea typeface="Arial"/>
+                <a:cs typeface="Arial"/>
+              </a:rPr>
+              <a:t>WVU DSPIRA</a:t>
+            </a:r>
+          </a:p>
+        </p:txBody>
+      </p:sp>
+      <p:sp>
+        <p:nvSpPr>
+          <p:cNvPr id="20" name="WVU DSPIRA university"/>
+          <p:cNvSpPr>
+            <a:spLocks xmlns:a="http://schemas.openxmlformats.org/drawingml/2006/main" noGrp="1"/>
+          </p:cNvSpPr>
+          <p:nvPr/>
+        </p:nvSpPr>
+        <p:spPr>
+          <a:xfrm xmlns:a="http://schemas.openxmlformats.org/drawingml/2006/main">
+            <a:off x="6286500" y="114300"/>
+            <a:ext cx="2628900" cy="171450"/>
+          </a:xfrm>
+          <a:prstGeom xmlns:a="http://schemas.openxmlformats.org/drawingml/2006/main" prst="rect">
+            <a:avLst/>
+          </a:prstGeom>
+          <a:noFill xmlns:a="http://schemas.openxmlformats.org/drawingml/2006/main"/>
+          <a:ln xmlns:a="http://schemas.openxmlformats.org/drawingml/2006/main" w="0">
+            <a:noFill/>
+          </a:ln>
+        </p:spPr>
+        <p:txBody>
+          <a:bodyPr xmlns:a="http://schemas.openxmlformats.org/drawingml/2006/main">
+            <a:noAutofit/>
+          </a:bodyPr>
+          <a:lstStyle xmlns:a="http://schemas.openxmlformats.org/drawingml/2006/main"/>
+          <a:p xmlns:a="http://schemas.openxmlformats.org/drawingml/2006/main">
+            <a:pPr algn="r">
+              <a:defRPr sz="900">
+                <a:solidFill>
+                  <a:srgbClr val="FFFFFF"/>
+                </a:solidFill>
+                <a:latin typeface="Arial"/>
+                <a:ea typeface="Arial"/>
+                <a:cs typeface="Arial"/>
+              </a:defRPr>
+            </a:pPr>
+            <a:r>
+              <a:rPr sz="900">
+                <a:solidFill>
+                  <a:srgbClr val="FFFFFF"/>
+                </a:solidFill>
+                <a:latin typeface="Arial"/>
+                <a:ea typeface="Arial"/>
+                <a:cs typeface="Arial"/>
+              </a:rPr>
+              <a:t>WEST VIRGINIA UNIVERSITY</a:t>
             </a:r>
           </a:p>
         </p:txBody>
@@ -20665,67 +22356,6 @@
       </p:sp>
       <p:sp>
         <p:nvSpPr>
-          <p:cNvPr id="15" name="">
-            <a:extLst xmlns:a="http://schemas.openxmlformats.org/drawingml/2006/main">
-              <a:ext uri="{FF2B5EF4-FFF2-40B4-BE49-F238E27FC236}">
-                <a16:creationId xmlns:a16="http://schemas.microsoft.com/office/drawing/2014/main" id="{7822FB68-230C-41EF-96E2-6E7A961D0852}"/>
-              </a:ext>
-            </a:extLst>
-          </p:cNvPr>
-          <p:cNvSpPr>
-            <a:spLocks xmlns:a="http://schemas.openxmlformats.org/drawingml/2006/main" noGrp="1"/>
-          </p:cNvSpPr>
-          <p:nvPr/>
-        </p:nvSpPr>
-        <p:spPr>
-          <a:xfrm xmlns:a="http://schemas.openxmlformats.org/drawingml/2006/main">
-            <a:off x="228600" y="76200"/>
-            <a:ext cx="8686800" cy="228600"/>
-          </a:xfrm>
-          <a:prstGeom xmlns:a="http://schemas.openxmlformats.org/drawingml/2006/main" prst="rect">
-            <a:avLst/>
-          </a:prstGeom>
-          <a:noFill xmlns:a="http://schemas.openxmlformats.org/drawingml/2006/main"/>
-          <a:ln xmlns:a="http://schemas.openxmlformats.org/drawingml/2006/main" w="0">
-            <a:noFill/>
-          </a:ln>
-        </p:spPr>
-        <p:txBody>
-          <a:bodyPr xmlns:a="http://schemas.openxmlformats.org/drawingml/2006/main" wrap="none" lIns="0" tIns="0" rIns="0" bIns="0" anchor="t">
-            <a:noAutofit/>
-          </a:bodyPr>
-          <a:lstStyle xmlns:a="http://schemas.openxmlformats.org/drawingml/2006/main"/>
-          <a:p xmlns:a="http://schemas.openxmlformats.org/drawingml/2006/main">
-            <a:pPr>
-              <a:lnSpc>
-                <a:spcPct val="100000"/>
-              </a:lnSpc>
-              <a:buNone/>
-              <a:defRPr sz="1200" b="1" i="0">
-                <a:solidFill>
-                  <a:srgbClr val="002855"/>
-                </a:solidFill>
-                <a:latin typeface="Arial"/>
-                <a:ea typeface="Arial"/>
-                <a:cs typeface="Arial"/>
-              </a:defRPr>
-            </a:pPr>
-            <a:r>
-              <a:rPr sz="1200" b="1" i="0">
-                <a:solidFill>
-                  <a:srgbClr val="002855"/>
-                </a:solidFill>
-                <a:latin typeface="Arial"/>
-                <a:ea typeface="Arial"/>
-                <a:cs typeface="Arial"/>
-              </a:rPr>
-              <a:t>WVU DSPIRA</a:t>
-            </a:r>
-          </a:p>
-        </p:txBody>
-      </p:sp>
-      <p:sp>
-        <p:nvSpPr>
           <p:cNvPr id="16" name="">
             <a:extLst xmlns:a="http://schemas.openxmlformats.org/drawingml/2006/main">
               <a:ext uri="{FF2B5EF4-FFF2-40B4-BE49-F238E27FC236}">
@@ -20842,6 +22472,156 @@
                 <a:cs typeface="Arial"/>
               </a:rPr>
               <a:t>27 of 27</a:t>
+            </a:r>
+          </a:p>
+        </p:txBody>
+      </p:sp>
+      <p:sp>
+        <p:nvSpPr>
+          <p:cNvPr id="19" name="WVU DSPIRA navy band"/>
+          <p:cNvSpPr>
+            <a:spLocks xmlns:a="http://schemas.openxmlformats.org/drawingml/2006/main" noGrp="1"/>
+          </p:cNvSpPr>
+          <p:nvPr/>
+        </p:nvSpPr>
+        <p:spPr>
+          <a:xfrm xmlns:a="http://schemas.openxmlformats.org/drawingml/2006/main">
+            <a:off x="0" y="0"/>
+            <a:ext cx="9144000" cy="323850"/>
+          </a:xfrm>
+          <a:prstGeom xmlns:a="http://schemas.openxmlformats.org/drawingml/2006/main" prst="rect">
+            <a:avLst/>
+          </a:prstGeom>
+          <a:solidFill xmlns:a="http://schemas.openxmlformats.org/drawingml/2006/main">
+            <a:srgbClr val="002855"/>
+          </a:solidFill>
+          <a:ln xmlns:a="http://schemas.openxmlformats.org/drawingml/2006/main" w="0">
+            <a:noFill/>
+          </a:ln>
+        </p:spPr>
+      </p:sp>
+      <p:sp>
+        <p:nvSpPr>
+          <p:cNvPr id="20" name="WVU DSPIRA gold rule"/>
+          <p:cNvSpPr>
+            <a:spLocks xmlns:a="http://schemas.openxmlformats.org/drawingml/2006/main" noGrp="1"/>
+          </p:cNvSpPr>
+          <p:nvPr/>
+        </p:nvSpPr>
+        <p:spPr>
+          <a:xfrm xmlns:a="http://schemas.openxmlformats.org/drawingml/2006/main">
+            <a:off x="0" y="323850"/>
+            <a:ext cx="9144000" cy="19050"/>
+          </a:xfrm>
+          <a:prstGeom xmlns:a="http://schemas.openxmlformats.org/drawingml/2006/main" prst="rect">
+            <a:avLst/>
+          </a:prstGeom>
+          <a:solidFill xmlns:a="http://schemas.openxmlformats.org/drawingml/2006/main">
+            <a:srgbClr val="EEAA00"/>
+          </a:solidFill>
+          <a:ln xmlns:a="http://schemas.openxmlformats.org/drawingml/2006/main" w="0">
+            <a:noFill/>
+          </a:ln>
+        </p:spPr>
+      </p:sp>
+      <p:sp>
+        <p:nvSpPr>
+          <p:cNvPr id="21" name="WVU DSPIRA name"/>
+          <p:cNvSpPr>
+            <a:spLocks xmlns:a="http://schemas.openxmlformats.org/drawingml/2006/main" noGrp="1"/>
+          </p:cNvSpPr>
+          <p:nvPr/>
+        </p:nvSpPr>
+        <p:spPr>
+          <a:xfrm xmlns:a="http://schemas.openxmlformats.org/drawingml/2006/main">
+            <a:off x="228600" y="19050"/>
+            <a:ext cx="2857500" cy="257175"/>
+          </a:xfrm>
+          <a:prstGeom xmlns:a="http://schemas.openxmlformats.org/drawingml/2006/main" prst="rect">
+            <a:avLst/>
+          </a:prstGeom>
+          <a:noFill xmlns:a="http://schemas.openxmlformats.org/drawingml/2006/main"/>
+          <a:ln xmlns:a="http://schemas.openxmlformats.org/drawingml/2006/main" w="0">
+            <a:noFill/>
+          </a:ln>
+        </p:spPr>
+        <p:txBody>
+          <a:bodyPr xmlns:a="http://schemas.openxmlformats.org/drawingml/2006/main">
+            <a:noAutofit/>
+          </a:bodyPr>
+          <a:lstStyle xmlns:a="http://schemas.openxmlformats.org/drawingml/2006/main"/>
+          <a:p xmlns:a="http://schemas.openxmlformats.org/drawingml/2006/main">
+            <a:pPr>
+              <a:defRPr sz="1600" b="1">
+                <a:solidFill>
+                  <a:srgbClr val="FFFFFF"/>
+                </a:solidFill>
+                <a:latin typeface="Arial"/>
+                <a:ea typeface="Arial"/>
+                <a:cs typeface="Arial"/>
+              </a:defRPr>
+            </a:pPr>
+            <a:r>
+              <a:rPr sz="1600" b="1">
+                <a:solidFill>
+                  <a:srgbClr val="FFFFFF"/>
+                </a:solidFill>
+                <a:latin typeface="Arial"/>
+                <a:ea typeface="Arial"/>
+                <a:cs typeface="Arial"/>
+              </a:rPr>
+              <a:t>WVU DSPIRA</a:t>
+            </a:r>
+          </a:p>
+        </p:txBody>
+      </p:sp>
+      <p:sp>
+        <p:nvSpPr>
+          <p:cNvPr id="22" name="WVU DSPIRA university"/>
+          <p:cNvSpPr>
+            <a:spLocks xmlns:a="http://schemas.openxmlformats.org/drawingml/2006/main" noGrp="1"/>
+          </p:cNvSpPr>
+          <p:nvPr/>
+        </p:nvSpPr>
+        <p:spPr>
+          <a:xfrm xmlns:a="http://schemas.openxmlformats.org/drawingml/2006/main">
+            <a:off x="6286500" y="114300"/>
+            <a:ext cx="2628900" cy="171450"/>
+          </a:xfrm>
+          <a:prstGeom xmlns:a="http://schemas.openxmlformats.org/drawingml/2006/main" prst="rect">
+            <a:avLst/>
+          </a:prstGeom>
+          <a:noFill xmlns:a="http://schemas.openxmlformats.org/drawingml/2006/main"/>
+          <a:ln xmlns:a="http://schemas.openxmlformats.org/drawingml/2006/main" w="0">
+            <a:noFill/>
+          </a:ln>
+        </p:spPr>
+        <p:txBody>
+          <a:bodyPr xmlns:a="http://schemas.openxmlformats.org/drawingml/2006/main">
+            <a:noAutofit/>
+          </a:bodyPr>
+          <a:lstStyle xmlns:a="http://schemas.openxmlformats.org/drawingml/2006/main"/>
+          <a:p xmlns:a="http://schemas.openxmlformats.org/drawingml/2006/main">
+            <a:pPr algn="r">
+              <a:defRPr sz="900">
+                <a:solidFill>
+                  <a:srgbClr val="FFFFFF"/>
+                </a:solidFill>
+                <a:latin typeface="Arial"/>
+                <a:ea typeface="Arial"/>
+                <a:cs typeface="Arial"/>
+              </a:defRPr>
+            </a:pPr>
+            <a:r>
+              <a:rPr sz="900">
+                <a:solidFill>
+                  <a:srgbClr val="FFFFFF"/>
+                </a:solidFill>
+                <a:latin typeface="Arial"/>
+                <a:ea typeface="Arial"/>
+                <a:cs typeface="Arial"/>
+              </a:rPr>
+              <a:t>WEST VIRGINIA UNIVERSITY</a:t>
             </a:r>
           </a:p>
         </p:txBody>
@@ -21631,67 +23411,6 @@
       </p:sp>
       <p:sp>
         <p:nvSpPr>
-          <p:cNvPr id="14" name="">
-            <a:extLst xmlns:a="http://schemas.openxmlformats.org/drawingml/2006/main">
-              <a:ext uri="{FF2B5EF4-FFF2-40B4-BE49-F238E27FC236}">
-                <a16:creationId xmlns:a16="http://schemas.microsoft.com/office/drawing/2014/main" id="{0DFB59DF-AB9A-4821-939D-CA45BC9B1E21}"/>
-              </a:ext>
-            </a:extLst>
-          </p:cNvPr>
-          <p:cNvSpPr>
-            <a:spLocks xmlns:a="http://schemas.openxmlformats.org/drawingml/2006/main" noGrp="1"/>
-          </p:cNvSpPr>
-          <p:nvPr/>
-        </p:nvSpPr>
-        <p:spPr>
-          <a:xfrm xmlns:a="http://schemas.openxmlformats.org/drawingml/2006/main">
-            <a:off x="228600" y="76200"/>
-            <a:ext cx="8686800" cy="228600"/>
-          </a:xfrm>
-          <a:prstGeom xmlns:a="http://schemas.openxmlformats.org/drawingml/2006/main" prst="rect">
-            <a:avLst/>
-          </a:prstGeom>
-          <a:noFill xmlns:a="http://schemas.openxmlformats.org/drawingml/2006/main"/>
-          <a:ln xmlns:a="http://schemas.openxmlformats.org/drawingml/2006/main" w="0">
-            <a:noFill/>
-          </a:ln>
-        </p:spPr>
-        <p:txBody>
-          <a:bodyPr xmlns:a="http://schemas.openxmlformats.org/drawingml/2006/main" wrap="none" lIns="0" tIns="0" rIns="0" bIns="0" anchor="t">
-            <a:noAutofit/>
-          </a:bodyPr>
-          <a:lstStyle xmlns:a="http://schemas.openxmlformats.org/drawingml/2006/main"/>
-          <a:p xmlns:a="http://schemas.openxmlformats.org/drawingml/2006/main">
-            <a:pPr>
-              <a:lnSpc>
-                <a:spcPct val="100000"/>
-              </a:lnSpc>
-              <a:buNone/>
-              <a:defRPr sz="1200" b="1" i="0">
-                <a:solidFill>
-                  <a:srgbClr val="002855"/>
-                </a:solidFill>
-                <a:latin typeface="Arial"/>
-                <a:ea typeface="Arial"/>
-                <a:cs typeface="Arial"/>
-              </a:defRPr>
-            </a:pPr>
-            <a:r>
-              <a:rPr sz="1200" b="1" i="0">
-                <a:solidFill>
-                  <a:srgbClr val="002855"/>
-                </a:solidFill>
-                <a:latin typeface="Arial"/>
-                <a:ea typeface="Arial"/>
-                <a:cs typeface="Arial"/>
-              </a:rPr>
-              <a:t>WVU DSPIRA</a:t>
-            </a:r>
-          </a:p>
-        </p:txBody>
-      </p:sp>
-      <p:sp>
-        <p:nvSpPr>
           <p:cNvPr id="15" name="">
             <a:extLst xmlns:a="http://schemas.openxmlformats.org/drawingml/2006/main">
               <a:ext uri="{FF2B5EF4-FFF2-40B4-BE49-F238E27FC236}">
@@ -21808,6 +23527,156 @@
                 <a:cs typeface="Arial"/>
               </a:rPr>
               <a:t>3 of 27</a:t>
+            </a:r>
+          </a:p>
+        </p:txBody>
+      </p:sp>
+      <p:sp>
+        <p:nvSpPr>
+          <p:cNvPr id="18" name="WVU DSPIRA navy band"/>
+          <p:cNvSpPr>
+            <a:spLocks xmlns:a="http://schemas.openxmlformats.org/drawingml/2006/main" noGrp="1"/>
+          </p:cNvSpPr>
+          <p:nvPr/>
+        </p:nvSpPr>
+        <p:spPr>
+          <a:xfrm xmlns:a="http://schemas.openxmlformats.org/drawingml/2006/main">
+            <a:off x="0" y="0"/>
+            <a:ext cx="9144000" cy="323850"/>
+          </a:xfrm>
+          <a:prstGeom xmlns:a="http://schemas.openxmlformats.org/drawingml/2006/main" prst="rect">
+            <a:avLst/>
+          </a:prstGeom>
+          <a:solidFill xmlns:a="http://schemas.openxmlformats.org/drawingml/2006/main">
+            <a:srgbClr val="002855"/>
+          </a:solidFill>
+          <a:ln xmlns:a="http://schemas.openxmlformats.org/drawingml/2006/main" w="0">
+            <a:noFill/>
+          </a:ln>
+        </p:spPr>
+      </p:sp>
+      <p:sp>
+        <p:nvSpPr>
+          <p:cNvPr id="19" name="WVU DSPIRA gold rule"/>
+          <p:cNvSpPr>
+            <a:spLocks xmlns:a="http://schemas.openxmlformats.org/drawingml/2006/main" noGrp="1"/>
+          </p:cNvSpPr>
+          <p:nvPr/>
+        </p:nvSpPr>
+        <p:spPr>
+          <a:xfrm xmlns:a="http://schemas.openxmlformats.org/drawingml/2006/main">
+            <a:off x="0" y="323850"/>
+            <a:ext cx="9144000" cy="19050"/>
+          </a:xfrm>
+          <a:prstGeom xmlns:a="http://schemas.openxmlformats.org/drawingml/2006/main" prst="rect">
+            <a:avLst/>
+          </a:prstGeom>
+          <a:solidFill xmlns:a="http://schemas.openxmlformats.org/drawingml/2006/main">
+            <a:srgbClr val="EEAA00"/>
+          </a:solidFill>
+          <a:ln xmlns:a="http://schemas.openxmlformats.org/drawingml/2006/main" w="0">
+            <a:noFill/>
+          </a:ln>
+        </p:spPr>
+      </p:sp>
+      <p:sp>
+        <p:nvSpPr>
+          <p:cNvPr id="20" name="WVU DSPIRA name"/>
+          <p:cNvSpPr>
+            <a:spLocks xmlns:a="http://schemas.openxmlformats.org/drawingml/2006/main" noGrp="1"/>
+          </p:cNvSpPr>
+          <p:nvPr/>
+        </p:nvSpPr>
+        <p:spPr>
+          <a:xfrm xmlns:a="http://schemas.openxmlformats.org/drawingml/2006/main">
+            <a:off x="228600" y="19050"/>
+            <a:ext cx="2857500" cy="257175"/>
+          </a:xfrm>
+          <a:prstGeom xmlns:a="http://schemas.openxmlformats.org/drawingml/2006/main" prst="rect">
+            <a:avLst/>
+          </a:prstGeom>
+          <a:noFill xmlns:a="http://schemas.openxmlformats.org/drawingml/2006/main"/>
+          <a:ln xmlns:a="http://schemas.openxmlformats.org/drawingml/2006/main" w="0">
+            <a:noFill/>
+          </a:ln>
+        </p:spPr>
+        <p:txBody>
+          <a:bodyPr xmlns:a="http://schemas.openxmlformats.org/drawingml/2006/main">
+            <a:noAutofit/>
+          </a:bodyPr>
+          <a:lstStyle xmlns:a="http://schemas.openxmlformats.org/drawingml/2006/main"/>
+          <a:p xmlns:a="http://schemas.openxmlformats.org/drawingml/2006/main">
+            <a:pPr>
+              <a:defRPr sz="1600" b="1">
+                <a:solidFill>
+                  <a:srgbClr val="FFFFFF"/>
+                </a:solidFill>
+                <a:latin typeface="Arial"/>
+                <a:ea typeface="Arial"/>
+                <a:cs typeface="Arial"/>
+              </a:defRPr>
+            </a:pPr>
+            <a:r>
+              <a:rPr sz="1600" b="1">
+                <a:solidFill>
+                  <a:srgbClr val="FFFFFF"/>
+                </a:solidFill>
+                <a:latin typeface="Arial"/>
+                <a:ea typeface="Arial"/>
+                <a:cs typeface="Arial"/>
+              </a:rPr>
+              <a:t>WVU DSPIRA</a:t>
+            </a:r>
+          </a:p>
+        </p:txBody>
+      </p:sp>
+      <p:sp>
+        <p:nvSpPr>
+          <p:cNvPr id="21" name="WVU DSPIRA university"/>
+          <p:cNvSpPr>
+            <a:spLocks xmlns:a="http://schemas.openxmlformats.org/drawingml/2006/main" noGrp="1"/>
+          </p:cNvSpPr>
+          <p:nvPr/>
+        </p:nvSpPr>
+        <p:spPr>
+          <a:xfrm xmlns:a="http://schemas.openxmlformats.org/drawingml/2006/main">
+            <a:off x="6286500" y="114300"/>
+            <a:ext cx="2628900" cy="171450"/>
+          </a:xfrm>
+          <a:prstGeom xmlns:a="http://schemas.openxmlformats.org/drawingml/2006/main" prst="rect">
+            <a:avLst/>
+          </a:prstGeom>
+          <a:noFill xmlns:a="http://schemas.openxmlformats.org/drawingml/2006/main"/>
+          <a:ln xmlns:a="http://schemas.openxmlformats.org/drawingml/2006/main" w="0">
+            <a:noFill/>
+          </a:ln>
+        </p:spPr>
+        <p:txBody>
+          <a:bodyPr xmlns:a="http://schemas.openxmlformats.org/drawingml/2006/main">
+            <a:noAutofit/>
+          </a:bodyPr>
+          <a:lstStyle xmlns:a="http://schemas.openxmlformats.org/drawingml/2006/main"/>
+          <a:p xmlns:a="http://schemas.openxmlformats.org/drawingml/2006/main">
+            <a:pPr algn="r">
+              <a:defRPr sz="900">
+                <a:solidFill>
+                  <a:srgbClr val="FFFFFF"/>
+                </a:solidFill>
+                <a:latin typeface="Arial"/>
+                <a:ea typeface="Arial"/>
+                <a:cs typeface="Arial"/>
+              </a:defRPr>
+            </a:pPr>
+            <a:r>
+              <a:rPr sz="900">
+                <a:solidFill>
+                  <a:srgbClr val="FFFFFF"/>
+                </a:solidFill>
+                <a:latin typeface="Arial"/>
+                <a:ea typeface="Arial"/>
+                <a:cs typeface="Arial"/>
+              </a:rPr>
+              <a:t>WEST VIRGINIA UNIVERSITY</a:t>
             </a:r>
           </a:p>
         </p:txBody>
@@ -23146,67 +25015,6 @@
       </p:sp>
       <p:sp>
         <p:nvSpPr>
-          <p:cNvPr id="23" name="">
-            <a:extLst xmlns:a="http://schemas.openxmlformats.org/drawingml/2006/main">
-              <a:ext uri="{FF2B5EF4-FFF2-40B4-BE49-F238E27FC236}">
-                <a16:creationId xmlns:a16="http://schemas.microsoft.com/office/drawing/2014/main" id="{BAB61644-0596-41A7-BAEA-CDE69E9F87BD}"/>
-              </a:ext>
-            </a:extLst>
-          </p:cNvPr>
-          <p:cNvSpPr>
-            <a:spLocks xmlns:a="http://schemas.openxmlformats.org/drawingml/2006/main" noGrp="1"/>
-          </p:cNvSpPr>
-          <p:nvPr/>
-        </p:nvSpPr>
-        <p:spPr>
-          <a:xfrm xmlns:a="http://schemas.openxmlformats.org/drawingml/2006/main">
-            <a:off x="228600" y="76200"/>
-            <a:ext cx="8686800" cy="228600"/>
-          </a:xfrm>
-          <a:prstGeom xmlns:a="http://schemas.openxmlformats.org/drawingml/2006/main" prst="rect">
-            <a:avLst/>
-          </a:prstGeom>
-          <a:noFill xmlns:a="http://schemas.openxmlformats.org/drawingml/2006/main"/>
-          <a:ln xmlns:a="http://schemas.openxmlformats.org/drawingml/2006/main" w="0">
-            <a:noFill/>
-          </a:ln>
-        </p:spPr>
-        <p:txBody>
-          <a:bodyPr xmlns:a="http://schemas.openxmlformats.org/drawingml/2006/main" wrap="none" lIns="0" tIns="0" rIns="0" bIns="0" anchor="t">
-            <a:noAutofit/>
-          </a:bodyPr>
-          <a:lstStyle xmlns:a="http://schemas.openxmlformats.org/drawingml/2006/main"/>
-          <a:p xmlns:a="http://schemas.openxmlformats.org/drawingml/2006/main">
-            <a:pPr>
-              <a:lnSpc>
-                <a:spcPct val="100000"/>
-              </a:lnSpc>
-              <a:buNone/>
-              <a:defRPr sz="1200" b="1" i="0">
-                <a:solidFill>
-                  <a:srgbClr val="002855"/>
-                </a:solidFill>
-                <a:latin typeface="Arial"/>
-                <a:ea typeface="Arial"/>
-                <a:cs typeface="Arial"/>
-              </a:defRPr>
-            </a:pPr>
-            <a:r>
-              <a:rPr sz="1200" b="1" i="0">
-                <a:solidFill>
-                  <a:srgbClr val="002855"/>
-                </a:solidFill>
-                <a:latin typeface="Arial"/>
-                <a:ea typeface="Arial"/>
-                <a:cs typeface="Arial"/>
-              </a:rPr>
-              <a:t>WVU DSPIRA</a:t>
-            </a:r>
-          </a:p>
-        </p:txBody>
-      </p:sp>
-      <p:sp>
-        <p:nvSpPr>
           <p:cNvPr id="24" name="">
             <a:extLst xmlns:a="http://schemas.openxmlformats.org/drawingml/2006/main">
               <a:ext uri="{FF2B5EF4-FFF2-40B4-BE49-F238E27FC236}">
@@ -23410,6 +25218,156 @@
             <a:noFill/>
           </a:ln>
         </p:spPr>
+      </p:sp>
+      <p:sp>
+        <p:nvSpPr>
+          <p:cNvPr id="30" name="WVU DSPIRA navy band"/>
+          <p:cNvSpPr>
+            <a:spLocks xmlns:a="http://schemas.openxmlformats.org/drawingml/2006/main" noGrp="1"/>
+          </p:cNvSpPr>
+          <p:nvPr/>
+        </p:nvSpPr>
+        <p:spPr>
+          <a:xfrm xmlns:a="http://schemas.openxmlformats.org/drawingml/2006/main">
+            <a:off x="0" y="0"/>
+            <a:ext cx="9144000" cy="323850"/>
+          </a:xfrm>
+          <a:prstGeom xmlns:a="http://schemas.openxmlformats.org/drawingml/2006/main" prst="rect">
+            <a:avLst/>
+          </a:prstGeom>
+          <a:solidFill xmlns:a="http://schemas.openxmlformats.org/drawingml/2006/main">
+            <a:srgbClr val="002855"/>
+          </a:solidFill>
+          <a:ln xmlns:a="http://schemas.openxmlformats.org/drawingml/2006/main" w="0">
+            <a:noFill/>
+          </a:ln>
+        </p:spPr>
+      </p:sp>
+      <p:sp>
+        <p:nvSpPr>
+          <p:cNvPr id="31" name="WVU DSPIRA gold rule"/>
+          <p:cNvSpPr>
+            <a:spLocks xmlns:a="http://schemas.openxmlformats.org/drawingml/2006/main" noGrp="1"/>
+          </p:cNvSpPr>
+          <p:nvPr/>
+        </p:nvSpPr>
+        <p:spPr>
+          <a:xfrm xmlns:a="http://schemas.openxmlformats.org/drawingml/2006/main">
+            <a:off x="0" y="323850"/>
+            <a:ext cx="9144000" cy="19050"/>
+          </a:xfrm>
+          <a:prstGeom xmlns:a="http://schemas.openxmlformats.org/drawingml/2006/main" prst="rect">
+            <a:avLst/>
+          </a:prstGeom>
+          <a:solidFill xmlns:a="http://schemas.openxmlformats.org/drawingml/2006/main">
+            <a:srgbClr val="EEAA00"/>
+          </a:solidFill>
+          <a:ln xmlns:a="http://schemas.openxmlformats.org/drawingml/2006/main" w="0">
+            <a:noFill/>
+          </a:ln>
+        </p:spPr>
+      </p:sp>
+      <p:sp>
+        <p:nvSpPr>
+          <p:cNvPr id="32" name="WVU DSPIRA name"/>
+          <p:cNvSpPr>
+            <a:spLocks xmlns:a="http://schemas.openxmlformats.org/drawingml/2006/main" noGrp="1"/>
+          </p:cNvSpPr>
+          <p:nvPr/>
+        </p:nvSpPr>
+        <p:spPr>
+          <a:xfrm xmlns:a="http://schemas.openxmlformats.org/drawingml/2006/main">
+            <a:off x="228600" y="19050"/>
+            <a:ext cx="2857500" cy="257175"/>
+          </a:xfrm>
+          <a:prstGeom xmlns:a="http://schemas.openxmlformats.org/drawingml/2006/main" prst="rect">
+            <a:avLst/>
+          </a:prstGeom>
+          <a:noFill xmlns:a="http://schemas.openxmlformats.org/drawingml/2006/main"/>
+          <a:ln xmlns:a="http://schemas.openxmlformats.org/drawingml/2006/main" w="0">
+            <a:noFill/>
+          </a:ln>
+        </p:spPr>
+        <p:txBody>
+          <a:bodyPr xmlns:a="http://schemas.openxmlformats.org/drawingml/2006/main">
+            <a:noAutofit/>
+          </a:bodyPr>
+          <a:lstStyle xmlns:a="http://schemas.openxmlformats.org/drawingml/2006/main"/>
+          <a:p xmlns:a="http://schemas.openxmlformats.org/drawingml/2006/main">
+            <a:pPr>
+              <a:defRPr sz="1600" b="1">
+                <a:solidFill>
+                  <a:srgbClr val="FFFFFF"/>
+                </a:solidFill>
+                <a:latin typeface="Arial"/>
+                <a:ea typeface="Arial"/>
+                <a:cs typeface="Arial"/>
+              </a:defRPr>
+            </a:pPr>
+            <a:r>
+              <a:rPr sz="1600" b="1">
+                <a:solidFill>
+                  <a:srgbClr val="FFFFFF"/>
+                </a:solidFill>
+                <a:latin typeface="Arial"/>
+                <a:ea typeface="Arial"/>
+                <a:cs typeface="Arial"/>
+              </a:rPr>
+              <a:t>WVU DSPIRA</a:t>
+            </a:r>
+          </a:p>
+        </p:txBody>
+      </p:sp>
+      <p:sp>
+        <p:nvSpPr>
+          <p:cNvPr id="33" name="WVU DSPIRA university"/>
+          <p:cNvSpPr>
+            <a:spLocks xmlns:a="http://schemas.openxmlformats.org/drawingml/2006/main" noGrp="1"/>
+          </p:cNvSpPr>
+          <p:nvPr/>
+        </p:nvSpPr>
+        <p:spPr>
+          <a:xfrm xmlns:a="http://schemas.openxmlformats.org/drawingml/2006/main">
+            <a:off x="6286500" y="114300"/>
+            <a:ext cx="2628900" cy="171450"/>
+          </a:xfrm>
+          <a:prstGeom xmlns:a="http://schemas.openxmlformats.org/drawingml/2006/main" prst="rect">
+            <a:avLst/>
+          </a:prstGeom>
+          <a:noFill xmlns:a="http://schemas.openxmlformats.org/drawingml/2006/main"/>
+          <a:ln xmlns:a="http://schemas.openxmlformats.org/drawingml/2006/main" w="0">
+            <a:noFill/>
+          </a:ln>
+        </p:spPr>
+        <p:txBody>
+          <a:bodyPr xmlns:a="http://schemas.openxmlformats.org/drawingml/2006/main">
+            <a:noAutofit/>
+          </a:bodyPr>
+          <a:lstStyle xmlns:a="http://schemas.openxmlformats.org/drawingml/2006/main"/>
+          <a:p xmlns:a="http://schemas.openxmlformats.org/drawingml/2006/main">
+            <a:pPr algn="r">
+              <a:defRPr sz="900">
+                <a:solidFill>
+                  <a:srgbClr val="FFFFFF"/>
+                </a:solidFill>
+                <a:latin typeface="Arial"/>
+                <a:ea typeface="Arial"/>
+                <a:cs typeface="Arial"/>
+              </a:defRPr>
+            </a:pPr>
+            <a:r>
+              <a:rPr sz="900">
+                <a:solidFill>
+                  <a:srgbClr val="FFFFFF"/>
+                </a:solidFill>
+                <a:latin typeface="Arial"/>
+                <a:ea typeface="Arial"/>
+                <a:cs typeface="Arial"/>
+              </a:rPr>
+              <a:t>WEST VIRGINIA UNIVERSITY</a:t>
+            </a:r>
+          </a:p>
+        </p:txBody>
       </p:sp>
     </p:spTree>
     <p:extLst>
@@ -24257,67 +26215,6 @@
       </p:sp>
       <p:sp>
         <p:nvSpPr>
-          <p:cNvPr id="15" name="">
-            <a:extLst xmlns:a="http://schemas.openxmlformats.org/drawingml/2006/main">
-              <a:ext uri="{FF2B5EF4-FFF2-40B4-BE49-F238E27FC236}">
-                <a16:creationId xmlns:a16="http://schemas.microsoft.com/office/drawing/2014/main" id="{45D73492-3D7F-40D0-9511-6DF478DAA0D0}"/>
-              </a:ext>
-            </a:extLst>
-          </p:cNvPr>
-          <p:cNvSpPr>
-            <a:spLocks xmlns:a="http://schemas.openxmlformats.org/drawingml/2006/main" noGrp="1"/>
-          </p:cNvSpPr>
-          <p:nvPr/>
-        </p:nvSpPr>
-        <p:spPr>
-          <a:xfrm xmlns:a="http://schemas.openxmlformats.org/drawingml/2006/main">
-            <a:off x="228600" y="76200"/>
-            <a:ext cx="8686800" cy="228600"/>
-          </a:xfrm>
-          <a:prstGeom xmlns:a="http://schemas.openxmlformats.org/drawingml/2006/main" prst="rect">
-            <a:avLst/>
-          </a:prstGeom>
-          <a:noFill xmlns:a="http://schemas.openxmlformats.org/drawingml/2006/main"/>
-          <a:ln xmlns:a="http://schemas.openxmlformats.org/drawingml/2006/main" w="0">
-            <a:noFill/>
-          </a:ln>
-        </p:spPr>
-        <p:txBody>
-          <a:bodyPr xmlns:a="http://schemas.openxmlformats.org/drawingml/2006/main" wrap="none" lIns="0" tIns="0" rIns="0" bIns="0" anchor="t">
-            <a:noAutofit/>
-          </a:bodyPr>
-          <a:lstStyle xmlns:a="http://schemas.openxmlformats.org/drawingml/2006/main"/>
-          <a:p xmlns:a="http://schemas.openxmlformats.org/drawingml/2006/main">
-            <a:pPr>
-              <a:lnSpc>
-                <a:spcPct val="100000"/>
-              </a:lnSpc>
-              <a:buNone/>
-              <a:defRPr sz="1200" b="1" i="0">
-                <a:solidFill>
-                  <a:srgbClr val="002855"/>
-                </a:solidFill>
-                <a:latin typeface="Arial"/>
-                <a:ea typeface="Arial"/>
-                <a:cs typeface="Arial"/>
-              </a:defRPr>
-            </a:pPr>
-            <a:r>
-              <a:rPr sz="1200" b="1" i="0">
-                <a:solidFill>
-                  <a:srgbClr val="002855"/>
-                </a:solidFill>
-                <a:latin typeface="Arial"/>
-                <a:ea typeface="Arial"/>
-                <a:cs typeface="Arial"/>
-              </a:rPr>
-              <a:t>WVU DSPIRA</a:t>
-            </a:r>
-          </a:p>
-        </p:txBody>
-      </p:sp>
-      <p:sp>
-        <p:nvSpPr>
           <p:cNvPr id="16" name="">
             <a:extLst xmlns:a="http://schemas.openxmlformats.org/drawingml/2006/main">
               <a:ext uri="{FF2B5EF4-FFF2-40B4-BE49-F238E27FC236}">
@@ -24434,6 +26331,156 @@
                 <a:cs typeface="Arial"/>
               </a:rPr>
               <a:t>5 of 27</a:t>
+            </a:r>
+          </a:p>
+        </p:txBody>
+      </p:sp>
+      <p:sp>
+        <p:nvSpPr>
+          <p:cNvPr id="19" name="WVU DSPIRA navy band"/>
+          <p:cNvSpPr>
+            <a:spLocks xmlns:a="http://schemas.openxmlformats.org/drawingml/2006/main" noGrp="1"/>
+          </p:cNvSpPr>
+          <p:nvPr/>
+        </p:nvSpPr>
+        <p:spPr>
+          <a:xfrm xmlns:a="http://schemas.openxmlformats.org/drawingml/2006/main">
+            <a:off x="0" y="0"/>
+            <a:ext cx="9144000" cy="323850"/>
+          </a:xfrm>
+          <a:prstGeom xmlns:a="http://schemas.openxmlformats.org/drawingml/2006/main" prst="rect">
+            <a:avLst/>
+          </a:prstGeom>
+          <a:solidFill xmlns:a="http://schemas.openxmlformats.org/drawingml/2006/main">
+            <a:srgbClr val="002855"/>
+          </a:solidFill>
+          <a:ln xmlns:a="http://schemas.openxmlformats.org/drawingml/2006/main" w="0">
+            <a:noFill/>
+          </a:ln>
+        </p:spPr>
+      </p:sp>
+      <p:sp>
+        <p:nvSpPr>
+          <p:cNvPr id="20" name="WVU DSPIRA gold rule"/>
+          <p:cNvSpPr>
+            <a:spLocks xmlns:a="http://schemas.openxmlformats.org/drawingml/2006/main" noGrp="1"/>
+          </p:cNvSpPr>
+          <p:nvPr/>
+        </p:nvSpPr>
+        <p:spPr>
+          <a:xfrm xmlns:a="http://schemas.openxmlformats.org/drawingml/2006/main">
+            <a:off x="0" y="323850"/>
+            <a:ext cx="9144000" cy="19050"/>
+          </a:xfrm>
+          <a:prstGeom xmlns:a="http://schemas.openxmlformats.org/drawingml/2006/main" prst="rect">
+            <a:avLst/>
+          </a:prstGeom>
+          <a:solidFill xmlns:a="http://schemas.openxmlformats.org/drawingml/2006/main">
+            <a:srgbClr val="EEAA00"/>
+          </a:solidFill>
+          <a:ln xmlns:a="http://schemas.openxmlformats.org/drawingml/2006/main" w="0">
+            <a:noFill/>
+          </a:ln>
+        </p:spPr>
+      </p:sp>
+      <p:sp>
+        <p:nvSpPr>
+          <p:cNvPr id="21" name="WVU DSPIRA name"/>
+          <p:cNvSpPr>
+            <a:spLocks xmlns:a="http://schemas.openxmlformats.org/drawingml/2006/main" noGrp="1"/>
+          </p:cNvSpPr>
+          <p:nvPr/>
+        </p:nvSpPr>
+        <p:spPr>
+          <a:xfrm xmlns:a="http://schemas.openxmlformats.org/drawingml/2006/main">
+            <a:off x="228600" y="19050"/>
+            <a:ext cx="2857500" cy="257175"/>
+          </a:xfrm>
+          <a:prstGeom xmlns:a="http://schemas.openxmlformats.org/drawingml/2006/main" prst="rect">
+            <a:avLst/>
+          </a:prstGeom>
+          <a:noFill xmlns:a="http://schemas.openxmlformats.org/drawingml/2006/main"/>
+          <a:ln xmlns:a="http://schemas.openxmlformats.org/drawingml/2006/main" w="0">
+            <a:noFill/>
+          </a:ln>
+        </p:spPr>
+        <p:txBody>
+          <a:bodyPr xmlns:a="http://schemas.openxmlformats.org/drawingml/2006/main">
+            <a:noAutofit/>
+          </a:bodyPr>
+          <a:lstStyle xmlns:a="http://schemas.openxmlformats.org/drawingml/2006/main"/>
+          <a:p xmlns:a="http://schemas.openxmlformats.org/drawingml/2006/main">
+            <a:pPr>
+              <a:defRPr sz="1600" b="1">
+                <a:solidFill>
+                  <a:srgbClr val="FFFFFF"/>
+                </a:solidFill>
+                <a:latin typeface="Arial"/>
+                <a:ea typeface="Arial"/>
+                <a:cs typeface="Arial"/>
+              </a:defRPr>
+            </a:pPr>
+            <a:r>
+              <a:rPr sz="1600" b="1">
+                <a:solidFill>
+                  <a:srgbClr val="FFFFFF"/>
+                </a:solidFill>
+                <a:latin typeface="Arial"/>
+                <a:ea typeface="Arial"/>
+                <a:cs typeface="Arial"/>
+              </a:rPr>
+              <a:t>WVU DSPIRA</a:t>
+            </a:r>
+          </a:p>
+        </p:txBody>
+      </p:sp>
+      <p:sp>
+        <p:nvSpPr>
+          <p:cNvPr id="22" name="WVU DSPIRA university"/>
+          <p:cNvSpPr>
+            <a:spLocks xmlns:a="http://schemas.openxmlformats.org/drawingml/2006/main" noGrp="1"/>
+          </p:cNvSpPr>
+          <p:nvPr/>
+        </p:nvSpPr>
+        <p:spPr>
+          <a:xfrm xmlns:a="http://schemas.openxmlformats.org/drawingml/2006/main">
+            <a:off x="6286500" y="114300"/>
+            <a:ext cx="2628900" cy="171450"/>
+          </a:xfrm>
+          <a:prstGeom xmlns:a="http://schemas.openxmlformats.org/drawingml/2006/main" prst="rect">
+            <a:avLst/>
+          </a:prstGeom>
+          <a:noFill xmlns:a="http://schemas.openxmlformats.org/drawingml/2006/main"/>
+          <a:ln xmlns:a="http://schemas.openxmlformats.org/drawingml/2006/main" w="0">
+            <a:noFill/>
+          </a:ln>
+        </p:spPr>
+        <p:txBody>
+          <a:bodyPr xmlns:a="http://schemas.openxmlformats.org/drawingml/2006/main">
+            <a:noAutofit/>
+          </a:bodyPr>
+          <a:lstStyle xmlns:a="http://schemas.openxmlformats.org/drawingml/2006/main"/>
+          <a:p xmlns:a="http://schemas.openxmlformats.org/drawingml/2006/main">
+            <a:pPr algn="r">
+              <a:defRPr sz="900">
+                <a:solidFill>
+                  <a:srgbClr val="FFFFFF"/>
+                </a:solidFill>
+                <a:latin typeface="Arial"/>
+                <a:ea typeface="Arial"/>
+                <a:cs typeface="Arial"/>
+              </a:defRPr>
+            </a:pPr>
+            <a:r>
+              <a:rPr sz="900">
+                <a:solidFill>
+                  <a:srgbClr val="FFFFFF"/>
+                </a:solidFill>
+                <a:latin typeface="Arial"/>
+                <a:ea typeface="Arial"/>
+                <a:cs typeface="Arial"/>
+              </a:rPr>
+              <a:t>WEST VIRGINIA UNIVERSITY</a:t>
             </a:r>
           </a:p>
         </p:txBody>
@@ -25284,67 +27331,6 @@
       </p:sp>
       <p:sp>
         <p:nvSpPr>
-          <p:cNvPr id="15" name="">
-            <a:extLst xmlns:a="http://schemas.openxmlformats.org/drawingml/2006/main">
-              <a:ext uri="{FF2B5EF4-FFF2-40B4-BE49-F238E27FC236}">
-                <a16:creationId xmlns:a16="http://schemas.microsoft.com/office/drawing/2014/main" id="{AA707659-6407-462A-BE72-FAE80B26F193}"/>
-              </a:ext>
-            </a:extLst>
-          </p:cNvPr>
-          <p:cNvSpPr>
-            <a:spLocks xmlns:a="http://schemas.openxmlformats.org/drawingml/2006/main" noGrp="1"/>
-          </p:cNvSpPr>
-          <p:nvPr/>
-        </p:nvSpPr>
-        <p:spPr>
-          <a:xfrm xmlns:a="http://schemas.openxmlformats.org/drawingml/2006/main">
-            <a:off x="228600" y="76200"/>
-            <a:ext cx="8686800" cy="228600"/>
-          </a:xfrm>
-          <a:prstGeom xmlns:a="http://schemas.openxmlformats.org/drawingml/2006/main" prst="rect">
-            <a:avLst/>
-          </a:prstGeom>
-          <a:noFill xmlns:a="http://schemas.openxmlformats.org/drawingml/2006/main"/>
-          <a:ln xmlns:a="http://schemas.openxmlformats.org/drawingml/2006/main" w="0">
-            <a:noFill/>
-          </a:ln>
-        </p:spPr>
-        <p:txBody>
-          <a:bodyPr xmlns:a="http://schemas.openxmlformats.org/drawingml/2006/main" wrap="none" lIns="0" tIns="0" rIns="0" bIns="0" anchor="t">
-            <a:noAutofit/>
-          </a:bodyPr>
-          <a:lstStyle xmlns:a="http://schemas.openxmlformats.org/drawingml/2006/main"/>
-          <a:p xmlns:a="http://schemas.openxmlformats.org/drawingml/2006/main">
-            <a:pPr>
-              <a:lnSpc>
-                <a:spcPct val="100000"/>
-              </a:lnSpc>
-              <a:buNone/>
-              <a:defRPr sz="1200" b="1" i="0">
-                <a:solidFill>
-                  <a:srgbClr val="002855"/>
-                </a:solidFill>
-                <a:latin typeface="Arial"/>
-                <a:ea typeface="Arial"/>
-                <a:cs typeface="Arial"/>
-              </a:defRPr>
-            </a:pPr>
-            <a:r>
-              <a:rPr sz="1200" b="1" i="0">
-                <a:solidFill>
-                  <a:srgbClr val="002855"/>
-                </a:solidFill>
-                <a:latin typeface="Arial"/>
-                <a:ea typeface="Arial"/>
-                <a:cs typeface="Arial"/>
-              </a:rPr>
-              <a:t>WVU DSPIRA</a:t>
-            </a:r>
-          </a:p>
-        </p:txBody>
-      </p:sp>
-      <p:sp>
-        <p:nvSpPr>
           <p:cNvPr id="16" name="">
             <a:extLst xmlns:a="http://schemas.openxmlformats.org/drawingml/2006/main">
               <a:ext uri="{FF2B5EF4-FFF2-40B4-BE49-F238E27FC236}">
@@ -25461,6 +27447,156 @@
                 <a:cs typeface="Arial"/>
               </a:rPr>
               <a:t>6 of 27</a:t>
+            </a:r>
+          </a:p>
+        </p:txBody>
+      </p:sp>
+      <p:sp>
+        <p:nvSpPr>
+          <p:cNvPr id="19" name="WVU DSPIRA navy band"/>
+          <p:cNvSpPr>
+            <a:spLocks xmlns:a="http://schemas.openxmlformats.org/drawingml/2006/main" noGrp="1"/>
+          </p:cNvSpPr>
+          <p:nvPr/>
+        </p:nvSpPr>
+        <p:spPr>
+          <a:xfrm xmlns:a="http://schemas.openxmlformats.org/drawingml/2006/main">
+            <a:off x="0" y="0"/>
+            <a:ext cx="9144000" cy="323850"/>
+          </a:xfrm>
+          <a:prstGeom xmlns:a="http://schemas.openxmlformats.org/drawingml/2006/main" prst="rect">
+            <a:avLst/>
+          </a:prstGeom>
+          <a:solidFill xmlns:a="http://schemas.openxmlformats.org/drawingml/2006/main">
+            <a:srgbClr val="002855"/>
+          </a:solidFill>
+          <a:ln xmlns:a="http://schemas.openxmlformats.org/drawingml/2006/main" w="0">
+            <a:noFill/>
+          </a:ln>
+        </p:spPr>
+      </p:sp>
+      <p:sp>
+        <p:nvSpPr>
+          <p:cNvPr id="20" name="WVU DSPIRA gold rule"/>
+          <p:cNvSpPr>
+            <a:spLocks xmlns:a="http://schemas.openxmlformats.org/drawingml/2006/main" noGrp="1"/>
+          </p:cNvSpPr>
+          <p:nvPr/>
+        </p:nvSpPr>
+        <p:spPr>
+          <a:xfrm xmlns:a="http://schemas.openxmlformats.org/drawingml/2006/main">
+            <a:off x="0" y="323850"/>
+            <a:ext cx="9144000" cy="19050"/>
+          </a:xfrm>
+          <a:prstGeom xmlns:a="http://schemas.openxmlformats.org/drawingml/2006/main" prst="rect">
+            <a:avLst/>
+          </a:prstGeom>
+          <a:solidFill xmlns:a="http://schemas.openxmlformats.org/drawingml/2006/main">
+            <a:srgbClr val="EEAA00"/>
+          </a:solidFill>
+          <a:ln xmlns:a="http://schemas.openxmlformats.org/drawingml/2006/main" w="0">
+            <a:noFill/>
+          </a:ln>
+        </p:spPr>
+      </p:sp>
+      <p:sp>
+        <p:nvSpPr>
+          <p:cNvPr id="21" name="WVU DSPIRA name"/>
+          <p:cNvSpPr>
+            <a:spLocks xmlns:a="http://schemas.openxmlformats.org/drawingml/2006/main" noGrp="1"/>
+          </p:cNvSpPr>
+          <p:nvPr/>
+        </p:nvSpPr>
+        <p:spPr>
+          <a:xfrm xmlns:a="http://schemas.openxmlformats.org/drawingml/2006/main">
+            <a:off x="228600" y="19050"/>
+            <a:ext cx="2857500" cy="257175"/>
+          </a:xfrm>
+          <a:prstGeom xmlns:a="http://schemas.openxmlformats.org/drawingml/2006/main" prst="rect">
+            <a:avLst/>
+          </a:prstGeom>
+          <a:noFill xmlns:a="http://schemas.openxmlformats.org/drawingml/2006/main"/>
+          <a:ln xmlns:a="http://schemas.openxmlformats.org/drawingml/2006/main" w="0">
+            <a:noFill/>
+          </a:ln>
+        </p:spPr>
+        <p:txBody>
+          <a:bodyPr xmlns:a="http://schemas.openxmlformats.org/drawingml/2006/main">
+            <a:noAutofit/>
+          </a:bodyPr>
+          <a:lstStyle xmlns:a="http://schemas.openxmlformats.org/drawingml/2006/main"/>
+          <a:p xmlns:a="http://schemas.openxmlformats.org/drawingml/2006/main">
+            <a:pPr>
+              <a:defRPr sz="1600" b="1">
+                <a:solidFill>
+                  <a:srgbClr val="FFFFFF"/>
+                </a:solidFill>
+                <a:latin typeface="Arial"/>
+                <a:ea typeface="Arial"/>
+                <a:cs typeface="Arial"/>
+              </a:defRPr>
+            </a:pPr>
+            <a:r>
+              <a:rPr sz="1600" b="1">
+                <a:solidFill>
+                  <a:srgbClr val="FFFFFF"/>
+                </a:solidFill>
+                <a:latin typeface="Arial"/>
+                <a:ea typeface="Arial"/>
+                <a:cs typeface="Arial"/>
+              </a:rPr>
+              <a:t>WVU DSPIRA</a:t>
+            </a:r>
+          </a:p>
+        </p:txBody>
+      </p:sp>
+      <p:sp>
+        <p:nvSpPr>
+          <p:cNvPr id="22" name="WVU DSPIRA university"/>
+          <p:cNvSpPr>
+            <a:spLocks xmlns:a="http://schemas.openxmlformats.org/drawingml/2006/main" noGrp="1"/>
+          </p:cNvSpPr>
+          <p:nvPr/>
+        </p:nvSpPr>
+        <p:spPr>
+          <a:xfrm xmlns:a="http://schemas.openxmlformats.org/drawingml/2006/main">
+            <a:off x="6286500" y="114300"/>
+            <a:ext cx="2628900" cy="171450"/>
+          </a:xfrm>
+          <a:prstGeom xmlns:a="http://schemas.openxmlformats.org/drawingml/2006/main" prst="rect">
+            <a:avLst/>
+          </a:prstGeom>
+          <a:noFill xmlns:a="http://schemas.openxmlformats.org/drawingml/2006/main"/>
+          <a:ln xmlns:a="http://schemas.openxmlformats.org/drawingml/2006/main" w="0">
+            <a:noFill/>
+          </a:ln>
+        </p:spPr>
+        <p:txBody>
+          <a:bodyPr xmlns:a="http://schemas.openxmlformats.org/drawingml/2006/main">
+            <a:noAutofit/>
+          </a:bodyPr>
+          <a:lstStyle xmlns:a="http://schemas.openxmlformats.org/drawingml/2006/main"/>
+          <a:p xmlns:a="http://schemas.openxmlformats.org/drawingml/2006/main">
+            <a:pPr algn="r">
+              <a:defRPr sz="900">
+                <a:solidFill>
+                  <a:srgbClr val="FFFFFF"/>
+                </a:solidFill>
+                <a:latin typeface="Arial"/>
+                <a:ea typeface="Arial"/>
+                <a:cs typeface="Arial"/>
+              </a:defRPr>
+            </a:pPr>
+            <a:r>
+              <a:rPr sz="900">
+                <a:solidFill>
+                  <a:srgbClr val="FFFFFF"/>
+                </a:solidFill>
+                <a:latin typeface="Arial"/>
+                <a:ea typeface="Arial"/>
+                <a:cs typeface="Arial"/>
+              </a:rPr>
+              <a:t>WEST VIRGINIA UNIVERSITY</a:t>
             </a:r>
           </a:p>
         </p:txBody>
@@ -25945,67 +28081,6 @@
       </p:sp>
       <p:sp>
         <p:nvSpPr>
-          <p:cNvPr id="9" name="">
-            <a:extLst xmlns:a="http://schemas.openxmlformats.org/drawingml/2006/main">
-              <a:ext uri="{FF2B5EF4-FFF2-40B4-BE49-F238E27FC236}">
-                <a16:creationId xmlns:a16="http://schemas.microsoft.com/office/drawing/2014/main" id="{96BBC468-A994-42B8-88F7-9FF9F600FE49}"/>
-              </a:ext>
-            </a:extLst>
-          </p:cNvPr>
-          <p:cNvSpPr>
-            <a:spLocks xmlns:a="http://schemas.openxmlformats.org/drawingml/2006/main" noGrp="1"/>
-          </p:cNvSpPr>
-          <p:nvPr/>
-        </p:nvSpPr>
-        <p:spPr>
-          <a:xfrm xmlns:a="http://schemas.openxmlformats.org/drawingml/2006/main">
-            <a:off x="228600" y="76200"/>
-            <a:ext cx="8686800" cy="228600"/>
-          </a:xfrm>
-          <a:prstGeom xmlns:a="http://schemas.openxmlformats.org/drawingml/2006/main" prst="rect">
-            <a:avLst/>
-          </a:prstGeom>
-          <a:noFill xmlns:a="http://schemas.openxmlformats.org/drawingml/2006/main"/>
-          <a:ln xmlns:a="http://schemas.openxmlformats.org/drawingml/2006/main" w="0">
-            <a:noFill/>
-          </a:ln>
-        </p:spPr>
-        <p:txBody>
-          <a:bodyPr xmlns:a="http://schemas.openxmlformats.org/drawingml/2006/main" wrap="none" lIns="0" tIns="0" rIns="0" bIns="0" anchor="t">
-            <a:noAutofit/>
-          </a:bodyPr>
-          <a:lstStyle xmlns:a="http://schemas.openxmlformats.org/drawingml/2006/main"/>
-          <a:p xmlns:a="http://schemas.openxmlformats.org/drawingml/2006/main">
-            <a:pPr>
-              <a:lnSpc>
-                <a:spcPct val="100000"/>
-              </a:lnSpc>
-              <a:buNone/>
-              <a:defRPr sz="1200" b="1" i="0">
-                <a:solidFill>
-                  <a:srgbClr val="002855"/>
-                </a:solidFill>
-                <a:latin typeface="Arial"/>
-                <a:ea typeface="Arial"/>
-                <a:cs typeface="Arial"/>
-              </a:defRPr>
-            </a:pPr>
-            <a:r>
-              <a:rPr sz="1200" b="1" i="0">
-                <a:solidFill>
-                  <a:srgbClr val="002855"/>
-                </a:solidFill>
-                <a:latin typeface="Arial"/>
-                <a:ea typeface="Arial"/>
-                <a:cs typeface="Arial"/>
-              </a:rPr>
-              <a:t>WVU DSPIRA</a:t>
-            </a:r>
-          </a:p>
-        </p:txBody>
-      </p:sp>
-      <p:sp>
-        <p:nvSpPr>
           <p:cNvPr id="10" name="">
             <a:extLst xmlns:a="http://schemas.openxmlformats.org/drawingml/2006/main">
               <a:ext uri="{FF2B5EF4-FFF2-40B4-BE49-F238E27FC236}">
@@ -26122,6 +28197,156 @@
                 <a:cs typeface="Arial"/>
               </a:rPr>
               <a:t>7 of 27</a:t>
+            </a:r>
+          </a:p>
+        </p:txBody>
+      </p:sp>
+      <p:sp>
+        <p:nvSpPr>
+          <p:cNvPr id="13" name="WVU DSPIRA navy band"/>
+          <p:cNvSpPr>
+            <a:spLocks xmlns:a="http://schemas.openxmlformats.org/drawingml/2006/main" noGrp="1"/>
+          </p:cNvSpPr>
+          <p:nvPr/>
+        </p:nvSpPr>
+        <p:spPr>
+          <a:xfrm xmlns:a="http://schemas.openxmlformats.org/drawingml/2006/main">
+            <a:off x="0" y="0"/>
+            <a:ext cx="9144000" cy="323850"/>
+          </a:xfrm>
+          <a:prstGeom xmlns:a="http://schemas.openxmlformats.org/drawingml/2006/main" prst="rect">
+            <a:avLst/>
+          </a:prstGeom>
+          <a:solidFill xmlns:a="http://schemas.openxmlformats.org/drawingml/2006/main">
+            <a:srgbClr val="002855"/>
+          </a:solidFill>
+          <a:ln xmlns:a="http://schemas.openxmlformats.org/drawingml/2006/main" w="0">
+            <a:noFill/>
+          </a:ln>
+        </p:spPr>
+      </p:sp>
+      <p:sp>
+        <p:nvSpPr>
+          <p:cNvPr id="14" name="WVU DSPIRA gold rule"/>
+          <p:cNvSpPr>
+            <a:spLocks xmlns:a="http://schemas.openxmlformats.org/drawingml/2006/main" noGrp="1"/>
+          </p:cNvSpPr>
+          <p:nvPr/>
+        </p:nvSpPr>
+        <p:spPr>
+          <a:xfrm xmlns:a="http://schemas.openxmlformats.org/drawingml/2006/main">
+            <a:off x="0" y="323850"/>
+            <a:ext cx="9144000" cy="19050"/>
+          </a:xfrm>
+          <a:prstGeom xmlns:a="http://schemas.openxmlformats.org/drawingml/2006/main" prst="rect">
+            <a:avLst/>
+          </a:prstGeom>
+          <a:solidFill xmlns:a="http://schemas.openxmlformats.org/drawingml/2006/main">
+            <a:srgbClr val="EEAA00"/>
+          </a:solidFill>
+          <a:ln xmlns:a="http://schemas.openxmlformats.org/drawingml/2006/main" w="0">
+            <a:noFill/>
+          </a:ln>
+        </p:spPr>
+      </p:sp>
+      <p:sp>
+        <p:nvSpPr>
+          <p:cNvPr id="15" name="WVU DSPIRA name"/>
+          <p:cNvSpPr>
+            <a:spLocks xmlns:a="http://schemas.openxmlformats.org/drawingml/2006/main" noGrp="1"/>
+          </p:cNvSpPr>
+          <p:nvPr/>
+        </p:nvSpPr>
+        <p:spPr>
+          <a:xfrm xmlns:a="http://schemas.openxmlformats.org/drawingml/2006/main">
+            <a:off x="228600" y="19050"/>
+            <a:ext cx="2857500" cy="257175"/>
+          </a:xfrm>
+          <a:prstGeom xmlns:a="http://schemas.openxmlformats.org/drawingml/2006/main" prst="rect">
+            <a:avLst/>
+          </a:prstGeom>
+          <a:noFill xmlns:a="http://schemas.openxmlformats.org/drawingml/2006/main"/>
+          <a:ln xmlns:a="http://schemas.openxmlformats.org/drawingml/2006/main" w="0">
+            <a:noFill/>
+          </a:ln>
+        </p:spPr>
+        <p:txBody>
+          <a:bodyPr xmlns:a="http://schemas.openxmlformats.org/drawingml/2006/main">
+            <a:noAutofit/>
+          </a:bodyPr>
+          <a:lstStyle xmlns:a="http://schemas.openxmlformats.org/drawingml/2006/main"/>
+          <a:p xmlns:a="http://schemas.openxmlformats.org/drawingml/2006/main">
+            <a:pPr>
+              <a:defRPr sz="1600" b="1">
+                <a:solidFill>
+                  <a:srgbClr val="FFFFFF"/>
+                </a:solidFill>
+                <a:latin typeface="Arial"/>
+                <a:ea typeface="Arial"/>
+                <a:cs typeface="Arial"/>
+              </a:defRPr>
+            </a:pPr>
+            <a:r>
+              <a:rPr sz="1600" b="1">
+                <a:solidFill>
+                  <a:srgbClr val="FFFFFF"/>
+                </a:solidFill>
+                <a:latin typeface="Arial"/>
+                <a:ea typeface="Arial"/>
+                <a:cs typeface="Arial"/>
+              </a:rPr>
+              <a:t>WVU DSPIRA</a:t>
+            </a:r>
+          </a:p>
+        </p:txBody>
+      </p:sp>
+      <p:sp>
+        <p:nvSpPr>
+          <p:cNvPr id="16" name="WVU DSPIRA university"/>
+          <p:cNvSpPr>
+            <a:spLocks xmlns:a="http://schemas.openxmlformats.org/drawingml/2006/main" noGrp="1"/>
+          </p:cNvSpPr>
+          <p:nvPr/>
+        </p:nvSpPr>
+        <p:spPr>
+          <a:xfrm xmlns:a="http://schemas.openxmlformats.org/drawingml/2006/main">
+            <a:off x="6286500" y="114300"/>
+            <a:ext cx="2628900" cy="171450"/>
+          </a:xfrm>
+          <a:prstGeom xmlns:a="http://schemas.openxmlformats.org/drawingml/2006/main" prst="rect">
+            <a:avLst/>
+          </a:prstGeom>
+          <a:noFill xmlns:a="http://schemas.openxmlformats.org/drawingml/2006/main"/>
+          <a:ln xmlns:a="http://schemas.openxmlformats.org/drawingml/2006/main" w="0">
+            <a:noFill/>
+          </a:ln>
+        </p:spPr>
+        <p:txBody>
+          <a:bodyPr xmlns:a="http://schemas.openxmlformats.org/drawingml/2006/main">
+            <a:noAutofit/>
+          </a:bodyPr>
+          <a:lstStyle xmlns:a="http://schemas.openxmlformats.org/drawingml/2006/main"/>
+          <a:p xmlns:a="http://schemas.openxmlformats.org/drawingml/2006/main">
+            <a:pPr algn="r">
+              <a:defRPr sz="900">
+                <a:solidFill>
+                  <a:srgbClr val="FFFFFF"/>
+                </a:solidFill>
+                <a:latin typeface="Arial"/>
+                <a:ea typeface="Arial"/>
+                <a:cs typeface="Arial"/>
+              </a:defRPr>
+            </a:pPr>
+            <a:r>
+              <a:rPr sz="900">
+                <a:solidFill>
+                  <a:srgbClr val="FFFFFF"/>
+                </a:solidFill>
+                <a:latin typeface="Arial"/>
+                <a:ea typeface="Arial"/>
+                <a:cs typeface="Arial"/>
+              </a:rPr>
+              <a:t>WEST VIRGINIA UNIVERSITY</a:t>
             </a:r>
           </a:p>
         </p:txBody>
@@ -26606,67 +28831,6 @@
       </p:sp>
       <p:sp>
         <p:nvSpPr>
-          <p:cNvPr id="9" name="">
-            <a:extLst xmlns:a="http://schemas.openxmlformats.org/drawingml/2006/main">
-              <a:ext uri="{FF2B5EF4-FFF2-40B4-BE49-F238E27FC236}">
-                <a16:creationId xmlns:a16="http://schemas.microsoft.com/office/drawing/2014/main" id="{65327A40-43D7-44CB-BB30-CAB969FC5DFF}"/>
-              </a:ext>
-            </a:extLst>
-          </p:cNvPr>
-          <p:cNvSpPr>
-            <a:spLocks xmlns:a="http://schemas.openxmlformats.org/drawingml/2006/main" noGrp="1"/>
-          </p:cNvSpPr>
-          <p:nvPr/>
-        </p:nvSpPr>
-        <p:spPr>
-          <a:xfrm xmlns:a="http://schemas.openxmlformats.org/drawingml/2006/main">
-            <a:off x="228600" y="76200"/>
-            <a:ext cx="8686800" cy="228600"/>
-          </a:xfrm>
-          <a:prstGeom xmlns:a="http://schemas.openxmlformats.org/drawingml/2006/main" prst="rect">
-            <a:avLst/>
-          </a:prstGeom>
-          <a:noFill xmlns:a="http://schemas.openxmlformats.org/drawingml/2006/main"/>
-          <a:ln xmlns:a="http://schemas.openxmlformats.org/drawingml/2006/main" w="0">
-            <a:noFill/>
-          </a:ln>
-        </p:spPr>
-        <p:txBody>
-          <a:bodyPr xmlns:a="http://schemas.openxmlformats.org/drawingml/2006/main" wrap="none" lIns="0" tIns="0" rIns="0" bIns="0" anchor="t">
-            <a:noAutofit/>
-          </a:bodyPr>
-          <a:lstStyle xmlns:a="http://schemas.openxmlformats.org/drawingml/2006/main"/>
-          <a:p xmlns:a="http://schemas.openxmlformats.org/drawingml/2006/main">
-            <a:pPr>
-              <a:lnSpc>
-                <a:spcPct val="100000"/>
-              </a:lnSpc>
-              <a:buNone/>
-              <a:defRPr sz="1200" b="1" i="0">
-                <a:solidFill>
-                  <a:srgbClr val="002855"/>
-                </a:solidFill>
-                <a:latin typeface="Arial"/>
-                <a:ea typeface="Arial"/>
-                <a:cs typeface="Arial"/>
-              </a:defRPr>
-            </a:pPr>
-            <a:r>
-              <a:rPr sz="1200" b="1" i="0">
-                <a:solidFill>
-                  <a:srgbClr val="002855"/>
-                </a:solidFill>
-                <a:latin typeface="Arial"/>
-                <a:ea typeface="Arial"/>
-                <a:cs typeface="Arial"/>
-              </a:rPr>
-              <a:t>WVU DSPIRA</a:t>
-            </a:r>
-          </a:p>
-        </p:txBody>
-      </p:sp>
-      <p:sp>
-        <p:nvSpPr>
           <p:cNvPr id="10" name="">
             <a:extLst xmlns:a="http://schemas.openxmlformats.org/drawingml/2006/main">
               <a:ext uri="{FF2B5EF4-FFF2-40B4-BE49-F238E27FC236}">
@@ -26783,6 +28947,156 @@
                 <a:cs typeface="Arial"/>
               </a:rPr>
               <a:t>8 of 27</a:t>
+            </a:r>
+          </a:p>
+        </p:txBody>
+      </p:sp>
+      <p:sp>
+        <p:nvSpPr>
+          <p:cNvPr id="13" name="WVU DSPIRA navy band"/>
+          <p:cNvSpPr>
+            <a:spLocks xmlns:a="http://schemas.openxmlformats.org/drawingml/2006/main" noGrp="1"/>
+          </p:cNvSpPr>
+          <p:nvPr/>
+        </p:nvSpPr>
+        <p:spPr>
+          <a:xfrm xmlns:a="http://schemas.openxmlformats.org/drawingml/2006/main">
+            <a:off x="0" y="0"/>
+            <a:ext cx="9144000" cy="323850"/>
+          </a:xfrm>
+          <a:prstGeom xmlns:a="http://schemas.openxmlformats.org/drawingml/2006/main" prst="rect">
+            <a:avLst/>
+          </a:prstGeom>
+          <a:solidFill xmlns:a="http://schemas.openxmlformats.org/drawingml/2006/main">
+            <a:srgbClr val="002855"/>
+          </a:solidFill>
+          <a:ln xmlns:a="http://schemas.openxmlformats.org/drawingml/2006/main" w="0">
+            <a:noFill/>
+          </a:ln>
+        </p:spPr>
+      </p:sp>
+      <p:sp>
+        <p:nvSpPr>
+          <p:cNvPr id="14" name="WVU DSPIRA gold rule"/>
+          <p:cNvSpPr>
+            <a:spLocks xmlns:a="http://schemas.openxmlformats.org/drawingml/2006/main" noGrp="1"/>
+          </p:cNvSpPr>
+          <p:nvPr/>
+        </p:nvSpPr>
+        <p:spPr>
+          <a:xfrm xmlns:a="http://schemas.openxmlformats.org/drawingml/2006/main">
+            <a:off x="0" y="323850"/>
+            <a:ext cx="9144000" cy="19050"/>
+          </a:xfrm>
+          <a:prstGeom xmlns:a="http://schemas.openxmlformats.org/drawingml/2006/main" prst="rect">
+            <a:avLst/>
+          </a:prstGeom>
+          <a:solidFill xmlns:a="http://schemas.openxmlformats.org/drawingml/2006/main">
+            <a:srgbClr val="EEAA00"/>
+          </a:solidFill>
+          <a:ln xmlns:a="http://schemas.openxmlformats.org/drawingml/2006/main" w="0">
+            <a:noFill/>
+          </a:ln>
+        </p:spPr>
+      </p:sp>
+      <p:sp>
+        <p:nvSpPr>
+          <p:cNvPr id="15" name="WVU DSPIRA name"/>
+          <p:cNvSpPr>
+            <a:spLocks xmlns:a="http://schemas.openxmlformats.org/drawingml/2006/main" noGrp="1"/>
+          </p:cNvSpPr>
+          <p:nvPr/>
+        </p:nvSpPr>
+        <p:spPr>
+          <a:xfrm xmlns:a="http://schemas.openxmlformats.org/drawingml/2006/main">
+            <a:off x="228600" y="19050"/>
+            <a:ext cx="2857500" cy="257175"/>
+          </a:xfrm>
+          <a:prstGeom xmlns:a="http://schemas.openxmlformats.org/drawingml/2006/main" prst="rect">
+            <a:avLst/>
+          </a:prstGeom>
+          <a:noFill xmlns:a="http://schemas.openxmlformats.org/drawingml/2006/main"/>
+          <a:ln xmlns:a="http://schemas.openxmlformats.org/drawingml/2006/main" w="0">
+            <a:noFill/>
+          </a:ln>
+        </p:spPr>
+        <p:txBody>
+          <a:bodyPr xmlns:a="http://schemas.openxmlformats.org/drawingml/2006/main">
+            <a:noAutofit/>
+          </a:bodyPr>
+          <a:lstStyle xmlns:a="http://schemas.openxmlformats.org/drawingml/2006/main"/>
+          <a:p xmlns:a="http://schemas.openxmlformats.org/drawingml/2006/main">
+            <a:pPr>
+              <a:defRPr sz="1600" b="1">
+                <a:solidFill>
+                  <a:srgbClr val="FFFFFF"/>
+                </a:solidFill>
+                <a:latin typeface="Arial"/>
+                <a:ea typeface="Arial"/>
+                <a:cs typeface="Arial"/>
+              </a:defRPr>
+            </a:pPr>
+            <a:r>
+              <a:rPr sz="1600" b="1">
+                <a:solidFill>
+                  <a:srgbClr val="FFFFFF"/>
+                </a:solidFill>
+                <a:latin typeface="Arial"/>
+                <a:ea typeface="Arial"/>
+                <a:cs typeface="Arial"/>
+              </a:rPr>
+              <a:t>WVU DSPIRA</a:t>
+            </a:r>
+          </a:p>
+        </p:txBody>
+      </p:sp>
+      <p:sp>
+        <p:nvSpPr>
+          <p:cNvPr id="16" name="WVU DSPIRA university"/>
+          <p:cNvSpPr>
+            <a:spLocks xmlns:a="http://schemas.openxmlformats.org/drawingml/2006/main" noGrp="1"/>
+          </p:cNvSpPr>
+          <p:nvPr/>
+        </p:nvSpPr>
+        <p:spPr>
+          <a:xfrm xmlns:a="http://schemas.openxmlformats.org/drawingml/2006/main">
+            <a:off x="6286500" y="114300"/>
+            <a:ext cx="2628900" cy="171450"/>
+          </a:xfrm>
+          <a:prstGeom xmlns:a="http://schemas.openxmlformats.org/drawingml/2006/main" prst="rect">
+            <a:avLst/>
+          </a:prstGeom>
+          <a:noFill xmlns:a="http://schemas.openxmlformats.org/drawingml/2006/main"/>
+          <a:ln xmlns:a="http://schemas.openxmlformats.org/drawingml/2006/main" w="0">
+            <a:noFill/>
+          </a:ln>
+        </p:spPr>
+        <p:txBody>
+          <a:bodyPr xmlns:a="http://schemas.openxmlformats.org/drawingml/2006/main">
+            <a:noAutofit/>
+          </a:bodyPr>
+          <a:lstStyle xmlns:a="http://schemas.openxmlformats.org/drawingml/2006/main"/>
+          <a:p xmlns:a="http://schemas.openxmlformats.org/drawingml/2006/main">
+            <a:pPr algn="r">
+              <a:defRPr sz="900">
+                <a:solidFill>
+                  <a:srgbClr val="FFFFFF"/>
+                </a:solidFill>
+                <a:latin typeface="Arial"/>
+                <a:ea typeface="Arial"/>
+                <a:cs typeface="Arial"/>
+              </a:defRPr>
+            </a:pPr>
+            <a:r>
+              <a:rPr sz="900">
+                <a:solidFill>
+                  <a:srgbClr val="FFFFFF"/>
+                </a:solidFill>
+                <a:latin typeface="Arial"/>
+                <a:ea typeface="Arial"/>
+                <a:cs typeface="Arial"/>
+              </a:rPr>
+              <a:t>WEST VIRGINIA UNIVERSITY</a:t>
             </a:r>
           </a:p>
         </p:txBody>
@@ -27145,67 +29459,6 @@
       </p:sp>
       <p:sp>
         <p:nvSpPr>
-          <p:cNvPr id="7" name="">
-            <a:extLst xmlns:a="http://schemas.openxmlformats.org/drawingml/2006/main">
-              <a:ext uri="{FF2B5EF4-FFF2-40B4-BE49-F238E27FC236}">
-                <a16:creationId xmlns:a16="http://schemas.microsoft.com/office/drawing/2014/main" id="{9F0DEA09-B1D5-4197-91F9-FC85A91A79F4}"/>
-              </a:ext>
-            </a:extLst>
-          </p:cNvPr>
-          <p:cNvSpPr>
-            <a:spLocks xmlns:a="http://schemas.openxmlformats.org/drawingml/2006/main" noGrp="1"/>
-          </p:cNvSpPr>
-          <p:nvPr/>
-        </p:nvSpPr>
-        <p:spPr>
-          <a:xfrm xmlns:a="http://schemas.openxmlformats.org/drawingml/2006/main">
-            <a:off x="228600" y="76200"/>
-            <a:ext cx="8686800" cy="228600"/>
-          </a:xfrm>
-          <a:prstGeom xmlns:a="http://schemas.openxmlformats.org/drawingml/2006/main" prst="rect">
-            <a:avLst/>
-          </a:prstGeom>
-          <a:noFill xmlns:a="http://schemas.openxmlformats.org/drawingml/2006/main"/>
-          <a:ln xmlns:a="http://schemas.openxmlformats.org/drawingml/2006/main" w="0">
-            <a:noFill/>
-          </a:ln>
-        </p:spPr>
-        <p:txBody>
-          <a:bodyPr xmlns:a="http://schemas.openxmlformats.org/drawingml/2006/main" wrap="none" lIns="0" tIns="0" rIns="0" bIns="0" anchor="t">
-            <a:noAutofit/>
-          </a:bodyPr>
-          <a:lstStyle xmlns:a="http://schemas.openxmlformats.org/drawingml/2006/main"/>
-          <a:p xmlns:a="http://schemas.openxmlformats.org/drawingml/2006/main">
-            <a:pPr>
-              <a:lnSpc>
-                <a:spcPct val="100000"/>
-              </a:lnSpc>
-              <a:buNone/>
-              <a:defRPr sz="1200" b="1" i="0">
-                <a:solidFill>
-                  <a:srgbClr val="002855"/>
-                </a:solidFill>
-                <a:latin typeface="Arial"/>
-                <a:ea typeface="Arial"/>
-                <a:cs typeface="Arial"/>
-              </a:defRPr>
-            </a:pPr>
-            <a:r>
-              <a:rPr sz="1200" b="1" i="0">
-                <a:solidFill>
-                  <a:srgbClr val="002855"/>
-                </a:solidFill>
-                <a:latin typeface="Arial"/>
-                <a:ea typeface="Arial"/>
-                <a:cs typeface="Arial"/>
-              </a:rPr>
-              <a:t>WVU DSPIRA</a:t>
-            </a:r>
-          </a:p>
-        </p:txBody>
-      </p:sp>
-      <p:sp>
-        <p:nvSpPr>
           <p:cNvPr id="8" name="">
             <a:extLst xmlns:a="http://schemas.openxmlformats.org/drawingml/2006/main">
               <a:ext uri="{FF2B5EF4-FFF2-40B4-BE49-F238E27FC236}">
@@ -27322,6 +29575,156 @@
                 <a:cs typeface="Arial"/>
               </a:rPr>
               <a:t>9 of 27</a:t>
+            </a:r>
+          </a:p>
+        </p:txBody>
+      </p:sp>
+      <p:sp>
+        <p:nvSpPr>
+          <p:cNvPr id="11" name="WVU DSPIRA navy band"/>
+          <p:cNvSpPr>
+            <a:spLocks xmlns:a="http://schemas.openxmlformats.org/drawingml/2006/main" noGrp="1"/>
+          </p:cNvSpPr>
+          <p:nvPr/>
+        </p:nvSpPr>
+        <p:spPr>
+          <a:xfrm xmlns:a="http://schemas.openxmlformats.org/drawingml/2006/main">
+            <a:off x="0" y="0"/>
+            <a:ext cx="9144000" cy="323850"/>
+          </a:xfrm>
+          <a:prstGeom xmlns:a="http://schemas.openxmlformats.org/drawingml/2006/main" prst="rect">
+            <a:avLst/>
+          </a:prstGeom>
+          <a:solidFill xmlns:a="http://schemas.openxmlformats.org/drawingml/2006/main">
+            <a:srgbClr val="002855"/>
+          </a:solidFill>
+          <a:ln xmlns:a="http://schemas.openxmlformats.org/drawingml/2006/main" w="0">
+            <a:noFill/>
+          </a:ln>
+        </p:spPr>
+      </p:sp>
+      <p:sp>
+        <p:nvSpPr>
+          <p:cNvPr id="12" name="WVU DSPIRA gold rule"/>
+          <p:cNvSpPr>
+            <a:spLocks xmlns:a="http://schemas.openxmlformats.org/drawingml/2006/main" noGrp="1"/>
+          </p:cNvSpPr>
+          <p:nvPr/>
+        </p:nvSpPr>
+        <p:spPr>
+          <a:xfrm xmlns:a="http://schemas.openxmlformats.org/drawingml/2006/main">
+            <a:off x="0" y="323850"/>
+            <a:ext cx="9144000" cy="19050"/>
+          </a:xfrm>
+          <a:prstGeom xmlns:a="http://schemas.openxmlformats.org/drawingml/2006/main" prst="rect">
+            <a:avLst/>
+          </a:prstGeom>
+          <a:solidFill xmlns:a="http://schemas.openxmlformats.org/drawingml/2006/main">
+            <a:srgbClr val="EEAA00"/>
+          </a:solidFill>
+          <a:ln xmlns:a="http://schemas.openxmlformats.org/drawingml/2006/main" w="0">
+            <a:noFill/>
+          </a:ln>
+        </p:spPr>
+      </p:sp>
+      <p:sp>
+        <p:nvSpPr>
+          <p:cNvPr id="13" name="WVU DSPIRA name"/>
+          <p:cNvSpPr>
+            <a:spLocks xmlns:a="http://schemas.openxmlformats.org/drawingml/2006/main" noGrp="1"/>
+          </p:cNvSpPr>
+          <p:nvPr/>
+        </p:nvSpPr>
+        <p:spPr>
+          <a:xfrm xmlns:a="http://schemas.openxmlformats.org/drawingml/2006/main">
+            <a:off x="228600" y="19050"/>
+            <a:ext cx="2857500" cy="257175"/>
+          </a:xfrm>
+          <a:prstGeom xmlns:a="http://schemas.openxmlformats.org/drawingml/2006/main" prst="rect">
+            <a:avLst/>
+          </a:prstGeom>
+          <a:noFill xmlns:a="http://schemas.openxmlformats.org/drawingml/2006/main"/>
+          <a:ln xmlns:a="http://schemas.openxmlformats.org/drawingml/2006/main" w="0">
+            <a:noFill/>
+          </a:ln>
+        </p:spPr>
+        <p:txBody>
+          <a:bodyPr xmlns:a="http://schemas.openxmlformats.org/drawingml/2006/main">
+            <a:noAutofit/>
+          </a:bodyPr>
+          <a:lstStyle xmlns:a="http://schemas.openxmlformats.org/drawingml/2006/main"/>
+          <a:p xmlns:a="http://schemas.openxmlformats.org/drawingml/2006/main">
+            <a:pPr>
+              <a:defRPr sz="1600" b="1">
+                <a:solidFill>
+                  <a:srgbClr val="FFFFFF"/>
+                </a:solidFill>
+                <a:latin typeface="Arial"/>
+                <a:ea typeface="Arial"/>
+                <a:cs typeface="Arial"/>
+              </a:defRPr>
+            </a:pPr>
+            <a:r>
+              <a:rPr sz="1600" b="1">
+                <a:solidFill>
+                  <a:srgbClr val="FFFFFF"/>
+                </a:solidFill>
+                <a:latin typeface="Arial"/>
+                <a:ea typeface="Arial"/>
+                <a:cs typeface="Arial"/>
+              </a:rPr>
+              <a:t>WVU DSPIRA</a:t>
+            </a:r>
+          </a:p>
+        </p:txBody>
+      </p:sp>
+      <p:sp>
+        <p:nvSpPr>
+          <p:cNvPr id="14" name="WVU DSPIRA university"/>
+          <p:cNvSpPr>
+            <a:spLocks xmlns:a="http://schemas.openxmlformats.org/drawingml/2006/main" noGrp="1"/>
+          </p:cNvSpPr>
+          <p:nvPr/>
+        </p:nvSpPr>
+        <p:spPr>
+          <a:xfrm xmlns:a="http://schemas.openxmlformats.org/drawingml/2006/main">
+            <a:off x="6286500" y="114300"/>
+            <a:ext cx="2628900" cy="171450"/>
+          </a:xfrm>
+          <a:prstGeom xmlns:a="http://schemas.openxmlformats.org/drawingml/2006/main" prst="rect">
+            <a:avLst/>
+          </a:prstGeom>
+          <a:noFill xmlns:a="http://schemas.openxmlformats.org/drawingml/2006/main"/>
+          <a:ln xmlns:a="http://schemas.openxmlformats.org/drawingml/2006/main" w="0">
+            <a:noFill/>
+          </a:ln>
+        </p:spPr>
+        <p:txBody>
+          <a:bodyPr xmlns:a="http://schemas.openxmlformats.org/drawingml/2006/main">
+            <a:noAutofit/>
+          </a:bodyPr>
+          <a:lstStyle xmlns:a="http://schemas.openxmlformats.org/drawingml/2006/main"/>
+          <a:p xmlns:a="http://schemas.openxmlformats.org/drawingml/2006/main">
+            <a:pPr algn="r">
+              <a:defRPr sz="900">
+                <a:solidFill>
+                  <a:srgbClr val="FFFFFF"/>
+                </a:solidFill>
+                <a:latin typeface="Arial"/>
+                <a:ea typeface="Arial"/>
+                <a:cs typeface="Arial"/>
+              </a:defRPr>
+            </a:pPr>
+            <a:r>
+              <a:rPr sz="900">
+                <a:solidFill>
+                  <a:srgbClr val="FFFFFF"/>
+                </a:solidFill>
+                <a:latin typeface="Arial"/>
+                <a:ea typeface="Arial"/>
+                <a:cs typeface="Arial"/>
+              </a:rPr>
+              <a:t>WEST VIRGINIA UNIVERSITY</a:t>
             </a:r>
           </a:p>
         </p:txBody>

--- a/assets/lessons/lectures/astronomy/gravity.pptx
+++ b/assets/lessons/lectures/astronomy/gravity.pptx
@@ -5673,7 +5673,7 @@
                 <a:ea typeface="Arial"/>
                 <a:cs typeface="Arial"/>
               </a:rPr>
-              <a:t>wvurail.org/dspira</a:t>
+              <a:t>rail.wvu.edu/dspira</a:t>
             </a:r>
           </a:p>
         </p:txBody>
